--- a/CoworkPlaybook/Cowork_教育訓練簡報_製造業進階版.pptx
+++ b/CoworkPlaybook/Cowork_教育訓練簡報_製造業進階版.pptx
@@ -26,9 +26,10 @@
     <p:sldId id="274" r:id="rId20"/>
     <p:sldId id="275" r:id="rId21"/>
     <p:sldId id="276" r:id="rId22"/>
+    <p:sldId id="277" r:id="rId23"/>
   </p:sldIdLst>
   <p:notesMasterIdLst>
-    <p:notesMasterId r:id="rId23"/>
+    <p:notesMasterId r:id="rId24"/>
   </p:notesMasterIdLst>
   <p:sldSz cx="12191695" cy="6858000"/>
   <p:notesSz cx="6858000" cy="12191695"/>
@@ -1690,6 +1691,94 @@
             <a:fld id="{F7021451-1387-4CA6-816F-3879F97B5CBC}" type="slidenum">
               <a:rPr lang="en-US"/>
               <a:t>21</a:t>
+            </a:fld>
+            <a:endParaRPr lang="en-US"/>
+          </a:p>
+        </p:txBody>
+      </p:sp>
+    </p:spTree>
+    <p:extLst>
+      <p:ext uri="{BB962C8B-B14F-4D97-AF65-F5344CB8AC3E}">
+        <p14:creationId xmlns:p14="http://schemas.microsoft.com/office/powerpoint/2010/main" val="1024086991"/>
+      </p:ext>
+    </p:extLst>
+  </p:cSld>
+  <p:clrMapOvr>
+    <a:masterClrMapping/>
+  </p:clrMapOvr>
+</p:notes>
+</file>
+
+<file path=ppt/notesSlides/notesSlide22.xml><?xml version="1.0" encoding="utf-8"?>
+<p:notes xmlns:a="http://schemas.openxmlformats.org/drawingml/2006/main" xmlns:r="http://schemas.openxmlformats.org/officeDocument/2006/relationships" xmlns:p="http://schemas.openxmlformats.org/presentationml/2006/main">
+  <p:cSld>
+    <p:spTree>
+      <p:nvGrpSpPr>
+        <p:cNvPr id="1" name=""/>
+        <p:cNvGrpSpPr/>
+        <p:nvPr/>
+      </p:nvGrpSpPr>
+      <p:grpSpPr>
+        <a:xfrm>
+          <a:off x="0" y="0"/>
+          <a:ext cx="0" cy="0"/>
+          <a:chOff x="0" y="0"/>
+          <a:chExt cx="0" cy="0"/>
+        </a:xfrm>
+      </p:grpSpPr>
+      <p:sp>
+        <p:nvSpPr>
+          <p:cNvPr id="2" name="Slide Image Placeholder 1"/>
+          <p:cNvSpPr>
+            <a:spLocks noGrp="1" noRot="1" noChangeAspect="1"/>
+          </p:cNvSpPr>
+          <p:nvPr>
+            <p:ph type="sldImg"/>
+          </p:nvPr>
+        </p:nvSpPr>
+        <p:spPr/>
+      </p:sp>
+      <p:sp>
+        <p:nvSpPr>
+          <p:cNvPr id="3" name="Notes Placeholder 2"/>
+          <p:cNvSpPr>
+            <a:spLocks noGrp="1"/>
+          </p:cNvSpPr>
+          <p:nvPr>
+            <p:ph type="body" idx="1"/>
+          </p:nvPr>
+        </p:nvSpPr>
+        <p:spPr/>
+        <p:txBody>
+          <a:bodyPr/>
+          <a:lstStyle/>
+          <a:p>
+            <a:r>
+              <a:rPr lang="en-US" dirty="0"/>
+              <a:t/>
+            </a:r>
+            <a:endParaRPr lang="en-US" dirty="0"/>
+          </a:p>
+        </p:txBody>
+      </p:sp>
+      <p:sp>
+        <p:nvSpPr>
+          <p:cNvPr id="4" name="Slide Number Placeholder 3"/>
+          <p:cNvSpPr>
+            <a:spLocks noGrp="1"/>
+          </p:cNvSpPr>
+          <p:nvPr>
+            <p:ph type="sldNum" sz="quarter" idx="10"/>
+          </p:nvPr>
+        </p:nvSpPr>
+        <p:spPr/>
+        <p:txBody>
+          <a:bodyPr/>
+          <a:lstStyle/>
+          <a:p>
+            <a:fld id="{F7021451-1387-4CA6-816F-3879F97B5CBC}" type="slidenum">
+              <a:rPr lang="en-US"/>
+              <a:t>22</a:t>
             </a:fld>
             <a:endParaRPr lang="en-US"/>
           </a:p>
@@ -2951,6 +3040,677 @@
     <p:bg>
       <p:bgPr>
         <a:solidFill>
+          <a:srgbClr val="F7F8FC"/>
+        </a:solidFill>
+      </p:bgPr>
+    </p:bg>
+    <p:spTree>
+      <p:nvGrpSpPr>
+        <p:cNvPr id="1" name=""/>
+        <p:cNvGrpSpPr/>
+        <p:nvPr/>
+      </p:nvGrpSpPr>
+      <p:grpSpPr>
+        <a:xfrm>
+          <a:off x="0" y="0"/>
+          <a:ext cx="0" cy="0"/>
+          <a:chOff x="0" y="0"/>
+          <a:chExt cx="0" cy="0"/>
+        </a:xfrm>
+      </p:grpSpPr>
+      <p:sp>
+        <p:nvSpPr>
+          <p:cNvPr id="2" name="Shape 0"/>
+          <p:cNvSpPr/>
+          <p:nvPr/>
+        </p:nvSpPr>
+        <p:spPr>
+          <a:xfrm>
+            <a:off x="640080" y="566928"/>
+            <a:ext cx="384048" cy="128016"/>
+          </a:xfrm>
+          <a:prstGeom prst="rect">
+            <a:avLst/>
+          </a:prstGeom>
+          <a:solidFill>
+            <a:srgbClr val="B1420A"/>
+          </a:solidFill>
+          <a:ln/>
+        </p:spPr>
+      </p:sp>
+      <p:sp>
+        <p:nvSpPr>
+          <p:cNvPr id="3" name="Text 1"/>
+          <p:cNvSpPr/>
+          <p:nvPr/>
+        </p:nvSpPr>
+        <p:spPr>
+          <a:xfrm>
+            <a:off x="1143000" y="457200"/>
+            <a:ext cx="8229600" cy="310896"/>
+          </a:xfrm>
+          <a:prstGeom prst="rect">
+            <a:avLst/>
+          </a:prstGeom>
+          <a:noFill/>
+          <a:ln/>
+        </p:spPr>
+        <p:txBody>
+          <a:bodyPr wrap="square" rtlCol="0" anchor="ctr"/>
+          <a:lstStyle/>
+          <a:p>
+            <a:pPr indent="0" marL="0">
+              <a:buNone/>
+            </a:pPr>
+            <a:r>
+              <a:rPr lang="en-US" sz="1200" b="1" spc="200" kern="0" dirty="0">
+                <a:solidFill>
+                  <a:srgbClr val="B1420A"/>
+                </a:solidFill>
+                <a:latin typeface="Microsoft JhengHei" pitchFamily="34" charset="0"/>
+                <a:ea typeface="Microsoft JhengHei" pitchFamily="34" charset="-122"/>
+                <a:cs typeface="Microsoft JhengHei" pitchFamily="34" charset="-120"/>
+              </a:rPr>
+              <a:t>情境 01 · 實機示範</a:t>
+            </a:r>
+            <a:endParaRPr lang="en-US" sz="1200" dirty="0"/>
+          </a:p>
+        </p:txBody>
+      </p:sp>
+      <p:sp>
+        <p:nvSpPr>
+          <p:cNvPr id="4" name="Text 2"/>
+          <p:cNvSpPr/>
+          <p:nvPr/>
+        </p:nvSpPr>
+        <p:spPr>
+          <a:xfrm>
+            <a:off x="640080" y="786384"/>
+            <a:ext cx="10972800" cy="640080"/>
+          </a:xfrm>
+          <a:prstGeom prst="rect">
+            <a:avLst/>
+          </a:prstGeom>
+          <a:noFill/>
+          <a:ln/>
+        </p:spPr>
+        <p:txBody>
+          <a:bodyPr wrap="square" rtlCol="0" anchor="ctr"/>
+          <a:lstStyle/>
+          <a:p>
+            <a:pPr indent="0" marL="0">
+              <a:buNone/>
+            </a:pPr>
+            <a:r>
+              <a:rPr lang="en-US" sz="3000" b="1" dirty="0">
+                <a:solidFill>
+                  <a:srgbClr val="1E2235"/>
+                </a:solidFill>
+                <a:latin typeface="Microsoft JhengHei" pitchFamily="34" charset="0"/>
+                <a:ea typeface="Microsoft JhengHei" pitchFamily="34" charset="-122"/>
+                <a:cs typeface="Microsoft JhengHei" pitchFamily="34" charset="-120"/>
+              </a:rPr>
+              <a:t>看 Cowork 怎麼做、產出什麼</a:t>
+            </a:r>
+            <a:endParaRPr lang="en-US" sz="3000" dirty="0"/>
+          </a:p>
+        </p:txBody>
+      </p:sp>
+      <p:sp>
+        <p:nvSpPr>
+          <p:cNvPr id="5" name="Shape 3"/>
+          <p:cNvSpPr/>
+          <p:nvPr/>
+        </p:nvSpPr>
+        <p:spPr>
+          <a:xfrm>
+            <a:off x="585216" y="1773936"/>
+            <a:ext cx="5184648" cy="3433186"/>
+          </a:xfrm>
+          <a:prstGeom prst="rect">
+            <a:avLst/>
+          </a:prstGeom>
+          <a:solidFill>
+            <a:srgbClr val="FFFFFF"/>
+          </a:solidFill>
+          <a:ln w="12700">
+            <a:solidFill>
+              <a:srgbClr val="E4E7F2"/>
+            </a:solidFill>
+            <a:prstDash val="solid"/>
+          </a:ln>
+          <a:effectLst>
+            <a:outerShdw sx="100000" sy="100000" kx="0" ky="0" algn="bl" rotWithShape="0" blurRad="114300" dist="38100" dir="5400000">
+              <a:srgbClr val="8A90B5">
+                <a:alpha val="22000"/>
+              </a:srgbClr>
+            </a:outerShdw>
+          </a:effectLst>
+        </p:spPr>
+      </p:sp>
+      <p:pic>
+        <p:nvPicPr>
+          <p:cNvPr id="6" name="Image 0" descr="C:\temp\CoworkLab\v2\_working\screenshots\mfgx1_01_input.png">    </p:cNvPr>
+          <p:cNvPicPr>
+            <a:picLocks noChangeAspect="1"/>
+          </p:cNvPicPr>
+          <p:nvPr/>
+        </p:nvPicPr>
+        <p:blipFill>
+          <a:blip r:embed="rId1"/>
+          <a:stretch>
+            <a:fillRect/>
+          </a:stretch>
+        </p:blipFill>
+        <p:spPr>
+          <a:xfrm>
+            <a:off x="640080" y="1828800"/>
+            <a:ext cx="5074920" cy="3323458"/>
+          </a:xfrm>
+          <a:prstGeom prst="rect">
+            <a:avLst/>
+          </a:prstGeom>
+        </p:spPr>
+      </p:pic>
+      <p:sp>
+        <p:nvSpPr>
+          <p:cNvPr id="7" name="Text 4"/>
+          <p:cNvSpPr/>
+          <p:nvPr/>
+        </p:nvSpPr>
+        <p:spPr>
+          <a:xfrm>
+            <a:off x="640080" y="5261986"/>
+            <a:ext cx="5074920" cy="320040"/>
+          </a:xfrm>
+          <a:prstGeom prst="rect">
+            <a:avLst/>
+          </a:prstGeom>
+          <a:noFill/>
+          <a:ln/>
+        </p:spPr>
+        <p:txBody>
+          <a:bodyPr wrap="square" rtlCol="0" anchor="ctr"/>
+          <a:lstStyle/>
+          <a:p>
+            <a:pPr algn="ctr" indent="0" marL="0">
+              <a:buNone/>
+            </a:pPr>
+            <a:r>
+              <a:rPr lang="en-US" sz="1350" b="1" dirty="0">
+                <a:solidFill>
+                  <a:srgbClr val="B1420A"/>
+                </a:solidFill>
+                <a:latin typeface="Microsoft JhengHei" pitchFamily="34" charset="0"/>
+                <a:ea typeface="Microsoft JhengHei" pitchFamily="34" charset="-122"/>
+                <a:cs typeface="Microsoft JhengHei" pitchFamily="34" charset="-120"/>
+              </a:rPr>
+              <a:t>① 你的輸入與指令</a:t>
+            </a:r>
+            <a:endParaRPr lang="en-US" sz="1350" dirty="0"/>
+          </a:p>
+        </p:txBody>
+      </p:sp>
+      <p:sp>
+        <p:nvSpPr>
+          <p:cNvPr id="8" name="Shape 5"/>
+          <p:cNvSpPr/>
+          <p:nvPr/>
+        </p:nvSpPr>
+        <p:spPr>
+          <a:xfrm>
+            <a:off x="6163056" y="1773936"/>
+            <a:ext cx="5184648" cy="3433186"/>
+          </a:xfrm>
+          <a:prstGeom prst="rect">
+            <a:avLst/>
+          </a:prstGeom>
+          <a:solidFill>
+            <a:srgbClr val="FFFFFF"/>
+          </a:solidFill>
+          <a:ln w="12700">
+            <a:solidFill>
+              <a:srgbClr val="E4E7F2"/>
+            </a:solidFill>
+            <a:prstDash val="solid"/>
+          </a:ln>
+          <a:effectLst>
+            <a:outerShdw sx="100000" sy="100000" kx="0" ky="0" algn="bl" rotWithShape="0" blurRad="114300" dist="38100" dir="5400000">
+              <a:srgbClr val="8A90B5">
+                <a:alpha val="22000"/>
+              </a:srgbClr>
+            </a:outerShdw>
+          </a:effectLst>
+        </p:spPr>
+      </p:sp>
+      <p:pic>
+        <p:nvPicPr>
+          <p:cNvPr id="9" name="Image 1" descr="C:\temp\CoworkLab\v2\_working\screenshots\mfgx1_06_done.png">    </p:cNvPr>
+          <p:cNvPicPr>
+            <a:picLocks noChangeAspect="1"/>
+          </p:cNvPicPr>
+          <p:nvPr/>
+        </p:nvPicPr>
+        <p:blipFill>
+          <a:blip r:embed="rId2"/>
+          <a:stretch>
+            <a:fillRect/>
+          </a:stretch>
+        </p:blipFill>
+        <p:spPr>
+          <a:xfrm>
+            <a:off x="6217920" y="1828800"/>
+            <a:ext cx="5074920" cy="3323458"/>
+          </a:xfrm>
+          <a:prstGeom prst="rect">
+            <a:avLst/>
+          </a:prstGeom>
+        </p:spPr>
+      </p:pic>
+      <p:sp>
+        <p:nvSpPr>
+          <p:cNvPr id="10" name="Text 6"/>
+          <p:cNvSpPr/>
+          <p:nvPr/>
+        </p:nvSpPr>
+        <p:spPr>
+          <a:xfrm>
+            <a:off x="6217920" y="5261986"/>
+            <a:ext cx="5074920" cy="320040"/>
+          </a:xfrm>
+          <a:prstGeom prst="rect">
+            <a:avLst/>
+          </a:prstGeom>
+          <a:noFill/>
+          <a:ln/>
+        </p:spPr>
+        <p:txBody>
+          <a:bodyPr wrap="square" rtlCol="0" anchor="ctr"/>
+          <a:lstStyle/>
+          <a:p>
+            <a:pPr algn="ctr" indent="0" marL="0">
+              <a:buNone/>
+            </a:pPr>
+            <a:r>
+              <a:rPr lang="en-US" sz="1350" b="1" dirty="0">
+                <a:solidFill>
+                  <a:srgbClr val="B1420A"/>
+                </a:solidFill>
+                <a:latin typeface="Microsoft JhengHei" pitchFamily="34" charset="0"/>
+                <a:ea typeface="Microsoft JhengHei" pitchFamily="34" charset="-122"/>
+                <a:cs typeface="Microsoft JhengHei" pitchFamily="34" charset="-120"/>
+              </a:rPr>
+              <a:t>② 產出成果</a:t>
+            </a:r>
+            <a:endParaRPr lang="en-US" sz="1350" dirty="0"/>
+          </a:p>
+        </p:txBody>
+      </p:sp>
+      <p:sp>
+        <p:nvSpPr>
+          <p:cNvPr id="11" name="Shape 7"/>
+          <p:cNvSpPr/>
+          <p:nvPr/>
+        </p:nvSpPr>
+        <p:spPr>
+          <a:xfrm>
+            <a:off x="640080" y="5074920"/>
+            <a:ext cx="10911535" cy="1143000"/>
+          </a:xfrm>
+          <a:prstGeom prst="rect">
+            <a:avLst/>
+          </a:prstGeom>
+          <a:solidFill>
+            <a:srgbClr val="FFFFFF"/>
+          </a:solidFill>
+          <a:ln w="12700">
+            <a:solidFill>
+              <a:srgbClr val="E4E7F2"/>
+            </a:solidFill>
+            <a:prstDash val="solid"/>
+          </a:ln>
+        </p:spPr>
+      </p:sp>
+      <p:sp>
+        <p:nvSpPr>
+          <p:cNvPr id="12" name="Shape 8"/>
+          <p:cNvSpPr/>
+          <p:nvPr/>
+        </p:nvSpPr>
+        <p:spPr>
+          <a:xfrm>
+            <a:off x="640080" y="5074920"/>
+            <a:ext cx="91440" cy="1143000"/>
+          </a:xfrm>
+          <a:prstGeom prst="rect">
+            <a:avLst/>
+          </a:prstGeom>
+          <a:solidFill>
+            <a:srgbClr val="B1420A"/>
+          </a:solidFill>
+          <a:ln/>
+        </p:spPr>
+      </p:sp>
+      <p:sp>
+        <p:nvSpPr>
+          <p:cNvPr id="13" name="Text 9"/>
+          <p:cNvSpPr/>
+          <p:nvPr/>
+        </p:nvSpPr>
+        <p:spPr>
+          <a:xfrm>
+            <a:off x="914400" y="5184648"/>
+            <a:ext cx="1828800" cy="320040"/>
+          </a:xfrm>
+          <a:prstGeom prst="rect">
+            <a:avLst/>
+          </a:prstGeom>
+          <a:noFill/>
+          <a:ln/>
+        </p:spPr>
+        <p:txBody>
+          <a:bodyPr wrap="square" rtlCol="0" anchor="ctr"/>
+          <a:lstStyle/>
+          <a:p>
+            <a:pPr indent="0" marL="0">
+              <a:buNone/>
+            </a:pPr>
+            <a:r>
+              <a:rPr lang="en-US" sz="1400" b="1" dirty="0">
+                <a:solidFill>
+                  <a:srgbClr val="1E2235"/>
+                </a:solidFill>
+                <a:latin typeface="Microsoft JhengHei" pitchFamily="34" charset="0"/>
+                <a:ea typeface="Microsoft JhengHei" pitchFamily="34" charset="-122"/>
+                <a:cs typeface="Microsoft JhengHei" pitchFamily="34" charset="-120"/>
+              </a:rPr>
+              <a:t>產出驗收</a:t>
+            </a:r>
+            <a:endParaRPr lang="en-US" sz="1400" dirty="0"/>
+          </a:p>
+        </p:txBody>
+      </p:sp>
+      <p:pic>
+        <p:nvPicPr>
+          <p:cNvPr id="14" name="Image 2" descr="preencoded.png">    </p:cNvPr>
+          <p:cNvPicPr>
+            <a:picLocks noChangeAspect="1"/>
+          </p:cNvPicPr>
+          <p:nvPr/>
+        </p:nvPicPr>
+        <p:blipFill>
+          <a:blip r:embed="rId3"/>
+          <a:stretch>
+            <a:fillRect/>
+          </a:stretch>
+        </p:blipFill>
+        <p:spPr>
+          <a:xfrm>
+            <a:off x="2834640" y="5221224"/>
+            <a:ext cx="182880" cy="182880"/>
+          </a:xfrm>
+          <a:prstGeom prst="rect">
+            <a:avLst/>
+          </a:prstGeom>
+        </p:spPr>
+      </p:pic>
+      <p:sp>
+        <p:nvSpPr>
+          <p:cNvPr id="15" name="Text 10"/>
+          <p:cNvSpPr/>
+          <p:nvPr/>
+        </p:nvSpPr>
+        <p:spPr>
+          <a:xfrm>
+            <a:off x="3108960" y="5166360"/>
+            <a:ext cx="8168335" cy="310896"/>
+          </a:xfrm>
+          <a:prstGeom prst="rect">
+            <a:avLst/>
+          </a:prstGeom>
+          <a:noFill/>
+          <a:ln/>
+        </p:spPr>
+        <p:txBody>
+          <a:bodyPr wrap="square" rtlCol="0" anchor="ctr"/>
+          <a:lstStyle/>
+          <a:p>
+            <a:pPr indent="0" marL="0">
+              <a:buNone/>
+            </a:pPr>
+            <a:r>
+              <a:rPr lang="en-US" sz="1300" dirty="0">
+                <a:solidFill>
+                  <a:srgbClr val="1E2235"/>
+                </a:solidFill>
+                <a:latin typeface="Microsoft JhengHei" pitchFamily="34" charset="0"/>
+                <a:ea typeface="Microsoft JhengHei" pitchFamily="34" charset="-122"/>
+                <a:cs typeface="Microsoft JhengHei" pitchFamily="34" charset="-120"/>
+              </a:rPr>
+              <a:t>沒有上傳任何附件，Cowork 完全靠自己撈信箱與 OneDrive 取得素材</a:t>
+            </a:r>
+            <a:endParaRPr lang="en-US" sz="1300" dirty="0"/>
+          </a:p>
+        </p:txBody>
+      </p:sp>
+      <p:pic>
+        <p:nvPicPr>
+          <p:cNvPr id="16" name="Image 3" descr="preencoded.png">    </p:cNvPr>
+          <p:cNvPicPr>
+            <a:picLocks noChangeAspect="1"/>
+          </p:cNvPicPr>
+          <p:nvPr/>
+        </p:nvPicPr>
+        <p:blipFill>
+          <a:blip r:embed="rId4"/>
+          <a:stretch>
+            <a:fillRect/>
+          </a:stretch>
+        </p:blipFill>
+        <p:spPr>
+          <a:xfrm>
+            <a:off x="2834640" y="5559552"/>
+            <a:ext cx="182880" cy="182880"/>
+          </a:xfrm>
+          <a:prstGeom prst="rect">
+            <a:avLst/>
+          </a:prstGeom>
+        </p:spPr>
+      </p:pic>
+      <p:sp>
+        <p:nvSpPr>
+          <p:cNvPr id="17" name="Text 11"/>
+          <p:cNvSpPr/>
+          <p:nvPr/>
+        </p:nvSpPr>
+        <p:spPr>
+          <a:xfrm>
+            <a:off x="3108960" y="5504688"/>
+            <a:ext cx="8168335" cy="310896"/>
+          </a:xfrm>
+          <a:prstGeom prst="rect">
+            <a:avLst/>
+          </a:prstGeom>
+          <a:noFill/>
+          <a:ln/>
+        </p:spPr>
+        <p:txBody>
+          <a:bodyPr wrap="square" rtlCol="0" anchor="ctr"/>
+          <a:lstStyle/>
+          <a:p>
+            <a:pPr indent="0" marL="0">
+              <a:buNone/>
+            </a:pPr>
+            <a:r>
+              <a:rPr lang="en-US" sz="1300" dirty="0">
+                <a:solidFill>
+                  <a:srgbClr val="1E2235"/>
+                </a:solidFill>
+                <a:latin typeface="Microsoft JhengHei" pitchFamily="34" charset="0"/>
+                <a:ea typeface="Microsoft JhengHei" pitchFamily="34" charset="-122"/>
+                <a:cs typeface="Microsoft JhengHei" pitchFamily="34" charset="-120"/>
+              </a:rPr>
+              <a:t>鴻昇精密被判定符合條件 1 與條件 2，並列出所有佐證批號與各批不良率</a:t>
+            </a:r>
+            <a:endParaRPr lang="en-US" sz="1300" dirty="0"/>
+          </a:p>
+        </p:txBody>
+      </p:sp>
+      <p:pic>
+        <p:nvPicPr>
+          <p:cNvPr id="18" name="Image 4" descr="preencoded.png">    </p:cNvPr>
+          <p:cNvPicPr>
+            <a:picLocks noChangeAspect="1"/>
+          </p:cNvPicPr>
+          <p:nvPr/>
+        </p:nvPicPr>
+        <p:blipFill>
+          <a:blip r:embed="rId5"/>
+          <a:stretch>
+            <a:fillRect/>
+          </a:stretch>
+        </p:blipFill>
+        <p:spPr>
+          <a:xfrm>
+            <a:off x="2834640" y="5897880"/>
+            <a:ext cx="182880" cy="182880"/>
+          </a:xfrm>
+          <a:prstGeom prst="rect">
+            <a:avLst/>
+          </a:prstGeom>
+        </p:spPr>
+      </p:pic>
+      <p:sp>
+        <p:nvSpPr>
+          <p:cNvPr id="19" name="Text 12"/>
+          <p:cNvSpPr/>
+          <p:nvPr/>
+        </p:nvSpPr>
+        <p:spPr>
+          <a:xfrm>
+            <a:off x="3108960" y="5843016"/>
+            <a:ext cx="8168335" cy="310896"/>
+          </a:xfrm>
+          <a:prstGeom prst="rect">
+            <a:avLst/>
+          </a:prstGeom>
+          <a:noFill/>
+          <a:ln/>
+        </p:spPr>
+        <p:txBody>
+          <a:bodyPr wrap="square" rtlCol="0" anchor="ctr"/>
+          <a:lstStyle/>
+          <a:p>
+            <a:pPr indent="0" marL="0">
+              <a:buNone/>
+            </a:pPr>
+            <a:r>
+              <a:rPr lang="en-US" sz="1300" dirty="0">
+                <a:solidFill>
+                  <a:srgbClr val="1E2235"/>
+                </a:solidFill>
+                <a:latin typeface="Microsoft JhengHei" pitchFamily="34" charset="0"/>
+                <a:ea typeface="Microsoft JhengHei" pitchFamily="34" charset="-122"/>
+                <a:cs typeface="Microsoft JhengHei" pitchFamily="34" charset="-120"/>
+              </a:rPr>
+              <a:t>台鋼金屬被判定符合條件 3（涉及法規），無論不良率高低一律開立</a:t>
+            </a:r>
+            <a:endParaRPr lang="en-US" sz="1300" dirty="0"/>
+          </a:p>
+        </p:txBody>
+      </p:sp>
+      <p:sp>
+        <p:nvSpPr>
+          <p:cNvPr id="20" name="Text 13"/>
+          <p:cNvSpPr/>
+          <p:nvPr/>
+        </p:nvSpPr>
+        <p:spPr>
+          <a:xfrm>
+            <a:off x="640080" y="6473952"/>
+            <a:ext cx="5486400" cy="274320"/>
+          </a:xfrm>
+          <a:prstGeom prst="rect">
+            <a:avLst/>
+          </a:prstGeom>
+          <a:noFill/>
+          <a:ln/>
+        </p:spPr>
+        <p:txBody>
+          <a:bodyPr wrap="square" rtlCol="0" anchor="ctr"/>
+          <a:lstStyle/>
+          <a:p>
+            <a:pPr algn="l" indent="0" marL="0">
+              <a:buNone/>
+            </a:pPr>
+            <a:r>
+              <a:rPr lang="en-US" sz="900" dirty="0">
+                <a:solidFill>
+                  <a:srgbClr val="5B6079"/>
+                </a:solidFill>
+                <a:latin typeface="Microsoft JhengHei" pitchFamily="34" charset="0"/>
+                <a:ea typeface="Microsoft JhengHei" pitchFamily="34" charset="-122"/>
+                <a:cs typeface="Microsoft JhengHei" pitchFamily="34" charset="-120"/>
+              </a:rPr>
+              <a:t>Microsoft 365 Copilot Cowork</a:t>
+            </a:r>
+            <a:endParaRPr lang="en-US" sz="900" dirty="0"/>
+          </a:p>
+        </p:txBody>
+      </p:sp>
+      <p:sp>
+        <p:nvSpPr>
+          <p:cNvPr id="21" name="Text 14"/>
+          <p:cNvSpPr/>
+          <p:nvPr/>
+        </p:nvSpPr>
+        <p:spPr>
+          <a:xfrm>
+            <a:off x="11002975" y="6473952"/>
+            <a:ext cx="548640" cy="274320"/>
+          </a:xfrm>
+          <a:prstGeom prst="rect">
+            <a:avLst/>
+          </a:prstGeom>
+          <a:noFill/>
+          <a:ln/>
+        </p:spPr>
+        <p:txBody>
+          <a:bodyPr wrap="square" rtlCol="0" anchor="ctr"/>
+          <a:lstStyle/>
+          <a:p>
+            <a:pPr algn="r" indent="0" marL="0">
+              <a:buNone/>
+            </a:pPr>
+            <a:r>
+              <a:rPr lang="en-US" sz="900" dirty="0">
+                <a:solidFill>
+                  <a:srgbClr val="5B6079"/>
+                </a:solidFill>
+                <a:latin typeface="Microsoft JhengHei" pitchFamily="34" charset="0"/>
+                <a:ea typeface="Microsoft JhengHei" pitchFamily="34" charset="-122"/>
+                <a:cs typeface="Microsoft JhengHei" pitchFamily="34" charset="-120"/>
+              </a:rPr>
+              <a:t>9</a:t>
+            </a:r>
+            <a:endParaRPr lang="en-US" sz="900" dirty="0"/>
+          </a:p>
+        </p:txBody>
+      </p:sp>
+    </p:spTree>
+  </p:cSld>
+  <p:clrMapOvr>
+    <a:masterClrMapping/>
+  </p:clrMapOvr>
+</p:sld>
+</file>
+
+<file path=ppt/slides/slide11.xml><?xml version="1.0" encoding="utf-8"?>
+<p:sld xmlns:a="http://schemas.openxmlformats.org/drawingml/2006/main" xmlns:r="http://schemas.openxmlformats.org/officeDocument/2006/relationships" xmlns:p="http://schemas.openxmlformats.org/presentationml/2006/main">
+  <p:cSld name="Slide 11">
+    <p:bg>
+      <p:bgPr>
+        <a:solidFill>
           <a:srgbClr val="0F1031"/>
         </a:solidFill>
       </p:bgPr>
@@ -3489,7 +4249,7 @@
                 <a:ea typeface="Microsoft JhengHei" pitchFamily="34" charset="-122"/>
                 <a:cs typeface="Microsoft JhengHei" pitchFamily="34" charset="-120"/>
               </a:rPr>
-              <a:t>前一個情境是你開口它才動。這一個連開口都不用 —— 建立一個**事件觸發任務**讓 Cowork 待命，之後只要有主旨含「停線」的信件進來，它自己醒來、讀 OneDrive 的分級 SOP 判斷 P1／P2／P3、回頭去信箱查這台設備最近的停線次數看要不要升級，然後草擬 Teams 通報與回信。「事件觸發」是 Copilot Chat 完全沒有的概念 —— Chat 永遠是你先說話。</a:t>
+              <a:t>前一個情境是你開口它才動。這一個連開口都不用 —— 建立一個事件觸發任務讓 Cowork 待命，之後只要有主旨含「停線」的信件進來，它自己醒來、讀 OneDrive 的分級 SOP 判斷 P1／P2／P3、回頭去信箱查這台設備最近的停線次數看要不要升級，然後草擬 Teams 通報與回信。「事件觸發」是 Copilot Chat 完全沒有的概念 —— Chat 永遠是你先說話。</a:t>
             </a:r>
             <a:endParaRPr lang="en-US" sz="1600" dirty="0"/>
           </a:p>
@@ -3675,7 +4435,7 @@
                 <a:ea typeface="Microsoft JhengHei" pitchFamily="34" charset="-122"/>
                 <a:cs typeface="Microsoft JhengHei" pitchFamily="34" charset="-120"/>
               </a:rPr>
-              <a:t>用自然語言描述觸發條件與要做的事就可以建立。</a:t>
+              <a:t>送出下面的提示詞建立事件觸發任務。</a:t>
             </a:r>
             <a:endParaRPr lang="en-US" sz="1300" dirty="0"/>
           </a:p>
@@ -3822,7 +4582,7 @@
                 <a:ea typeface="Microsoft JhengHei" pitchFamily="34" charset="-122"/>
                 <a:cs typeface="Microsoft JhengHei" pitchFamily="34" charset="-120"/>
               </a:rPr>
-              <a:t>任務建立完成不等於開始待命。</a:t>
+              <a:t>建立完成後，實際確認任務狀態是啟用中再往下做。</a:t>
             </a:r>
             <a:endParaRPr lang="en-US" sz="1300" dirty="0"/>
           </a:p>
@@ -3969,7 +4729,7 @@
                 <a:ea typeface="Microsoft JhengHei" pitchFamily="34" charset="-122"/>
                 <a:cs typeface="Microsoft JhengHei" pitchFamily="34" charset="-120"/>
               </a:rPr>
-              <a:t>自動化頁面是這個情境的「管理視角」：所有排程與觸發任務都列在這裡，可以檢視、暫停、刪除，也能看每一次的執行紀錄。</a:t>
+              <a:t>打開自動化頁面，看它為中英文各建立的兩個觸發器並存。</a:t>
             </a:r>
             <a:endParaRPr lang="en-US" sz="1300" dirty="0"/>
           </a:p>
@@ -4116,7 +4876,7 @@
                 <a:ea typeface="Microsoft JhengHei" pitchFamily="34" charset="-122"/>
                 <a:cs typeface="Microsoft JhengHei" pitchFamily="34" charset="-120"/>
               </a:rPr>
-              <a:t>現在才寄觸發測試信。</a:t>
+              <a:t>確認任務已待命後，這時才寄出觸發測試信，然後不要下任何指令，看它自己醒來。</a:t>
             </a:r>
             <a:endParaRPr lang="en-US" sz="1300" dirty="0"/>
           </a:p>
@@ -4263,7 +5023,7 @@
                 <a:ea typeface="Microsoft JhengHei" pitchFamily="34" charset="-122"/>
                 <a:cs typeface="Microsoft JhengHei" pitchFamily="34" charset="-120"/>
               </a:rPr>
-              <a:t>打開草擬的回信逐項對 SOP 的六項必含內容：設備編號與產線、停線起始與現況、判定等級與依據條文、預估復機時間…</a:t>
+              <a:t>打開它草擬的回信，逐項對照 SOP 要求的六項必含內容。</a:t>
             </a:r>
             <a:endParaRPr lang="en-US" sz="1300" dirty="0"/>
           </a:p>
@@ -4341,7 +5101,7 @@
                 <a:ea typeface="Microsoft JhengHei" pitchFamily="34" charset="-122"/>
                 <a:cs typeface="Microsoft JhengHei" pitchFamily="34" charset="-120"/>
               </a:rPr>
-              <a:t>9</a:t>
+              <a:t>10</a:t>
             </a:r>
             <a:endParaRPr lang="en-US" sz="900" dirty="0"/>
           </a:p>
@@ -4355,9 +5115,9 @@
 </p:sld>
 </file>
 
-<file path=ppt/slides/slide11.xml><?xml version="1.0" encoding="utf-8"?>
+<file path=ppt/slides/slide12.xml><?xml version="1.0" encoding="utf-8"?>
 <p:sld xmlns:a="http://schemas.openxmlformats.org/drawingml/2006/main" xmlns:r="http://schemas.openxmlformats.org/officeDocument/2006/relationships" xmlns:p="http://schemas.openxmlformats.org/presentationml/2006/main">
-  <p:cSld name="Slide 11">
+  <p:cSld name="Slide 12">
     <p:bg>
       <p:bgPr>
         <a:solidFill>
@@ -4871,7 +5631,7 @@
                 <a:ea typeface="Microsoft JhengHei" pitchFamily="34" charset="-122"/>
                 <a:cs typeface="Microsoft JhengHei" pitchFamily="34" charset="-120"/>
               </a:rPr>
-              <a:t>測試信是在任務進入待命狀態**之後**才寄出的</a:t>
+              <a:t>測試信是在任務進入待命狀態之後才寄出的</a:t>
             </a:r>
             <a:endParaRPr lang="en-US" sz="1300" dirty="0"/>
           </a:p>
@@ -5012,7 +5772,7 @@
                 <a:ea typeface="Microsoft JhengHei" pitchFamily="34" charset="-122"/>
                 <a:cs typeface="Microsoft JhengHei" pitchFamily="34" charset="-120"/>
               </a:rPr>
-              <a:t>10</a:t>
+              <a:t>11</a:t>
             </a:r>
             <a:endParaRPr lang="en-US" sz="900" dirty="0"/>
           </a:p>
@@ -5026,9 +5786,9 @@
 </p:sld>
 </file>
 
-<file path=ppt/slides/slide12.xml><?xml version="1.0" encoding="utf-8"?>
+<file path=ppt/slides/slide13.xml><?xml version="1.0" encoding="utf-8"?>
 <p:sld xmlns:a="http://schemas.openxmlformats.org/drawingml/2006/main" xmlns:r="http://schemas.openxmlformats.org/officeDocument/2006/relationships" xmlns:p="http://schemas.openxmlformats.org/presentationml/2006/main">
-  <p:cSld name="Slide 12">
+  <p:cSld name="Slide 13">
     <p:bg>
       <p:bgPr>
         <a:solidFill>
@@ -5631,7 +6391,7 @@
                 <a:ea typeface="Microsoft JhengHei" pitchFamily="34" charset="-122"/>
                 <a:cs typeface="Microsoft JhengHei" pitchFamily="34" charset="-120"/>
               </a:rPr>
-              <a:t>基礎版的晨報要你每天把日報拖進聊天框；這一版你**一次都不用再開口**。建立一個每天早上 07:30 自動執行的排程提示，資料由 Cowork 自己去 OneDrive 撈、今天有哪些會議自己去行事曆查，然後照你寫死的四段格式產出晨報寄給自己。規則寫一次，之後每天照同一套邏輯執行 —— 這正是「判斷標準寫下來」的複利。</a:t>
+              <a:t>基礎版的晨報要你每天把日報拖進聊天框；這一版你一次都不用再開口。建立一個每天早上 07:30 自動執行的排程提示，資料由 Cowork 自己去 OneDrive 撈、今天有哪些會議自己去行事曆查，然後照你寫死的四段格式產出晨報寄給自己。規則寫一次，之後每天照同一套邏輯執行 —— 這正是「判斷標準寫下來」的複利。</a:t>
             </a:r>
             <a:endParaRPr lang="en-US" sz="1600" dirty="0"/>
           </a:p>
@@ -5817,7 +6577,7 @@
                 <a:ea typeface="Microsoft JhengHei" pitchFamily="34" charset="-122"/>
                 <a:cs typeface="Microsoft JhengHei" pitchFamily="34" charset="-120"/>
               </a:rPr>
-              <a:t>排程提示和事件觸發的差別在於「什麼時候醒來」：一個看時鐘，一個看事件。</a:t>
+              <a:t>送出下面的提示詞建立每天 07:30 的排程提示。</a:t>
             </a:r>
             <a:endParaRPr lang="en-US" sz="1300" dirty="0"/>
           </a:p>
@@ -5964,7 +6724,7 @@
                 <a:ea typeface="Microsoft JhengHei" pitchFamily="34" charset="-122"/>
                 <a:cs typeface="Microsoft JhengHei" pitchFamily="34" charset="-120"/>
               </a:rPr>
-              <a:t>排程任務最尷尬的失敗是「明天早上才發現規則寫錯」。</a:t>
+              <a:t>不要等到明天早上。</a:t>
             </a:r>
             <a:endParaRPr lang="en-US" sz="1300" dirty="0"/>
           </a:p>
@@ -6111,7 +6871,7 @@
                 <a:ea typeface="Microsoft JhengHei" pitchFamily="34" charset="-122"/>
                 <a:cs typeface="Microsoft JhengHei" pitchFamily="34" charset="-120"/>
               </a:rPr>
-              <a:t>實測結果 3/3 命中：B 產線同時觸發「達成率低於 95%」「稼動率低於 85%」與「連續 2 天低於 97%…</a:t>
+              <a:t>打開試跑產出的晨報，逐段驗收四個段落。</a:t>
             </a:r>
             <a:endParaRPr lang="en-US" sz="1300" dirty="0"/>
           </a:p>
@@ -6243,7 +7003,7 @@
                 <a:ea typeface="Microsoft JhengHei" pitchFamily="34" charset="-122"/>
                 <a:cs typeface="Microsoft JhengHei" pitchFamily="34" charset="-120"/>
               </a:rPr>
-              <a:t>排程任務每天固定時間醒來，但它**不會每天默默寄信出去** —— 寄送同樣要核准。</a:t>
+              <a:t>排程任務每天固定時間醒來，但它不會每天默默寄信出去 —— 寄送同樣要核准。</a:t>
             </a:r>
             <a:endParaRPr lang="en-US" sz="1250" dirty="0"/>
           </a:p>
@@ -6321,7 +7081,7 @@
                 <a:ea typeface="Microsoft JhengHei" pitchFamily="34" charset="-122"/>
                 <a:cs typeface="Microsoft JhengHei" pitchFamily="34" charset="-120"/>
               </a:rPr>
-              <a:t>11</a:t>
+              <a:t>12</a:t>
             </a:r>
             <a:endParaRPr lang="en-US" sz="900" dirty="0"/>
           </a:p>
@@ -6335,9 +7095,9 @@
 </p:sld>
 </file>
 
-<file path=ppt/slides/slide13.xml><?xml version="1.0" encoding="utf-8"?>
+<file path=ppt/slides/slide14.xml><?xml version="1.0" encoding="utf-8"?>
 <p:sld xmlns:a="http://schemas.openxmlformats.org/drawingml/2006/main" xmlns:r="http://schemas.openxmlformats.org/officeDocument/2006/relationships" xmlns:p="http://schemas.openxmlformats.org/presentationml/2006/main">
-  <p:cSld name="Slide 13">
+  <p:cSld name="Slide 14">
     <p:bg>
       <p:bgPr>
         <a:solidFill>
@@ -6992,7 +7752,7 @@
                 <a:ea typeface="Microsoft JhengHei" pitchFamily="34" charset="-122"/>
                 <a:cs typeface="Microsoft JhengHei" pitchFamily="34" charset="-120"/>
               </a:rPr>
-              <a:t>12</a:t>
+              <a:t>13</a:t>
             </a:r>
             <a:endParaRPr lang="en-US" sz="900" dirty="0"/>
           </a:p>
@@ -7006,9 +7766,9 @@
 </p:sld>
 </file>
 
-<file path=ppt/slides/slide14.xml><?xml version="1.0" encoding="utf-8"?>
+<file path=ppt/slides/slide15.xml><?xml version="1.0" encoding="utf-8"?>
 <p:sld xmlns:a="http://schemas.openxmlformats.org/drawingml/2006/main" xmlns:r="http://schemas.openxmlformats.org/officeDocument/2006/relationships" xmlns:p="http://schemas.openxmlformats.org/presentationml/2006/main">
-  <p:cSld name="Slide 14">
+  <p:cSld name="Slide 15">
     <p:bg>
       <p:bgPr>
         <a:solidFill>
@@ -7550,7 +8310,7 @@
                 <a:ea typeface="Microsoft JhengHei" pitchFamily="34" charset="-122"/>
                 <a:cs typeface="Microsoft JhengHei" pitchFamily="34" charset="-120"/>
               </a:rPr>
-              <a:t>這是全手冊最接近「真正把事情做完」的一個情境。給 Cowork 一個刻意散亂的資料夾 —— 命名混亂、版本重複、日期過期的 11 份 SOP 與證書 —— 讓它自己逐份讀完、逐條比對檢核表、建立稽核資料夾、把合格文件重新歸檔，再產出缺口清單並**依負責人分組**分別寄信。這是長任務自主執行，中途你可以介入，而且會看到 Approve All 這種批次核准的實際樣子。</a:t>
+              <a:t>這是全手冊最接近「真正把事情做完」的一個情境。給 Cowork 一個刻意散亂的資料夾 —— 命名混亂、版本重複、日期過期的 11 份 SOP 與證書 —— 讓它自己逐份讀完、逐條比對檢核表、建立稽核資料夾、把合格文件重新歸檔，再產出缺口清單並依負責人分組分別寄信。這是長任務自主執行，中途你可以介入，而且會看到 Approve All 這種批次核准的實際樣子。</a:t>
             </a:r>
             <a:endParaRPr lang="en-US" sz="1600" dirty="0"/>
           </a:p>
@@ -7736,7 +8496,7 @@
                 <a:ea typeface="Microsoft JhengHei" pitchFamily="34" charset="-122"/>
                 <a:cs typeface="Microsoft JhengHei" pitchFamily="34" charset="-120"/>
               </a:rPr>
-              <a:t>這個情境要動到的是**檔案本身**，不只是讀內容 —— 建資料夾、搬檔案…</a:t>
+              <a:t>送出下面的提示詞。</a:t>
             </a:r>
             <a:endParaRPr lang="en-US" sz="1300" dirty="0"/>
           </a:p>
@@ -7883,7 +8643,7 @@
                 <a:ea typeface="Microsoft JhengHei" pitchFamily="34" charset="-122"/>
                 <a:cs typeface="Microsoft JhengHei" pitchFamily="34" charset="-120"/>
               </a:rPr>
-              <a:t>11 份文件、逐份讀取、批次搬檔 —— 如果每一個動作都跳一張卡，這個情境會變成點 30 次核准。</a:t>
+              <a:t>長任務跑起來之後，注意核准卡的形式和前面幾個情境不一樣。</a:t>
             </a:r>
             <a:endParaRPr lang="en-US" sz="1300" dirty="0"/>
           </a:p>
@@ -8030,7 +8790,7 @@
                 <a:ea typeface="Microsoft JhengHei" pitchFamily="34" charset="-122"/>
                 <a:cs typeface="Microsoft JhengHei" pitchFamily="34" charset="-120"/>
               </a:rPr>
-              <a:t>長任務最能看出韌性。</a:t>
+              <a:t>中途展開工作區，看它遇到失敗的時候怎麼處理。</a:t>
             </a:r>
             <a:endParaRPr lang="en-US" sz="1300" dirty="0"/>
           </a:p>
@@ -8177,7 +8937,7 @@
                 <a:ea typeface="Microsoft JhengHei" pitchFamily="34" charset="-122"/>
                 <a:cs typeface="Microsoft JhengHei" pitchFamily="34" charset="-120"/>
               </a:rPr>
-              <a:t>這份素材的每一個缺陷都是刻意埋的，實測 10 項全部命中：沖壓站 v2 與 v3 草稿同編號並存…</a:t>
+              <a:t>打開它產出的缺口清單，逐項核對。</a:t>
             </a:r>
             <a:endParaRPr lang="en-US" sz="1300" dirty="0"/>
           </a:p>
@@ -8324,7 +9084,7 @@
                 <a:ea typeface="Microsoft JhengHei" pitchFamily="34" charset="-122"/>
                 <a:cs typeface="Microsoft JhengHei" pitchFamily="34" charset="-120"/>
               </a:rPr>
-              <a:t>這一步請務必實際打開 OneDrive，不要只看對話裡的摘要。</a:t>
+              <a:t>實際打開 OneDrive 看資料夾結構，再打開缺口通知信檢查收件者有沒有依負責人分組。</a:t>
             </a:r>
             <a:endParaRPr lang="en-US" sz="1300" dirty="0"/>
           </a:p>
@@ -8402,7 +9162,7 @@
                 <a:ea typeface="Microsoft JhengHei" pitchFamily="34" charset="-122"/>
                 <a:cs typeface="Microsoft JhengHei" pitchFamily="34" charset="-120"/>
               </a:rPr>
-              <a:t>13</a:t>
+              <a:t>14</a:t>
             </a:r>
             <a:endParaRPr lang="en-US" sz="900" dirty="0"/>
           </a:p>
@@ -8416,9 +9176,9 @@
 </p:sld>
 </file>
 
-<file path=ppt/slides/slide15.xml><?xml version="1.0" encoding="utf-8"?>
+<file path=ppt/slides/slide16.xml><?xml version="1.0" encoding="utf-8"?>
 <p:sld xmlns:a="http://schemas.openxmlformats.org/drawingml/2006/main" xmlns:r="http://schemas.openxmlformats.org/officeDocument/2006/relationships" xmlns:p="http://schemas.openxmlformats.org/presentationml/2006/main">
-  <p:cSld name="Slide 15">
+  <p:cSld name="Slide 16">
     <p:bg>
       <p:bgPr>
         <a:solidFill>
@@ -9073,7 +9833,7 @@
                 <a:ea typeface="Microsoft JhengHei" pitchFamily="34" charset="-122"/>
                 <a:cs typeface="Microsoft JhengHei" pitchFamily="34" charset="-120"/>
               </a:rPr>
-              <a:t>14</a:t>
+              <a:t>15</a:t>
             </a:r>
             <a:endParaRPr lang="en-US" sz="900" dirty="0"/>
           </a:p>
@@ -9087,9 +9847,9 @@
 </p:sld>
 </file>
 
-<file path=ppt/slides/slide16.xml><?xml version="1.0" encoding="utf-8"?>
+<file path=ppt/slides/slide17.xml><?xml version="1.0" encoding="utf-8"?>
 <p:sld xmlns:a="http://schemas.openxmlformats.org/drawingml/2006/main" xmlns:r="http://schemas.openxmlformats.org/officeDocument/2006/relationships" xmlns:p="http://schemas.openxmlformats.org/presentationml/2006/main">
-  <p:cSld name="Slide 16">
+  <p:cSld name="Slide 17">
     <p:bg>
       <p:bgPr>
         <a:solidFill>
@@ -9570,7 +10330,7 @@
                 <a:ea typeface="Microsoft JhengHei" pitchFamily="34" charset="-122"/>
                 <a:cs typeface="Microsoft JhengHei" pitchFamily="34" charset="-120"/>
               </a:rPr>
-              <a:t>前面四個情境每一次都要重講一次規則。這一個把規則本身變成資產：把 MFGX2 的停線分級邏輯寫成自訂技能，讓它成為每次開新工作階段都會自動載入的能力，再回頭掛到 MFGX2 的觸發任務上。而這個情境最有價值的部分不是技能本身，是那份**官方自動評測報告** —— 我們在實測中發現了一件會直接影響你評分的事，中文技能作者尤其要看。</a:t>
+              <a:t>前面四個情境每一次都要重講一次規則。這一個把規則本身變成資產：把 MFGX2 的停線分級邏輯寫成自訂技能，讓它成為每次開新工作階段都會自動載入的能力，再回頭掛到 MFGX2 的觸發任務上。而這個情境最有價值的部分不是技能本身，是那份官方自動評測報告 —— 我們在實測中發現了一件會直接影響你評分的事，中文技能作者尤其要看。</a:t>
             </a:r>
             <a:endParaRPr lang="en-US" sz="1600" dirty="0"/>
           </a:p>
@@ -9756,7 +10516,7 @@
                 <a:ea typeface="Microsoft JhengHei" pitchFamily="34" charset="-122"/>
                 <a:cs typeface="Microsoft JhengHei" pitchFamily="34" charset="-120"/>
               </a:rPr>
-              <a:t>課前刻意**沒有**把 MFGX5_SKILL.md 放進技能資料夾，就是為了現場做一次。</a:t>
+              <a:t>送出下面的提示詞，把 MFGX2 的 SOP 現場寫成技能。</a:t>
             </a:r>
             <a:endParaRPr lang="en-US" sz="1300" dirty="0"/>
           </a:p>
@@ -9903,7 +10663,7 @@
                 <a:ea typeface="Microsoft JhengHei" pitchFamily="34" charset="-122"/>
                 <a:cs typeface="Microsoft JhengHei" pitchFamily="34" charset="-120"/>
               </a:rPr>
-              <a:t>技能建立、更新或驗證時，Cowork 會**自動**回傳一份技能報告，0～100 分…</a:t>
+              <a:t>技能建立後，打開它自動回傳的技能報告，把整份讀完再往下。</a:t>
             </a:r>
             <a:endParaRPr lang="en-US" sz="1300" dirty="0"/>
           </a:p>
@@ -10050,7 +10810,7 @@
                 <a:ea typeface="Microsoft JhengHei" pitchFamily="34" charset="-122"/>
                 <a:cs typeface="Microsoft JhengHei" pitchFamily="34" charset="-120"/>
               </a:rPr>
-              <a:t>把「為什麼穩健度只有 9 分」丟回去問，Cowork 自己去查了評分的啟發式…</a:t>
+              <a:t>不要接受這個分數就算了。</a:t>
             </a:r>
             <a:endParaRPr lang="en-US" sz="1300" dirty="0"/>
           </a:p>
@@ -10197,7 +10957,7 @@
                 <a:ea typeface="Microsoft JhengHei" pitchFamily="34" charset="-122"/>
                 <a:cs typeface="Microsoft JhengHei" pitchFamily="34" charset="-120"/>
               </a:rPr>
-              <a:t>最後一步把整個進階版收成一個閉環：MFGX2 的觸發任務原本自己帶著判定邏輯，現在改成由技能提供邏輯…</a:t>
+              <a:t>送出下面的提示詞，把 MFGX2 的觸發任務改掛這個技能，並列出所有自動化準備收尾。</a:t>
             </a:r>
             <a:endParaRPr lang="en-US" sz="1300" dirty="0"/>
           </a:p>
@@ -10270,677 +11030,6 @@
               <a:rPr lang="en-US" sz="900" dirty="0">
                 <a:solidFill>
                   <a:srgbClr val="8A8FB5"/>
-                </a:solidFill>
-                <a:latin typeface="Microsoft JhengHei" pitchFamily="34" charset="0"/>
-                <a:ea typeface="Microsoft JhengHei" pitchFamily="34" charset="-122"/>
-                <a:cs typeface="Microsoft JhengHei" pitchFamily="34" charset="-120"/>
-              </a:rPr>
-              <a:t>15</a:t>
-            </a:r>
-            <a:endParaRPr lang="en-US" sz="900" dirty="0"/>
-          </a:p>
-        </p:txBody>
-      </p:sp>
-    </p:spTree>
-  </p:cSld>
-  <p:clrMapOvr>
-    <a:masterClrMapping/>
-  </p:clrMapOvr>
-</p:sld>
-</file>
-
-<file path=ppt/slides/slide17.xml><?xml version="1.0" encoding="utf-8"?>
-<p:sld xmlns:a="http://schemas.openxmlformats.org/drawingml/2006/main" xmlns:r="http://schemas.openxmlformats.org/officeDocument/2006/relationships" xmlns:p="http://schemas.openxmlformats.org/presentationml/2006/main">
-  <p:cSld name="Slide 17">
-    <p:bg>
-      <p:bgPr>
-        <a:solidFill>
-          <a:srgbClr val="F7F8FC"/>
-        </a:solidFill>
-      </p:bgPr>
-    </p:bg>
-    <p:spTree>
-      <p:nvGrpSpPr>
-        <p:cNvPr id="1" name=""/>
-        <p:cNvGrpSpPr/>
-        <p:nvPr/>
-      </p:nvGrpSpPr>
-      <p:grpSpPr>
-        <a:xfrm>
-          <a:off x="0" y="0"/>
-          <a:ext cx="0" cy="0"/>
-          <a:chOff x="0" y="0"/>
-          <a:chExt cx="0" cy="0"/>
-        </a:xfrm>
-      </p:grpSpPr>
-      <p:sp>
-        <p:nvSpPr>
-          <p:cNvPr id="2" name="Shape 0"/>
-          <p:cNvSpPr/>
-          <p:nvPr/>
-        </p:nvSpPr>
-        <p:spPr>
-          <a:xfrm>
-            <a:off x="640080" y="566928"/>
-            <a:ext cx="384048" cy="128016"/>
-          </a:xfrm>
-          <a:prstGeom prst="rect">
-            <a:avLst/>
-          </a:prstGeom>
-          <a:solidFill>
-            <a:srgbClr val="5C2E91"/>
-          </a:solidFill>
-          <a:ln/>
-        </p:spPr>
-      </p:sp>
-      <p:sp>
-        <p:nvSpPr>
-          <p:cNvPr id="3" name="Text 1"/>
-          <p:cNvSpPr/>
-          <p:nvPr/>
-        </p:nvSpPr>
-        <p:spPr>
-          <a:xfrm>
-            <a:off x="1143000" y="457200"/>
-            <a:ext cx="8229600" cy="310896"/>
-          </a:xfrm>
-          <a:prstGeom prst="rect">
-            <a:avLst/>
-          </a:prstGeom>
-          <a:noFill/>
-          <a:ln/>
-        </p:spPr>
-        <p:txBody>
-          <a:bodyPr wrap="square" rtlCol="0" anchor="ctr"/>
-          <a:lstStyle/>
-          <a:p>
-            <a:pPr indent="0" marL="0">
-              <a:buNone/>
-            </a:pPr>
-            <a:r>
-              <a:rPr lang="en-US" sz="1200" b="1" spc="200" kern="0" dirty="0">
-                <a:solidFill>
-                  <a:srgbClr val="5C2E91"/>
-                </a:solidFill>
-                <a:latin typeface="Microsoft JhengHei" pitchFamily="34" charset="0"/>
-                <a:ea typeface="Microsoft JhengHei" pitchFamily="34" charset="-122"/>
-                <a:cs typeface="Microsoft JhengHei" pitchFamily="34" charset="-120"/>
-              </a:rPr>
-              <a:t>情境 05 · 實機示範</a:t>
-            </a:r>
-            <a:endParaRPr lang="en-US" sz="1200" dirty="0"/>
-          </a:p>
-        </p:txBody>
-      </p:sp>
-      <p:sp>
-        <p:nvSpPr>
-          <p:cNvPr id="4" name="Text 2"/>
-          <p:cNvSpPr/>
-          <p:nvPr/>
-        </p:nvSpPr>
-        <p:spPr>
-          <a:xfrm>
-            <a:off x="640080" y="786384"/>
-            <a:ext cx="10972800" cy="640080"/>
-          </a:xfrm>
-          <a:prstGeom prst="rect">
-            <a:avLst/>
-          </a:prstGeom>
-          <a:noFill/>
-          <a:ln/>
-        </p:spPr>
-        <p:txBody>
-          <a:bodyPr wrap="square" rtlCol="0" anchor="ctr"/>
-          <a:lstStyle/>
-          <a:p>
-            <a:pPr indent="0" marL="0">
-              <a:buNone/>
-            </a:pPr>
-            <a:r>
-              <a:rPr lang="en-US" sz="3000" b="1" dirty="0">
-                <a:solidFill>
-                  <a:srgbClr val="1E2235"/>
-                </a:solidFill>
-                <a:latin typeface="Microsoft JhengHei" pitchFamily="34" charset="0"/>
-                <a:ea typeface="Microsoft JhengHei" pitchFamily="34" charset="-122"/>
-                <a:cs typeface="Microsoft JhengHei" pitchFamily="34" charset="-120"/>
-              </a:rPr>
-              <a:t>看 Cowork 怎麼做、產出什麼</a:t>
-            </a:r>
-            <a:endParaRPr lang="en-US" sz="3000" dirty="0"/>
-          </a:p>
-        </p:txBody>
-      </p:sp>
-      <p:sp>
-        <p:nvSpPr>
-          <p:cNvPr id="5" name="Shape 3"/>
-          <p:cNvSpPr/>
-          <p:nvPr/>
-        </p:nvSpPr>
-        <p:spPr>
-          <a:xfrm>
-            <a:off x="585216" y="1773936"/>
-            <a:ext cx="5184648" cy="3433186"/>
-          </a:xfrm>
-          <a:prstGeom prst="rect">
-            <a:avLst/>
-          </a:prstGeom>
-          <a:solidFill>
-            <a:srgbClr val="FFFFFF"/>
-          </a:solidFill>
-          <a:ln w="12700">
-            <a:solidFill>
-              <a:srgbClr val="E4E7F2"/>
-            </a:solidFill>
-            <a:prstDash val="solid"/>
-          </a:ln>
-          <a:effectLst>
-            <a:outerShdw sx="100000" sy="100000" kx="0" ky="0" algn="bl" rotWithShape="0" blurRad="114300" dist="38100" dir="5400000">
-              <a:srgbClr val="8A90B5">
-                <a:alpha val="22000"/>
-              </a:srgbClr>
-            </a:outerShdw>
-          </a:effectLst>
-        </p:spPr>
-      </p:sp>
-      <p:pic>
-        <p:nvPicPr>
-          <p:cNvPr id="6" name="Image 0" descr="C:\temp\CoworkLab\v2\_working\screenshots\mfgx5_01_copyfile_approval.png">    </p:cNvPr>
-          <p:cNvPicPr>
-            <a:picLocks noChangeAspect="1"/>
-          </p:cNvPicPr>
-          <p:nvPr/>
-        </p:nvPicPr>
-        <p:blipFill>
-          <a:blip r:embed="rId1"/>
-          <a:stretch>
-            <a:fillRect/>
-          </a:stretch>
-        </p:blipFill>
-        <p:spPr>
-          <a:xfrm>
-            <a:off x="640080" y="1828800"/>
-            <a:ext cx="5074920" cy="3323458"/>
-          </a:xfrm>
-          <a:prstGeom prst="rect">
-            <a:avLst/>
-          </a:prstGeom>
-        </p:spPr>
-      </p:pic>
-      <p:sp>
-        <p:nvSpPr>
-          <p:cNvPr id="7" name="Text 4"/>
-          <p:cNvSpPr/>
-          <p:nvPr/>
-        </p:nvSpPr>
-        <p:spPr>
-          <a:xfrm>
-            <a:off x="640080" y="5261986"/>
-            <a:ext cx="5074920" cy="320040"/>
-          </a:xfrm>
-          <a:prstGeom prst="rect">
-            <a:avLst/>
-          </a:prstGeom>
-          <a:noFill/>
-          <a:ln/>
-        </p:spPr>
-        <p:txBody>
-          <a:bodyPr wrap="square" rtlCol="0" anchor="ctr"/>
-          <a:lstStyle/>
-          <a:p>
-            <a:pPr algn="ctr" indent="0" marL="0">
-              <a:buNone/>
-            </a:pPr>
-            <a:r>
-              <a:rPr lang="en-US" sz="1350" b="1" dirty="0">
-                <a:solidFill>
-                  <a:srgbClr val="5C2E91"/>
-                </a:solidFill>
-                <a:latin typeface="Microsoft JhengHei" pitchFamily="34" charset="0"/>
-                <a:ea typeface="Microsoft JhengHei" pitchFamily="34" charset="-122"/>
-                <a:cs typeface="Microsoft JhengHei" pitchFamily="34" charset="-120"/>
-              </a:rPr>
-              <a:t>① 你的輸入與指令</a:t>
-            </a:r>
-            <a:endParaRPr lang="en-US" sz="1350" dirty="0"/>
-          </a:p>
-        </p:txBody>
-      </p:sp>
-      <p:sp>
-        <p:nvSpPr>
-          <p:cNvPr id="8" name="Shape 5"/>
-          <p:cNvSpPr/>
-          <p:nvPr/>
-        </p:nvSpPr>
-        <p:spPr>
-          <a:xfrm>
-            <a:off x="6163056" y="1773936"/>
-            <a:ext cx="5184648" cy="3433186"/>
-          </a:xfrm>
-          <a:prstGeom prst="rect">
-            <a:avLst/>
-          </a:prstGeom>
-          <a:solidFill>
-            <a:srgbClr val="FFFFFF"/>
-          </a:solidFill>
-          <a:ln w="12700">
-            <a:solidFill>
-              <a:srgbClr val="E4E7F2"/>
-            </a:solidFill>
-            <a:prstDash val="solid"/>
-          </a:ln>
-          <a:effectLst>
-            <a:outerShdw sx="100000" sy="100000" kx="0" ky="0" algn="bl" rotWithShape="0" blurRad="114300" dist="38100" dir="5400000">
-              <a:srgbClr val="8A90B5">
-                <a:alpha val="22000"/>
-              </a:srgbClr>
-            </a:outerShdw>
-          </a:effectLst>
-        </p:spPr>
-      </p:sp>
-      <p:pic>
-        <p:nvPicPr>
-          <p:cNvPr id="9" name="Image 1" descr="C:\temp\CoworkLab\v2\_working\screenshots\mfgx_99_automations_paused.png">    </p:cNvPr>
-          <p:cNvPicPr>
-            <a:picLocks noChangeAspect="1"/>
-          </p:cNvPicPr>
-          <p:nvPr/>
-        </p:nvPicPr>
-        <p:blipFill>
-          <a:blip r:embed="rId2"/>
-          <a:stretch>
-            <a:fillRect/>
-          </a:stretch>
-        </p:blipFill>
-        <p:spPr>
-          <a:xfrm>
-            <a:off x="6217920" y="1828800"/>
-            <a:ext cx="5074920" cy="3323458"/>
-          </a:xfrm>
-          <a:prstGeom prst="rect">
-            <a:avLst/>
-          </a:prstGeom>
-        </p:spPr>
-      </p:pic>
-      <p:sp>
-        <p:nvSpPr>
-          <p:cNvPr id="10" name="Text 6"/>
-          <p:cNvSpPr/>
-          <p:nvPr/>
-        </p:nvSpPr>
-        <p:spPr>
-          <a:xfrm>
-            <a:off x="6217920" y="5261986"/>
-            <a:ext cx="5074920" cy="320040"/>
-          </a:xfrm>
-          <a:prstGeom prst="rect">
-            <a:avLst/>
-          </a:prstGeom>
-          <a:noFill/>
-          <a:ln/>
-        </p:spPr>
-        <p:txBody>
-          <a:bodyPr wrap="square" rtlCol="0" anchor="ctr"/>
-          <a:lstStyle/>
-          <a:p>
-            <a:pPr algn="ctr" indent="0" marL="0">
-              <a:buNone/>
-            </a:pPr>
-            <a:r>
-              <a:rPr lang="en-US" sz="1350" b="1" dirty="0">
-                <a:solidFill>
-                  <a:srgbClr val="5C2E91"/>
-                </a:solidFill>
-                <a:latin typeface="Microsoft JhengHei" pitchFamily="34" charset="0"/>
-                <a:ea typeface="Microsoft JhengHei" pitchFamily="34" charset="-122"/>
-                <a:cs typeface="Microsoft JhengHei" pitchFamily="34" charset="-120"/>
-              </a:rPr>
-              <a:t>② 產出成果</a:t>
-            </a:r>
-            <a:endParaRPr lang="en-US" sz="1350" dirty="0"/>
-          </a:p>
-        </p:txBody>
-      </p:sp>
-      <p:sp>
-        <p:nvSpPr>
-          <p:cNvPr id="11" name="Shape 7"/>
-          <p:cNvSpPr/>
-          <p:nvPr/>
-        </p:nvSpPr>
-        <p:spPr>
-          <a:xfrm>
-            <a:off x="640080" y="5074920"/>
-            <a:ext cx="10911535" cy="1143000"/>
-          </a:xfrm>
-          <a:prstGeom prst="rect">
-            <a:avLst/>
-          </a:prstGeom>
-          <a:solidFill>
-            <a:srgbClr val="FFFFFF"/>
-          </a:solidFill>
-          <a:ln w="12700">
-            <a:solidFill>
-              <a:srgbClr val="E4E7F2"/>
-            </a:solidFill>
-            <a:prstDash val="solid"/>
-          </a:ln>
-        </p:spPr>
-      </p:sp>
-      <p:sp>
-        <p:nvSpPr>
-          <p:cNvPr id="12" name="Shape 8"/>
-          <p:cNvSpPr/>
-          <p:nvPr/>
-        </p:nvSpPr>
-        <p:spPr>
-          <a:xfrm>
-            <a:off x="640080" y="5074920"/>
-            <a:ext cx="91440" cy="1143000"/>
-          </a:xfrm>
-          <a:prstGeom prst="rect">
-            <a:avLst/>
-          </a:prstGeom>
-          <a:solidFill>
-            <a:srgbClr val="5C2E91"/>
-          </a:solidFill>
-          <a:ln/>
-        </p:spPr>
-      </p:sp>
-      <p:sp>
-        <p:nvSpPr>
-          <p:cNvPr id="13" name="Text 9"/>
-          <p:cNvSpPr/>
-          <p:nvPr/>
-        </p:nvSpPr>
-        <p:spPr>
-          <a:xfrm>
-            <a:off x="914400" y="5184648"/>
-            <a:ext cx="1828800" cy="320040"/>
-          </a:xfrm>
-          <a:prstGeom prst="rect">
-            <a:avLst/>
-          </a:prstGeom>
-          <a:noFill/>
-          <a:ln/>
-        </p:spPr>
-        <p:txBody>
-          <a:bodyPr wrap="square" rtlCol="0" anchor="ctr"/>
-          <a:lstStyle/>
-          <a:p>
-            <a:pPr indent="0" marL="0">
-              <a:buNone/>
-            </a:pPr>
-            <a:r>
-              <a:rPr lang="en-US" sz="1400" b="1" dirty="0">
-                <a:solidFill>
-                  <a:srgbClr val="1E2235"/>
-                </a:solidFill>
-                <a:latin typeface="Microsoft JhengHei" pitchFamily="34" charset="0"/>
-                <a:ea typeface="Microsoft JhengHei" pitchFamily="34" charset="-122"/>
-                <a:cs typeface="Microsoft JhengHei" pitchFamily="34" charset="-120"/>
-              </a:rPr>
-              <a:t>產出驗收</a:t>
-            </a:r>
-            <a:endParaRPr lang="en-US" sz="1400" dirty="0"/>
-          </a:p>
-        </p:txBody>
-      </p:sp>
-      <p:pic>
-        <p:nvPicPr>
-          <p:cNvPr id="14" name="Image 2" descr="preencoded.png">    </p:cNvPr>
-          <p:cNvPicPr>
-            <a:picLocks noChangeAspect="1"/>
-          </p:cNvPicPr>
-          <p:nvPr/>
-        </p:nvPicPr>
-        <p:blipFill>
-          <a:blip r:embed="rId3"/>
-          <a:stretch>
-            <a:fillRect/>
-          </a:stretch>
-        </p:blipFill>
-        <p:spPr>
-          <a:xfrm>
-            <a:off x="2834640" y="5221224"/>
-            <a:ext cx="182880" cy="182880"/>
-          </a:xfrm>
-          <a:prstGeom prst="rect">
-            <a:avLst/>
-          </a:prstGeom>
-        </p:spPr>
-      </p:pic>
-      <p:sp>
-        <p:nvSpPr>
-          <p:cNvPr id="15" name="Text 10"/>
-          <p:cNvSpPr/>
-          <p:nvPr/>
-        </p:nvSpPr>
-        <p:spPr>
-          <a:xfrm>
-            <a:off x="3108960" y="5166360"/>
-            <a:ext cx="8168335" cy="310896"/>
-          </a:xfrm>
-          <a:prstGeom prst="rect">
-            <a:avLst/>
-          </a:prstGeom>
-          <a:noFill/>
-          <a:ln/>
-        </p:spPr>
-        <p:txBody>
-          <a:bodyPr wrap="square" rtlCol="0" anchor="ctr"/>
-          <a:lstStyle/>
-          <a:p>
-            <a:pPr indent="0" marL="0">
-              <a:buNone/>
-            </a:pPr>
-            <a:r>
-              <a:rPr lang="en-US" sz="1300" dirty="0">
-                <a:solidFill>
-                  <a:srgbClr val="1E2235"/>
-                </a:solidFill>
-                <a:latin typeface="Microsoft JhengHei" pitchFamily="34" charset="0"/>
-                <a:ea typeface="Microsoft JhengHei" pitchFamily="34" charset="-122"/>
-                <a:cs typeface="Microsoft JhengHei" pitchFamily="34" charset="-120"/>
-              </a:rPr>
-              <a:t>SKILL.md 有 YAML frontmatter，且 name 與 description 兩個欄位都存在</a:t>
-            </a:r>
-            <a:endParaRPr lang="en-US" sz="1300" dirty="0"/>
-          </a:p>
-        </p:txBody>
-      </p:sp>
-      <p:pic>
-        <p:nvPicPr>
-          <p:cNvPr id="16" name="Image 3" descr="preencoded.png">    </p:cNvPr>
-          <p:cNvPicPr>
-            <a:picLocks noChangeAspect="1"/>
-          </p:cNvPicPr>
-          <p:nvPr/>
-        </p:nvPicPr>
-        <p:blipFill>
-          <a:blip r:embed="rId4"/>
-          <a:stretch>
-            <a:fillRect/>
-          </a:stretch>
-        </p:blipFill>
-        <p:spPr>
-          <a:xfrm>
-            <a:off x="2834640" y="5559552"/>
-            <a:ext cx="182880" cy="182880"/>
-          </a:xfrm>
-          <a:prstGeom prst="rect">
-            <a:avLst/>
-          </a:prstGeom>
-        </p:spPr>
-      </p:pic>
-      <p:sp>
-        <p:nvSpPr>
-          <p:cNvPr id="17" name="Text 11"/>
-          <p:cNvSpPr/>
-          <p:nvPr/>
-        </p:nvSpPr>
-        <p:spPr>
-          <a:xfrm>
-            <a:off x="3108960" y="5504688"/>
-            <a:ext cx="8168335" cy="310896"/>
-          </a:xfrm>
-          <a:prstGeom prst="rect">
-            <a:avLst/>
-          </a:prstGeom>
-          <a:noFill/>
-          <a:ln/>
-        </p:spPr>
-        <p:txBody>
-          <a:bodyPr wrap="square" rtlCol="0" anchor="ctr"/>
-          <a:lstStyle/>
-          <a:p>
-            <a:pPr indent="0" marL="0">
-              <a:buNone/>
-            </a:pPr>
-            <a:r>
-              <a:rPr lang="en-US" sz="1300" dirty="0">
-                <a:solidFill>
-                  <a:srgbClr val="1E2235"/>
-                </a:solidFill>
-                <a:latin typeface="Microsoft JhengHei" pitchFamily="34" charset="0"/>
-                <a:ea typeface="Microsoft JhengHei" pitchFamily="34" charset="-122"/>
-                <a:cs typeface="Microsoft JhengHei" pitchFamily="34" charset="-120"/>
-              </a:rPr>
-              <a:t>description 裡有明確的觸發語句，中英文觸發詞都涵蓋到</a:t>
-            </a:r>
-            <a:endParaRPr lang="en-US" sz="1300" dirty="0"/>
-          </a:p>
-        </p:txBody>
-      </p:sp>
-      <p:pic>
-        <p:nvPicPr>
-          <p:cNvPr id="18" name="Image 4" descr="preencoded.png">    </p:cNvPr>
-          <p:cNvPicPr>
-            <a:picLocks noChangeAspect="1"/>
-          </p:cNvPicPr>
-          <p:nvPr/>
-        </p:nvPicPr>
-        <p:blipFill>
-          <a:blip r:embed="rId5"/>
-          <a:stretch>
-            <a:fillRect/>
-          </a:stretch>
-        </p:blipFill>
-        <p:spPr>
-          <a:xfrm>
-            <a:off x="2834640" y="5897880"/>
-            <a:ext cx="182880" cy="182880"/>
-          </a:xfrm>
-          <a:prstGeom prst="rect">
-            <a:avLst/>
-          </a:prstGeom>
-        </p:spPr>
-      </p:pic>
-      <p:sp>
-        <p:nvSpPr>
-          <p:cNvPr id="19" name="Text 12"/>
-          <p:cNvSpPr/>
-          <p:nvPr/>
-        </p:nvSpPr>
-        <p:spPr>
-          <a:xfrm>
-            <a:off x="3108960" y="5843016"/>
-            <a:ext cx="8168335" cy="310896"/>
-          </a:xfrm>
-          <a:prstGeom prst="rect">
-            <a:avLst/>
-          </a:prstGeom>
-          <a:noFill/>
-          <a:ln/>
-        </p:spPr>
-        <p:txBody>
-          <a:bodyPr wrap="square" rtlCol="0" anchor="ctr"/>
-          <a:lstStyle/>
-          <a:p>
-            <a:pPr indent="0" marL="0">
-              <a:buNone/>
-            </a:pPr>
-            <a:r>
-              <a:rPr lang="en-US" sz="1300" dirty="0">
-                <a:solidFill>
-                  <a:srgbClr val="1E2235"/>
-                </a:solidFill>
-                <a:latin typeface="Microsoft JhengHei" pitchFamily="34" charset="0"/>
-                <a:ea typeface="Microsoft JhengHei" pitchFamily="34" charset="-122"/>
-                <a:cs typeface="Microsoft JhengHei" pitchFamily="34" charset="-120"/>
-              </a:rPr>
-              <a:t>技能寫進了反向 scope 邊界（明確說明哪些情況不處理）</a:t>
-            </a:r>
-            <a:endParaRPr lang="en-US" sz="1300" dirty="0"/>
-          </a:p>
-        </p:txBody>
-      </p:sp>
-      <p:sp>
-        <p:nvSpPr>
-          <p:cNvPr id="20" name="Text 13"/>
-          <p:cNvSpPr/>
-          <p:nvPr/>
-        </p:nvSpPr>
-        <p:spPr>
-          <a:xfrm>
-            <a:off x="640080" y="6473952"/>
-            <a:ext cx="5486400" cy="274320"/>
-          </a:xfrm>
-          <a:prstGeom prst="rect">
-            <a:avLst/>
-          </a:prstGeom>
-          <a:noFill/>
-          <a:ln/>
-        </p:spPr>
-        <p:txBody>
-          <a:bodyPr wrap="square" rtlCol="0" anchor="ctr"/>
-          <a:lstStyle/>
-          <a:p>
-            <a:pPr algn="l" indent="0" marL="0">
-              <a:buNone/>
-            </a:pPr>
-            <a:r>
-              <a:rPr lang="en-US" sz="900" dirty="0">
-                <a:solidFill>
-                  <a:srgbClr val="5B6079"/>
-                </a:solidFill>
-                <a:latin typeface="Microsoft JhengHei" pitchFamily="34" charset="0"/>
-                <a:ea typeface="Microsoft JhengHei" pitchFamily="34" charset="-122"/>
-                <a:cs typeface="Microsoft JhengHei" pitchFamily="34" charset="-120"/>
-              </a:rPr>
-              <a:t>Microsoft 365 Copilot Cowork</a:t>
-            </a:r>
-            <a:endParaRPr lang="en-US" sz="900" dirty="0"/>
-          </a:p>
-        </p:txBody>
-      </p:sp>
-      <p:sp>
-        <p:nvSpPr>
-          <p:cNvPr id="21" name="Text 14"/>
-          <p:cNvSpPr/>
-          <p:nvPr/>
-        </p:nvSpPr>
-        <p:spPr>
-          <a:xfrm>
-            <a:off x="11002975" y="6473952"/>
-            <a:ext cx="548640" cy="274320"/>
-          </a:xfrm>
-          <a:prstGeom prst="rect">
-            <a:avLst/>
-          </a:prstGeom>
-          <a:noFill/>
-          <a:ln/>
-        </p:spPr>
-        <p:txBody>
-          <a:bodyPr wrap="square" rtlCol="0" anchor="ctr"/>
-          <a:lstStyle/>
-          <a:p>
-            <a:pPr algn="r" indent="0" marL="0">
-              <a:buNone/>
-            </a:pPr>
-            <a:r>
-              <a:rPr lang="en-US" sz="900" dirty="0">
-                <a:solidFill>
-                  <a:srgbClr val="5B6079"/>
                 </a:solidFill>
                 <a:latin typeface="Microsoft JhengHei" pitchFamily="34" charset="0"/>
                 <a:ea typeface="Microsoft JhengHei" pitchFamily="34" charset="-122"/>
@@ -10999,7 +11088,7 @@
             <a:avLst/>
           </a:prstGeom>
           <a:solidFill>
-            <a:srgbClr val="6366F1"/>
+            <a:srgbClr val="5C2E91"/>
           </a:solidFill>
           <a:ln/>
         </p:spPr>
@@ -11031,13 +11120,13 @@
             <a:r>
               <a:rPr lang="en-US" sz="1200" b="1" spc="200" kern="0" dirty="0">
                 <a:solidFill>
-                  <a:srgbClr val="6366F1"/>
-                </a:solidFill>
-                <a:latin typeface="Microsoft JhengHei" pitchFamily="34" charset="0"/>
-                <a:ea typeface="Microsoft JhengHei" pitchFamily="34" charset="-122"/>
-                <a:cs typeface="Microsoft JhengHei" pitchFamily="34" charset="-120"/>
-              </a:rPr>
-              <a:t>MAKE IT YOURS</a:t>
+                  <a:srgbClr val="5C2E91"/>
+                </a:solidFill>
+                <a:latin typeface="Microsoft JhengHei" pitchFamily="34" charset="0"/>
+                <a:ea typeface="Microsoft JhengHei" pitchFamily="34" charset="-122"/>
+                <a:cs typeface="Microsoft JhengHei" pitchFamily="34" charset="-120"/>
+              </a:rPr>
+              <a:t>情境 05 · 實機示範</a:t>
             </a:r>
             <a:endParaRPr lang="en-US" sz="1200" dirty="0"/>
           </a:p>
@@ -11076,7 +11165,7 @@
                 <a:ea typeface="Microsoft JhengHei" pitchFamily="34" charset="-122"/>
                 <a:cs typeface="Microsoft JhengHei" pitchFamily="34" charset="-120"/>
               </a:rPr>
-              <a:t>把情境延伸到你的日常</a:t>
+              <a:t>看 Cowork 怎麼做、產出什麼</a:t>
             </a:r>
             <a:endParaRPr lang="en-US" sz="3000" dirty="0"/>
           </a:p>
@@ -11090,8 +11179,8 @@
         </p:nvSpPr>
         <p:spPr>
           <a:xfrm>
-            <a:off x="640080" y="1783080"/>
-            <a:ext cx="10911535" cy="731520"/>
+            <a:off x="585216" y="1773936"/>
+            <a:ext cx="5184648" cy="3433186"/>
           </a:xfrm>
           <a:prstGeom prst="rect">
             <a:avLst/>
@@ -11105,38 +11194,88 @@
             </a:solidFill>
             <a:prstDash val="solid"/>
           </a:ln>
-        </p:spPr>
-      </p:sp>
-      <p:sp>
-        <p:nvSpPr>
-          <p:cNvPr id="6" name="Shape 4"/>
-          <p:cNvSpPr/>
-          <p:nvPr/>
-        </p:nvSpPr>
-        <p:spPr>
-          <a:xfrm>
-            <a:off x="841248" y="1929384"/>
-            <a:ext cx="438912" cy="438912"/>
-          </a:xfrm>
-          <a:prstGeom prst="ellipse">
-            <a:avLst/>
-          </a:prstGeom>
-          <a:solidFill>
-            <a:srgbClr val="B1420A"/>
-          </a:solidFill>
-          <a:ln/>
-        </p:spPr>
-      </p:sp>
-      <p:sp>
-        <p:nvSpPr>
-          <p:cNvPr id="7" name="Shape 5"/>
-          <p:cNvSpPr/>
-          <p:nvPr/>
-        </p:nvSpPr>
-        <p:spPr>
-          <a:xfrm>
-            <a:off x="640080" y="2624328"/>
-            <a:ext cx="10911535" cy="731520"/>
+          <a:effectLst>
+            <a:outerShdw sx="100000" sy="100000" kx="0" ky="0" algn="bl" rotWithShape="0" blurRad="114300" dist="38100" dir="5400000">
+              <a:srgbClr val="8A90B5">
+                <a:alpha val="22000"/>
+              </a:srgbClr>
+            </a:outerShdw>
+          </a:effectLst>
+        </p:spPr>
+      </p:sp>
+      <p:pic>
+        <p:nvPicPr>
+          <p:cNvPr id="6" name="Image 0" descr="C:\temp\CoworkLab\v2\_working\screenshots\mfgx5_01_copyfile_approval.png">    </p:cNvPr>
+          <p:cNvPicPr>
+            <a:picLocks noChangeAspect="1"/>
+          </p:cNvPicPr>
+          <p:nvPr/>
+        </p:nvPicPr>
+        <p:blipFill>
+          <a:blip r:embed="rId1"/>
+          <a:stretch>
+            <a:fillRect/>
+          </a:stretch>
+        </p:blipFill>
+        <p:spPr>
+          <a:xfrm>
+            <a:off x="640080" y="1828800"/>
+            <a:ext cx="5074920" cy="3323458"/>
+          </a:xfrm>
+          <a:prstGeom prst="rect">
+            <a:avLst/>
+          </a:prstGeom>
+        </p:spPr>
+      </p:pic>
+      <p:sp>
+        <p:nvSpPr>
+          <p:cNvPr id="7" name="Text 4"/>
+          <p:cNvSpPr/>
+          <p:nvPr/>
+        </p:nvSpPr>
+        <p:spPr>
+          <a:xfrm>
+            <a:off x="640080" y="5261986"/>
+            <a:ext cx="5074920" cy="320040"/>
+          </a:xfrm>
+          <a:prstGeom prst="rect">
+            <a:avLst/>
+          </a:prstGeom>
+          <a:noFill/>
+          <a:ln/>
+        </p:spPr>
+        <p:txBody>
+          <a:bodyPr wrap="square" rtlCol="0" anchor="ctr"/>
+          <a:lstStyle/>
+          <a:p>
+            <a:pPr algn="ctr" indent="0" marL="0">
+              <a:buNone/>
+            </a:pPr>
+            <a:r>
+              <a:rPr lang="en-US" sz="1350" b="1" dirty="0">
+                <a:solidFill>
+                  <a:srgbClr val="5C2E91"/>
+                </a:solidFill>
+                <a:latin typeface="Microsoft JhengHei" pitchFamily="34" charset="0"/>
+                <a:ea typeface="Microsoft JhengHei" pitchFamily="34" charset="-122"/>
+                <a:cs typeface="Microsoft JhengHei" pitchFamily="34" charset="-120"/>
+              </a:rPr>
+              <a:t>① 你的輸入與指令</a:t>
+            </a:r>
+            <a:endParaRPr lang="en-US" sz="1350" dirty="0"/>
+          </a:p>
+        </p:txBody>
+      </p:sp>
+      <p:sp>
+        <p:nvSpPr>
+          <p:cNvPr id="8" name="Shape 5"/>
+          <p:cNvSpPr/>
+          <p:nvPr/>
+        </p:nvSpPr>
+        <p:spPr>
+          <a:xfrm>
+            <a:off x="6163056" y="1773936"/>
+            <a:ext cx="5184648" cy="3433186"/>
           </a:xfrm>
           <a:prstGeom prst="rect">
             <a:avLst/>
@@ -11150,38 +11289,88 @@
             </a:solidFill>
             <a:prstDash val="solid"/>
           </a:ln>
-        </p:spPr>
-      </p:sp>
-      <p:sp>
-        <p:nvSpPr>
-          <p:cNvPr id="8" name="Shape 6"/>
-          <p:cNvSpPr/>
-          <p:nvPr/>
-        </p:nvSpPr>
-        <p:spPr>
-          <a:xfrm>
-            <a:off x="841248" y="2770632"/>
-            <a:ext cx="438912" cy="438912"/>
-          </a:xfrm>
-          <a:prstGeom prst="ellipse">
-            <a:avLst/>
-          </a:prstGeom>
-          <a:solidFill>
-            <a:srgbClr val="C50F1F"/>
-          </a:solidFill>
-          <a:ln/>
-        </p:spPr>
-      </p:sp>
-      <p:sp>
-        <p:nvSpPr>
-          <p:cNvPr id="9" name="Shape 7"/>
-          <p:cNvSpPr/>
-          <p:nvPr/>
-        </p:nvSpPr>
-        <p:spPr>
-          <a:xfrm>
-            <a:off x="640080" y="3465576"/>
-            <a:ext cx="10911535" cy="731520"/>
+          <a:effectLst>
+            <a:outerShdw sx="100000" sy="100000" kx="0" ky="0" algn="bl" rotWithShape="0" blurRad="114300" dist="38100" dir="5400000">
+              <a:srgbClr val="8A90B5">
+                <a:alpha val="22000"/>
+              </a:srgbClr>
+            </a:outerShdw>
+          </a:effectLst>
+        </p:spPr>
+      </p:sp>
+      <p:pic>
+        <p:nvPicPr>
+          <p:cNvPr id="9" name="Image 1" descr="C:\temp\CoworkLab\v2\_working\screenshots\mfgx_99_automations_paused.png">    </p:cNvPr>
+          <p:cNvPicPr>
+            <a:picLocks noChangeAspect="1"/>
+          </p:cNvPicPr>
+          <p:nvPr/>
+        </p:nvPicPr>
+        <p:blipFill>
+          <a:blip r:embed="rId2"/>
+          <a:stretch>
+            <a:fillRect/>
+          </a:stretch>
+        </p:blipFill>
+        <p:spPr>
+          <a:xfrm>
+            <a:off x="6217920" y="1828800"/>
+            <a:ext cx="5074920" cy="3323458"/>
+          </a:xfrm>
+          <a:prstGeom prst="rect">
+            <a:avLst/>
+          </a:prstGeom>
+        </p:spPr>
+      </p:pic>
+      <p:sp>
+        <p:nvSpPr>
+          <p:cNvPr id="10" name="Text 6"/>
+          <p:cNvSpPr/>
+          <p:nvPr/>
+        </p:nvSpPr>
+        <p:spPr>
+          <a:xfrm>
+            <a:off x="6217920" y="5261986"/>
+            <a:ext cx="5074920" cy="320040"/>
+          </a:xfrm>
+          <a:prstGeom prst="rect">
+            <a:avLst/>
+          </a:prstGeom>
+          <a:noFill/>
+          <a:ln/>
+        </p:spPr>
+        <p:txBody>
+          <a:bodyPr wrap="square" rtlCol="0" anchor="ctr"/>
+          <a:lstStyle/>
+          <a:p>
+            <a:pPr algn="ctr" indent="0" marL="0">
+              <a:buNone/>
+            </a:pPr>
+            <a:r>
+              <a:rPr lang="en-US" sz="1350" b="1" dirty="0">
+                <a:solidFill>
+                  <a:srgbClr val="5C2E91"/>
+                </a:solidFill>
+                <a:latin typeface="Microsoft JhengHei" pitchFamily="34" charset="0"/>
+                <a:ea typeface="Microsoft JhengHei" pitchFamily="34" charset="-122"/>
+                <a:cs typeface="Microsoft JhengHei" pitchFamily="34" charset="-120"/>
+              </a:rPr>
+              <a:t>② 產出成果</a:t>
+            </a:r>
+            <a:endParaRPr lang="en-US" sz="1350" dirty="0"/>
+          </a:p>
+        </p:txBody>
+      </p:sp>
+      <p:sp>
+        <p:nvSpPr>
+          <p:cNvPr id="11" name="Shape 7"/>
+          <p:cNvSpPr/>
+          <p:nvPr/>
+        </p:nvSpPr>
+        <p:spPr>
+          <a:xfrm>
+            <a:off x="640080" y="5074920"/>
+            <a:ext cx="10911535" cy="1143000"/>
           </a:xfrm>
           <a:prstGeom prst="rect">
             <a:avLst/>
@@ -11199,106 +11388,16 @@
       </p:sp>
       <p:sp>
         <p:nvSpPr>
-          <p:cNvPr id="10" name="Shape 8"/>
-          <p:cNvSpPr/>
-          <p:nvPr/>
-        </p:nvSpPr>
-        <p:spPr>
-          <a:xfrm>
-            <a:off x="841248" y="3611880"/>
-            <a:ext cx="438912" cy="438912"/>
-          </a:xfrm>
-          <a:prstGeom prst="ellipse">
-            <a:avLst/>
-          </a:prstGeom>
-          <a:solidFill>
-            <a:srgbClr val="0B6A0B"/>
-          </a:solidFill>
-          <a:ln/>
-        </p:spPr>
-      </p:sp>
-      <p:sp>
-        <p:nvSpPr>
-          <p:cNvPr id="11" name="Shape 9"/>
-          <p:cNvSpPr/>
-          <p:nvPr/>
-        </p:nvSpPr>
-        <p:spPr>
-          <a:xfrm>
-            <a:off x="640080" y="4306824"/>
-            <a:ext cx="10911535" cy="731520"/>
-          </a:xfrm>
-          <a:prstGeom prst="rect">
-            <a:avLst/>
-          </a:prstGeom>
-          <a:solidFill>
-            <a:srgbClr val="FFFFFF"/>
-          </a:solidFill>
-          <a:ln w="12700">
-            <a:solidFill>
-              <a:srgbClr val="E4E7F2"/>
-            </a:solidFill>
-            <a:prstDash val="solid"/>
-          </a:ln>
-        </p:spPr>
-      </p:sp>
-      <p:sp>
-        <p:nvSpPr>
-          <p:cNvPr id="12" name="Shape 10"/>
-          <p:cNvSpPr/>
-          <p:nvPr/>
-        </p:nvSpPr>
-        <p:spPr>
-          <a:xfrm>
-            <a:off x="841248" y="4453128"/>
-            <a:ext cx="438912" cy="438912"/>
-          </a:xfrm>
-          <a:prstGeom prst="ellipse">
-            <a:avLst/>
-          </a:prstGeom>
-          <a:solidFill>
-            <a:srgbClr val="005B70"/>
-          </a:solidFill>
-          <a:ln/>
-        </p:spPr>
-      </p:sp>
-      <p:sp>
-        <p:nvSpPr>
-          <p:cNvPr id="13" name="Shape 11"/>
-          <p:cNvSpPr/>
-          <p:nvPr/>
-        </p:nvSpPr>
-        <p:spPr>
-          <a:xfrm>
-            <a:off x="640080" y="5148072"/>
-            <a:ext cx="10911535" cy="731520"/>
-          </a:xfrm>
-          <a:prstGeom prst="rect">
-            <a:avLst/>
-          </a:prstGeom>
-          <a:solidFill>
-            <a:srgbClr val="FFFFFF"/>
-          </a:solidFill>
-          <a:ln w="12700">
-            <a:solidFill>
-              <a:srgbClr val="E4E7F2"/>
-            </a:solidFill>
-            <a:prstDash val="solid"/>
-          </a:ln>
-        </p:spPr>
-      </p:sp>
-      <p:sp>
-        <p:nvSpPr>
-          <p:cNvPr id="14" name="Shape 12"/>
-          <p:cNvSpPr/>
-          <p:nvPr/>
-        </p:nvSpPr>
-        <p:spPr>
-          <a:xfrm>
-            <a:off x="841248" y="5294376"/>
-            <a:ext cx="438912" cy="438912"/>
-          </a:xfrm>
-          <a:prstGeom prst="ellipse">
+          <p:cNvPr id="12" name="Shape 8"/>
+          <p:cNvSpPr/>
+          <p:nvPr/>
+        </p:nvSpPr>
+        <p:spPr>
+          <a:xfrm>
+            <a:off x="640080" y="5074920"/>
+            <a:ext cx="91440" cy="1143000"/>
+          </a:xfrm>
+          <a:prstGeom prst="rect">
             <a:avLst/>
           </a:prstGeom>
           <a:solidFill>
@@ -11307,219 +11406,48 @@
           <a:ln/>
         </p:spPr>
       </p:sp>
+      <p:sp>
+        <p:nvSpPr>
+          <p:cNvPr id="13" name="Text 9"/>
+          <p:cNvSpPr/>
+          <p:nvPr/>
+        </p:nvSpPr>
+        <p:spPr>
+          <a:xfrm>
+            <a:off x="914400" y="5184648"/>
+            <a:ext cx="1828800" cy="320040"/>
+          </a:xfrm>
+          <a:prstGeom prst="rect">
+            <a:avLst/>
+          </a:prstGeom>
+          <a:noFill/>
+          <a:ln/>
+        </p:spPr>
+        <p:txBody>
+          <a:bodyPr wrap="square" rtlCol="0" anchor="ctr"/>
+          <a:lstStyle/>
+          <a:p>
+            <a:pPr indent="0" marL="0">
+              <a:buNone/>
+            </a:pPr>
+            <a:r>
+              <a:rPr lang="en-US" sz="1400" b="1" dirty="0">
+                <a:solidFill>
+                  <a:srgbClr val="1E2235"/>
+                </a:solidFill>
+                <a:latin typeface="Microsoft JhengHei" pitchFamily="34" charset="0"/>
+                <a:ea typeface="Microsoft JhengHei" pitchFamily="34" charset="-122"/>
+                <a:cs typeface="Microsoft JhengHei" pitchFamily="34" charset="-120"/>
+              </a:rPr>
+              <a:t>產出驗收</a:t>
+            </a:r>
+            <a:endParaRPr lang="en-US" sz="1400" dirty="0"/>
+          </a:p>
+        </p:txBody>
+      </p:sp>
       <p:pic>
         <p:nvPicPr>
-          <p:cNvPr id="15" name="Image 0" descr="preencoded.png">    </p:cNvPr>
-          <p:cNvPicPr>
-            <a:picLocks noChangeAspect="1"/>
-          </p:cNvPicPr>
-          <p:nvPr/>
-        </p:nvPicPr>
-        <p:blipFill>
-          <a:blip r:embed="rId1"/>
-          <a:stretch>
-            <a:fillRect/>
-          </a:stretch>
-        </p:blipFill>
-        <p:spPr>
-          <a:xfrm>
-            <a:off x="950976" y="2039112"/>
-            <a:ext cx="219456" cy="219456"/>
-          </a:xfrm>
-          <a:prstGeom prst="rect">
-            <a:avLst/>
-          </a:prstGeom>
-        </p:spPr>
-      </p:pic>
-      <p:sp>
-        <p:nvSpPr>
-          <p:cNvPr id="16" name="Text 13"/>
-          <p:cNvSpPr/>
-          <p:nvPr/>
-        </p:nvSpPr>
-        <p:spPr>
-          <a:xfrm>
-            <a:off x="1417320" y="1819656"/>
-            <a:ext cx="2182307" cy="658368"/>
-          </a:xfrm>
-          <a:prstGeom prst="rect">
-            <a:avLst/>
-          </a:prstGeom>
-          <a:noFill/>
-          <a:ln/>
-        </p:spPr>
-        <p:txBody>
-          <a:bodyPr wrap="square" rtlCol="0" anchor="ctr"/>
-          <a:lstStyle/>
-          <a:p>
-            <a:pPr indent="0" marL="0">
-              <a:buNone/>
-            </a:pPr>
-            <a:r>
-              <a:rPr lang="en-US" sz="1400" b="1" dirty="0">
-                <a:solidFill>
-                  <a:srgbClr val="B1420A"/>
-                </a:solidFill>
-                <a:latin typeface="Microsoft JhengHei" pitchFamily="34" charset="0"/>
-                <a:ea typeface="Microsoft JhengHei" pitchFamily="34" charset="-122"/>
-                <a:cs typeface="Microsoft JhengHei" pitchFamily="34" charset="-120"/>
-              </a:rPr>
-              <a:t>製造業（進階）· 品保</a:t>
-            </a:r>
-            <a:endParaRPr lang="en-US" sz="1400" dirty="0"/>
-          </a:p>
-        </p:txBody>
-      </p:sp>
-      <p:sp>
-        <p:nvSpPr>
-          <p:cNvPr id="17" name="Text 14"/>
-          <p:cNvSpPr/>
-          <p:nvPr/>
-        </p:nvSpPr>
-        <p:spPr>
-          <a:xfrm>
-            <a:off x="3586195" y="1819656"/>
-            <a:ext cx="7747190" cy="658368"/>
-          </a:xfrm>
-          <a:prstGeom prst="rect">
-            <a:avLst/>
-          </a:prstGeom>
-          <a:noFill/>
-          <a:ln/>
-        </p:spPr>
-        <p:txBody>
-          <a:bodyPr wrap="square" rtlCol="0" anchor="ctr"/>
-          <a:lstStyle/>
-          <a:p>
-            <a:pPr indent="0" marL="0">
-              <a:lnSpc>
-                <a:spcPct val="108000"/>
-              </a:lnSpc>
-              <a:buNone/>
-            </a:pPr>
-            <a:r>
-              <a:rPr lang="en-US" sz="1350" dirty="0">
-                <a:solidFill>
-                  <a:srgbClr val="1E2235"/>
-                </a:solidFill>
-                <a:latin typeface="Microsoft JhengHei" pitchFamily="34" charset="0"/>
-                <a:ea typeface="Microsoft JhengHei" pitchFamily="34" charset="-122"/>
-                <a:cs typeface="Microsoft JhengHei" pitchFamily="34" charset="-120"/>
-              </a:rPr>
-              <a:t>💡 把「該通知誰」也寫進 OneDrive 的標準文件，讓窗口異動時只要改文件、不必改指令。</a:t>
-            </a:r>
-            <a:endParaRPr lang="en-US" sz="1350" dirty="0"/>
-          </a:p>
-        </p:txBody>
-      </p:sp>
-      <p:pic>
-        <p:nvPicPr>
-          <p:cNvPr id="18" name="Image 1" descr="preencoded.png">    </p:cNvPr>
-          <p:cNvPicPr>
-            <a:picLocks noChangeAspect="1"/>
-          </p:cNvPicPr>
-          <p:nvPr/>
-        </p:nvPicPr>
-        <p:blipFill>
-          <a:blip r:embed="rId2"/>
-          <a:stretch>
-            <a:fillRect/>
-          </a:stretch>
-        </p:blipFill>
-        <p:spPr>
-          <a:xfrm>
-            <a:off x="950976" y="2880360"/>
-            <a:ext cx="219456" cy="219456"/>
-          </a:xfrm>
-          <a:prstGeom prst="rect">
-            <a:avLst/>
-          </a:prstGeom>
-        </p:spPr>
-      </p:pic>
-      <p:sp>
-        <p:nvSpPr>
-          <p:cNvPr id="19" name="Text 15"/>
-          <p:cNvSpPr/>
-          <p:nvPr/>
-        </p:nvSpPr>
-        <p:spPr>
-          <a:xfrm>
-            <a:off x="1417320" y="2660904"/>
-            <a:ext cx="2182307" cy="658368"/>
-          </a:xfrm>
-          <a:prstGeom prst="rect">
-            <a:avLst/>
-          </a:prstGeom>
-          <a:noFill/>
-          <a:ln/>
-        </p:spPr>
-        <p:txBody>
-          <a:bodyPr wrap="square" rtlCol="0" anchor="ctr"/>
-          <a:lstStyle/>
-          <a:p>
-            <a:pPr indent="0" marL="0">
-              <a:buNone/>
-            </a:pPr>
-            <a:r>
-              <a:rPr lang="en-US" sz="1400" b="1" dirty="0">
-                <a:solidFill>
-                  <a:srgbClr val="C50F1F"/>
-                </a:solidFill>
-                <a:latin typeface="Microsoft JhengHei" pitchFamily="34" charset="0"/>
-                <a:ea typeface="Microsoft JhengHei" pitchFamily="34" charset="-122"/>
-                <a:cs typeface="Microsoft JhengHei" pitchFamily="34" charset="-120"/>
-              </a:rPr>
-              <a:t>製造業（進階）· 應變</a:t>
-            </a:r>
-            <a:endParaRPr lang="en-US" sz="1400" dirty="0"/>
-          </a:p>
-        </p:txBody>
-      </p:sp>
-      <p:sp>
-        <p:nvSpPr>
-          <p:cNvPr id="20" name="Text 16"/>
-          <p:cNvSpPr/>
-          <p:nvPr/>
-        </p:nvSpPr>
-        <p:spPr>
-          <a:xfrm>
-            <a:off x="3586195" y="2660904"/>
-            <a:ext cx="7747190" cy="658368"/>
-          </a:xfrm>
-          <a:prstGeom prst="rect">
-            <a:avLst/>
-          </a:prstGeom>
-          <a:noFill/>
-          <a:ln/>
-        </p:spPr>
-        <p:txBody>
-          <a:bodyPr wrap="square" rtlCol="0" anchor="ctr"/>
-          <a:lstStyle/>
-          <a:p>
-            <a:pPr indent="0" marL="0">
-              <a:lnSpc>
-                <a:spcPct val="108000"/>
-              </a:lnSpc>
-              <a:buNone/>
-            </a:pPr>
-            <a:r>
-              <a:rPr lang="en-US" sz="1350" dirty="0">
-                <a:solidFill>
-                  <a:srgbClr val="1E2235"/>
-                </a:solidFill>
-                <a:latin typeface="Microsoft JhengHei" pitchFamily="34" charset="0"/>
-                <a:ea typeface="Microsoft JhengHei" pitchFamily="34" charset="-122"/>
-                <a:cs typeface="Microsoft JhengHei" pitchFamily="34" charset="-120"/>
-              </a:rPr>
-              <a:t>💡 把觸發關鍵字換成你們實際的事故通報主旨前綴，例如「[異常通報]」。</a:t>
-            </a:r>
-            <a:endParaRPr lang="en-US" sz="1350" dirty="0"/>
-          </a:p>
-        </p:txBody>
-      </p:sp>
-      <p:pic>
-        <p:nvPicPr>
-          <p:cNvPr id="21" name="Image 2" descr="preencoded.png">    </p:cNvPr>
+          <p:cNvPr id="14" name="Image 2" descr="preencoded.png">    </p:cNvPr>
           <p:cNvPicPr>
             <a:picLocks noChangeAspect="1"/>
           </p:cNvPicPr>
@@ -11533,8 +11461,8 @@
         </p:blipFill>
         <p:spPr>
           <a:xfrm>
-            <a:off x="950976" y="3721608"/>
-            <a:ext cx="219456" cy="219456"/>
+            <a:off x="2834640" y="5221224"/>
+            <a:ext cx="182880" cy="182880"/>
           </a:xfrm>
           <a:prstGeom prst="rect">
             <a:avLst/>
@@ -11543,14 +11471,14 @@
       </p:pic>
       <p:sp>
         <p:nvSpPr>
-          <p:cNvPr id="22" name="Text 17"/>
-          <p:cNvSpPr/>
-          <p:nvPr/>
-        </p:nvSpPr>
-        <p:spPr>
-          <a:xfrm>
-            <a:off x="1417320" y="3502152"/>
-            <a:ext cx="2182307" cy="658368"/>
+          <p:cNvPr id="15" name="Text 10"/>
+          <p:cNvSpPr/>
+          <p:nvPr/>
+        </p:nvSpPr>
+        <p:spPr>
+          <a:xfrm>
+            <a:off x="3108960" y="5166360"/>
+            <a:ext cx="8168335" cy="310896"/>
           </a:xfrm>
           <a:prstGeom prst="rect">
             <a:avLst/>
@@ -11566,49 +11494,7 @@
               <a:buNone/>
             </a:pPr>
             <a:r>
-              <a:rPr lang="en-US" sz="1400" b="1" dirty="0">
-                <a:solidFill>
-                  <a:srgbClr val="0B6A0B"/>
-                </a:solidFill>
-                <a:latin typeface="Microsoft JhengHei" pitchFamily="34" charset="0"/>
-                <a:ea typeface="Microsoft JhengHei" pitchFamily="34" charset="-122"/>
-                <a:cs typeface="Microsoft JhengHei" pitchFamily="34" charset="-120"/>
-              </a:rPr>
-              <a:t>製造業（進階）· 生產</a:t>
-            </a:r>
-            <a:endParaRPr lang="en-US" sz="1400" dirty="0"/>
-          </a:p>
-        </p:txBody>
-      </p:sp>
-      <p:sp>
-        <p:nvSpPr>
-          <p:cNvPr id="23" name="Text 18"/>
-          <p:cNvSpPr/>
-          <p:nvPr/>
-        </p:nvSpPr>
-        <p:spPr>
-          <a:xfrm>
-            <a:off x="3586195" y="3502152"/>
-            <a:ext cx="7747190" cy="658368"/>
-          </a:xfrm>
-          <a:prstGeom prst="rect">
-            <a:avLst/>
-          </a:prstGeom>
-          <a:noFill/>
-          <a:ln/>
-        </p:spPr>
-        <p:txBody>
-          <a:bodyPr wrap="square" rtlCol="0" anchor="ctr"/>
-          <a:lstStyle/>
-          <a:p>
-            <a:pPr indent="0" marL="0">
-              <a:lnSpc>
-                <a:spcPct val="108000"/>
-              </a:lnSpc>
-              <a:buNone/>
-            </a:pPr>
-            <a:r>
-              <a:rPr lang="en-US" sz="1350" dirty="0">
+              <a:rPr lang="en-US" sz="1300" dirty="0">
                 <a:solidFill>
                   <a:srgbClr val="1E2235"/>
                 </a:solidFill>
@@ -11616,15 +11502,15 @@
                 <a:ea typeface="Microsoft JhengHei" pitchFamily="34" charset="-122"/>
                 <a:cs typeface="Microsoft JhengHei" pitchFamily="34" charset="-120"/>
               </a:rPr>
-              <a:t>💡 把警訊門檻改成你們自己的 KPI 標準，只改 OneDrive 的規則文件、不動排程任務。</a:t>
-            </a:r>
-            <a:endParaRPr lang="en-US" sz="1350" dirty="0"/>
+              <a:t>SKILL.md 有 YAML frontmatter，且 name 與 description 兩個欄位都存在</a:t>
+            </a:r>
+            <a:endParaRPr lang="en-US" sz="1300" dirty="0"/>
           </a:p>
         </p:txBody>
       </p:sp>
       <p:pic>
         <p:nvPicPr>
-          <p:cNvPr id="24" name="Image 3" descr="preencoded.png">    </p:cNvPr>
+          <p:cNvPr id="16" name="Image 3" descr="preencoded.png">    </p:cNvPr>
           <p:cNvPicPr>
             <a:picLocks noChangeAspect="1"/>
           </p:cNvPicPr>
@@ -11638,8 +11524,8 @@
         </p:blipFill>
         <p:spPr>
           <a:xfrm>
-            <a:off x="950976" y="4562856"/>
-            <a:ext cx="219456" cy="219456"/>
+            <a:off x="2834640" y="5559552"/>
+            <a:ext cx="182880" cy="182880"/>
           </a:xfrm>
           <a:prstGeom prst="rect">
             <a:avLst/>
@@ -11648,14 +11534,14 @@
       </p:pic>
       <p:sp>
         <p:nvSpPr>
-          <p:cNvPr id="25" name="Text 19"/>
-          <p:cNvSpPr/>
-          <p:nvPr/>
-        </p:nvSpPr>
-        <p:spPr>
-          <a:xfrm>
-            <a:off x="1417320" y="4343400"/>
-            <a:ext cx="2182307" cy="658368"/>
+          <p:cNvPr id="17" name="Text 11"/>
+          <p:cNvSpPr/>
+          <p:nvPr/>
+        </p:nvSpPr>
+        <p:spPr>
+          <a:xfrm>
+            <a:off x="3108960" y="5504688"/>
+            <a:ext cx="8168335" cy="310896"/>
           </a:xfrm>
           <a:prstGeom prst="rect">
             <a:avLst/>
@@ -11671,49 +11557,7 @@
               <a:buNone/>
             </a:pPr>
             <a:r>
-              <a:rPr lang="en-US" sz="1400" b="1" dirty="0">
-                <a:solidFill>
-                  <a:srgbClr val="005B70"/>
-                </a:solidFill>
-                <a:latin typeface="Microsoft JhengHei" pitchFamily="34" charset="0"/>
-                <a:ea typeface="Microsoft JhengHei" pitchFamily="34" charset="-122"/>
-                <a:cs typeface="Microsoft JhengHei" pitchFamily="34" charset="-120"/>
-              </a:rPr>
-              <a:t>製造業（進階）· 稽核</a:t>
-            </a:r>
-            <a:endParaRPr lang="en-US" sz="1400" dirty="0"/>
-          </a:p>
-        </p:txBody>
-      </p:sp>
-      <p:sp>
-        <p:nvSpPr>
-          <p:cNvPr id="26" name="Text 20"/>
-          <p:cNvSpPr/>
-          <p:nvPr/>
-        </p:nvSpPr>
-        <p:spPr>
-          <a:xfrm>
-            <a:off x="3586195" y="4343400"/>
-            <a:ext cx="7747190" cy="658368"/>
-          </a:xfrm>
-          <a:prstGeom prst="rect">
-            <a:avLst/>
-          </a:prstGeom>
-          <a:noFill/>
-          <a:ln/>
-        </p:spPr>
-        <p:txBody>
-          <a:bodyPr wrap="square" rtlCol="0" anchor="ctr"/>
-          <a:lstStyle/>
-          <a:p>
-            <a:pPr indent="0" marL="0">
-              <a:lnSpc>
-                <a:spcPct val="108000"/>
-              </a:lnSpc>
-              <a:buNone/>
-            </a:pPr>
-            <a:r>
-              <a:rPr lang="en-US" sz="1350" dirty="0">
+              <a:rPr lang="en-US" sz="1300" dirty="0">
                 <a:solidFill>
                   <a:srgbClr val="1E2235"/>
                 </a:solidFill>
@@ -11721,15 +11565,15 @@
                 <a:ea typeface="Microsoft JhengHei" pitchFamily="34" charset="-122"/>
                 <a:cs typeface="Microsoft JhengHei" pitchFamily="34" charset="-120"/>
               </a:rPr>
-              <a:t>💡 把檢核表換成你們實際的內稽查檢核表，測試同一套流程能不能直接沿用。</a:t>
-            </a:r>
-            <a:endParaRPr lang="en-US" sz="1350" dirty="0"/>
+              <a:t>description 裡有明確的觸發語句，中英文觸發詞都涵蓋到</a:t>
+            </a:r>
+            <a:endParaRPr lang="en-US" sz="1300" dirty="0"/>
           </a:p>
         </p:txBody>
       </p:sp>
       <p:pic>
         <p:nvPicPr>
-          <p:cNvPr id="27" name="Image 4" descr="preencoded.png">    </p:cNvPr>
+          <p:cNvPr id="18" name="Image 4" descr="preencoded.png">    </p:cNvPr>
           <p:cNvPicPr>
             <a:picLocks noChangeAspect="1"/>
           </p:cNvPicPr>
@@ -11743,8 +11587,8 @@
         </p:blipFill>
         <p:spPr>
           <a:xfrm>
-            <a:off x="950976" y="5404104"/>
-            <a:ext cx="219456" cy="219456"/>
+            <a:off x="2834640" y="5897880"/>
+            <a:ext cx="182880" cy="182880"/>
           </a:xfrm>
           <a:prstGeom prst="rect">
             <a:avLst/>
@@ -11753,14 +11597,14 @@
       </p:pic>
       <p:sp>
         <p:nvSpPr>
-          <p:cNvPr id="28" name="Text 21"/>
-          <p:cNvSpPr/>
-          <p:nvPr/>
-        </p:nvSpPr>
-        <p:spPr>
-          <a:xfrm>
-            <a:off x="1417320" y="5184648"/>
-            <a:ext cx="2182307" cy="658368"/>
+          <p:cNvPr id="19" name="Text 12"/>
+          <p:cNvSpPr/>
+          <p:nvPr/>
+        </p:nvSpPr>
+        <p:spPr>
+          <a:xfrm>
+            <a:off x="3108960" y="5843016"/>
+            <a:ext cx="8168335" cy="310896"/>
           </a:xfrm>
           <a:prstGeom prst="rect">
             <a:avLst/>
@@ -11776,49 +11620,7 @@
               <a:buNone/>
             </a:pPr>
             <a:r>
-              <a:rPr lang="en-US" sz="1400" b="1" dirty="0">
-                <a:solidFill>
-                  <a:srgbClr val="5C2E91"/>
-                </a:solidFill>
-                <a:latin typeface="Microsoft JhengHei" pitchFamily="34" charset="0"/>
-                <a:ea typeface="Microsoft JhengHei" pitchFamily="34" charset="-122"/>
-                <a:cs typeface="Microsoft JhengHei" pitchFamily="34" charset="-120"/>
-              </a:rPr>
-              <a:t>製造業（進階）· 自訂技能</a:t>
-            </a:r>
-            <a:endParaRPr lang="en-US" sz="1400" dirty="0"/>
-          </a:p>
-        </p:txBody>
-      </p:sp>
-      <p:sp>
-        <p:nvSpPr>
-          <p:cNvPr id="29" name="Text 22"/>
-          <p:cNvSpPr/>
-          <p:nvPr/>
-        </p:nvSpPr>
-        <p:spPr>
-          <a:xfrm>
-            <a:off x="3586195" y="5184648"/>
-            <a:ext cx="7747190" cy="658368"/>
-          </a:xfrm>
-          <a:prstGeom prst="rect">
-            <a:avLst/>
-          </a:prstGeom>
-          <a:noFill/>
-          <a:ln/>
-        </p:spPr>
-        <p:txBody>
-          <a:bodyPr wrap="square" rtlCol="0" anchor="ctr"/>
-          <a:lstStyle/>
-          <a:p>
-            <a:pPr indent="0" marL="0">
-              <a:lnSpc>
-                <a:spcPct val="108000"/>
-              </a:lnSpc>
-              <a:buNone/>
-            </a:pPr>
-            <a:r>
-              <a:rPr lang="en-US" sz="1350" dirty="0">
+              <a:rPr lang="en-US" sz="1300" dirty="0">
                 <a:solidFill>
                   <a:srgbClr val="1E2235"/>
                 </a:solidFill>
@@ -11826,15 +11628,15 @@
                 <a:ea typeface="Microsoft JhengHei" pitchFamily="34" charset="-122"/>
                 <a:cs typeface="Microsoft JhengHei" pitchFamily="34" charset="-120"/>
               </a:rPr>
-              <a:t>💡 把 MFGX1 的 CAR 開立判定也做成技能，讓品保與生產各有一套可分享的標準。</a:t>
-            </a:r>
-            <a:endParaRPr lang="en-US" sz="1350" dirty="0"/>
-          </a:p>
-        </p:txBody>
-      </p:sp>
-      <p:sp>
-        <p:nvSpPr>
-          <p:cNvPr id="30" name="Text 23"/>
+              <a:t>技能寫進了反向 scope 邊界（明確說明哪些情況不處理）</a:t>
+            </a:r>
+            <a:endParaRPr lang="en-US" sz="1300" dirty="0"/>
+          </a:p>
+        </p:txBody>
+      </p:sp>
+      <p:sp>
+        <p:nvSpPr>
+          <p:cNvPr id="20" name="Text 13"/>
           <p:cNvSpPr/>
           <p:nvPr/>
         </p:nvSpPr>
@@ -11873,7 +11675,7 @@
       </p:sp>
       <p:sp>
         <p:nvSpPr>
-          <p:cNvPr id="31" name="Text 24"/>
+          <p:cNvPr id="21" name="Text 14"/>
           <p:cNvSpPr/>
           <p:nvPr/>
         </p:nvSpPr>
@@ -11923,16 +11725,9 @@
   <p:cSld name="Slide 19">
     <p:bg>
       <p:bgPr>
-        <a:blipFill dpi="0" rotWithShape="1">
-          <a:blip r:embed="rId1">
-            <a:lum/>
-          </a:blip>
-          <a:srcRect/>
-          <a:stretch>
-            <a:fillRect/>
-          </a:stretch>
-        </a:blipFill>
-        <a:effectLst/>
+        <a:solidFill>
+          <a:srgbClr val="F7F8FC"/>
+        </a:solidFill>
       </p:bgPr>
     </p:bg>
     <p:spTree>
@@ -11964,7 +11759,7 @@
             <a:avLst/>
           </a:prstGeom>
           <a:solidFill>
-            <a:srgbClr val="22D3EE"/>
+            <a:srgbClr val="6366F1"/>
           </a:solidFill>
           <a:ln/>
         </p:spPr>
@@ -11996,13 +11791,13 @@
             <a:r>
               <a:rPr lang="en-US" sz="1200" b="1" spc="200" kern="0" dirty="0">
                 <a:solidFill>
-                  <a:srgbClr val="22D3EE"/>
-                </a:solidFill>
-                <a:latin typeface="Microsoft JhengHei" pitchFamily="34" charset="0"/>
-                <a:ea typeface="Microsoft JhengHei" pitchFamily="34" charset="-122"/>
-                <a:cs typeface="Microsoft JhengHei" pitchFamily="34" charset="-120"/>
-              </a:rPr>
-              <a:t>TRUST &amp; CONTROL</a:t>
+                  <a:srgbClr val="6366F1"/>
+                </a:solidFill>
+                <a:latin typeface="Microsoft JhengHei" pitchFamily="34" charset="0"/>
+                <a:ea typeface="Microsoft JhengHei" pitchFamily="34" charset="-122"/>
+                <a:cs typeface="Microsoft JhengHei" pitchFamily="34" charset="-120"/>
+              </a:rPr>
+              <a:t>MAKE IT YOURS</a:t>
             </a:r>
             <a:endParaRPr lang="en-US" sz="1200" dirty="0"/>
           </a:p>
@@ -12035,13 +11830,13 @@
             <a:r>
               <a:rPr lang="en-US" sz="3000" b="1" dirty="0">
                 <a:solidFill>
-                  <a:srgbClr val="FFFFFF"/>
-                </a:solidFill>
-                <a:latin typeface="Microsoft JhengHei" pitchFamily="34" charset="0"/>
-                <a:ea typeface="Microsoft JhengHei" pitchFamily="34" charset="-122"/>
-                <a:cs typeface="Microsoft JhengHei" pitchFamily="34" charset="-120"/>
-              </a:rPr>
-              <a:t>自動化，但你始終是決策者</a:t>
+                  <a:srgbClr val="1E2235"/>
+                </a:solidFill>
+                <a:latin typeface="Microsoft JhengHei" pitchFamily="34" charset="0"/>
+                <a:ea typeface="Microsoft JhengHei" pitchFamily="34" charset="-122"/>
+                <a:cs typeface="Microsoft JhengHei" pitchFamily="34" charset="-120"/>
+              </a:rPr>
+              <a:t>把情境延伸到你的日常</a:t>
             </a:r>
             <a:endParaRPr lang="en-US" sz="3000" dirty="0"/>
           </a:p>
@@ -12055,32 +11850,331 @@
         </p:nvSpPr>
         <p:spPr>
           <a:xfrm>
-            <a:off x="640080" y="1874520"/>
-            <a:ext cx="777240" cy="777240"/>
-          </a:xfrm>
-          <a:prstGeom prst="roundRect">
-            <a:avLst>
-              <a:gd name="adj" fmla="val 18824"/>
-            </a:avLst>
+            <a:off x="640080" y="1783080"/>
+            <a:ext cx="10911535" cy="731520"/>
+          </a:xfrm>
+          <a:prstGeom prst="rect">
+            <a:avLst/>
           </a:prstGeom>
           <a:solidFill>
-            <a:srgbClr val="FFFFFF">
-              <a:alpha val="14000"/>
-            </a:srgbClr>
+            <a:srgbClr val="FFFFFF"/>
           </a:solidFill>
           <a:ln w="12700">
             <a:solidFill>
-              <a:srgbClr val="22D3EE">
-                <a:alpha val="60000"/>
-              </a:srgbClr>
+              <a:srgbClr val="E4E7F2"/>
             </a:solidFill>
             <a:prstDash val="solid"/>
           </a:ln>
         </p:spPr>
       </p:sp>
+      <p:sp>
+        <p:nvSpPr>
+          <p:cNvPr id="6" name="Shape 4"/>
+          <p:cNvSpPr/>
+          <p:nvPr/>
+        </p:nvSpPr>
+        <p:spPr>
+          <a:xfrm>
+            <a:off x="841248" y="1929384"/>
+            <a:ext cx="438912" cy="438912"/>
+          </a:xfrm>
+          <a:prstGeom prst="ellipse">
+            <a:avLst/>
+          </a:prstGeom>
+          <a:solidFill>
+            <a:srgbClr val="B1420A"/>
+          </a:solidFill>
+          <a:ln/>
+        </p:spPr>
+      </p:sp>
+      <p:sp>
+        <p:nvSpPr>
+          <p:cNvPr id="7" name="Shape 5"/>
+          <p:cNvSpPr/>
+          <p:nvPr/>
+        </p:nvSpPr>
+        <p:spPr>
+          <a:xfrm>
+            <a:off x="640080" y="2624328"/>
+            <a:ext cx="10911535" cy="731520"/>
+          </a:xfrm>
+          <a:prstGeom prst="rect">
+            <a:avLst/>
+          </a:prstGeom>
+          <a:solidFill>
+            <a:srgbClr val="FFFFFF"/>
+          </a:solidFill>
+          <a:ln w="12700">
+            <a:solidFill>
+              <a:srgbClr val="E4E7F2"/>
+            </a:solidFill>
+            <a:prstDash val="solid"/>
+          </a:ln>
+        </p:spPr>
+      </p:sp>
+      <p:sp>
+        <p:nvSpPr>
+          <p:cNvPr id="8" name="Shape 6"/>
+          <p:cNvSpPr/>
+          <p:nvPr/>
+        </p:nvSpPr>
+        <p:spPr>
+          <a:xfrm>
+            <a:off x="841248" y="2770632"/>
+            <a:ext cx="438912" cy="438912"/>
+          </a:xfrm>
+          <a:prstGeom prst="ellipse">
+            <a:avLst/>
+          </a:prstGeom>
+          <a:solidFill>
+            <a:srgbClr val="C50F1F"/>
+          </a:solidFill>
+          <a:ln/>
+        </p:spPr>
+      </p:sp>
+      <p:sp>
+        <p:nvSpPr>
+          <p:cNvPr id="9" name="Shape 7"/>
+          <p:cNvSpPr/>
+          <p:nvPr/>
+        </p:nvSpPr>
+        <p:spPr>
+          <a:xfrm>
+            <a:off x="640080" y="3465576"/>
+            <a:ext cx="10911535" cy="731520"/>
+          </a:xfrm>
+          <a:prstGeom prst="rect">
+            <a:avLst/>
+          </a:prstGeom>
+          <a:solidFill>
+            <a:srgbClr val="FFFFFF"/>
+          </a:solidFill>
+          <a:ln w="12700">
+            <a:solidFill>
+              <a:srgbClr val="E4E7F2"/>
+            </a:solidFill>
+            <a:prstDash val="solid"/>
+          </a:ln>
+        </p:spPr>
+      </p:sp>
+      <p:sp>
+        <p:nvSpPr>
+          <p:cNvPr id="10" name="Shape 8"/>
+          <p:cNvSpPr/>
+          <p:nvPr/>
+        </p:nvSpPr>
+        <p:spPr>
+          <a:xfrm>
+            <a:off x="841248" y="3611880"/>
+            <a:ext cx="438912" cy="438912"/>
+          </a:xfrm>
+          <a:prstGeom prst="ellipse">
+            <a:avLst/>
+          </a:prstGeom>
+          <a:solidFill>
+            <a:srgbClr val="0B6A0B"/>
+          </a:solidFill>
+          <a:ln/>
+        </p:spPr>
+      </p:sp>
+      <p:sp>
+        <p:nvSpPr>
+          <p:cNvPr id="11" name="Shape 9"/>
+          <p:cNvSpPr/>
+          <p:nvPr/>
+        </p:nvSpPr>
+        <p:spPr>
+          <a:xfrm>
+            <a:off x="640080" y="4306824"/>
+            <a:ext cx="10911535" cy="731520"/>
+          </a:xfrm>
+          <a:prstGeom prst="rect">
+            <a:avLst/>
+          </a:prstGeom>
+          <a:solidFill>
+            <a:srgbClr val="FFFFFF"/>
+          </a:solidFill>
+          <a:ln w="12700">
+            <a:solidFill>
+              <a:srgbClr val="E4E7F2"/>
+            </a:solidFill>
+            <a:prstDash val="solid"/>
+          </a:ln>
+        </p:spPr>
+      </p:sp>
+      <p:sp>
+        <p:nvSpPr>
+          <p:cNvPr id="12" name="Shape 10"/>
+          <p:cNvSpPr/>
+          <p:nvPr/>
+        </p:nvSpPr>
+        <p:spPr>
+          <a:xfrm>
+            <a:off x="841248" y="4453128"/>
+            <a:ext cx="438912" cy="438912"/>
+          </a:xfrm>
+          <a:prstGeom prst="ellipse">
+            <a:avLst/>
+          </a:prstGeom>
+          <a:solidFill>
+            <a:srgbClr val="005B70"/>
+          </a:solidFill>
+          <a:ln/>
+        </p:spPr>
+      </p:sp>
+      <p:sp>
+        <p:nvSpPr>
+          <p:cNvPr id="13" name="Shape 11"/>
+          <p:cNvSpPr/>
+          <p:nvPr/>
+        </p:nvSpPr>
+        <p:spPr>
+          <a:xfrm>
+            <a:off x="640080" y="5148072"/>
+            <a:ext cx="10911535" cy="731520"/>
+          </a:xfrm>
+          <a:prstGeom prst="rect">
+            <a:avLst/>
+          </a:prstGeom>
+          <a:solidFill>
+            <a:srgbClr val="FFFFFF"/>
+          </a:solidFill>
+          <a:ln w="12700">
+            <a:solidFill>
+              <a:srgbClr val="E4E7F2"/>
+            </a:solidFill>
+            <a:prstDash val="solid"/>
+          </a:ln>
+        </p:spPr>
+      </p:sp>
+      <p:sp>
+        <p:nvSpPr>
+          <p:cNvPr id="14" name="Shape 12"/>
+          <p:cNvSpPr/>
+          <p:nvPr/>
+        </p:nvSpPr>
+        <p:spPr>
+          <a:xfrm>
+            <a:off x="841248" y="5294376"/>
+            <a:ext cx="438912" cy="438912"/>
+          </a:xfrm>
+          <a:prstGeom prst="ellipse">
+            <a:avLst/>
+          </a:prstGeom>
+          <a:solidFill>
+            <a:srgbClr val="5C2E91"/>
+          </a:solidFill>
+          <a:ln/>
+        </p:spPr>
+      </p:sp>
       <p:pic>
         <p:nvPicPr>
-          <p:cNvPr id="6" name="Image 0" descr="preencoded.png">    </p:cNvPr>
+          <p:cNvPr id="15" name="Image 0" descr="preencoded.png">    </p:cNvPr>
+          <p:cNvPicPr>
+            <a:picLocks noChangeAspect="1"/>
+          </p:cNvPicPr>
+          <p:nvPr/>
+        </p:nvPicPr>
+        <p:blipFill>
+          <a:blip r:embed="rId1"/>
+          <a:stretch>
+            <a:fillRect/>
+          </a:stretch>
+        </p:blipFill>
+        <p:spPr>
+          <a:xfrm>
+            <a:off x="950976" y="2039112"/>
+            <a:ext cx="219456" cy="219456"/>
+          </a:xfrm>
+          <a:prstGeom prst="rect">
+            <a:avLst/>
+          </a:prstGeom>
+        </p:spPr>
+      </p:pic>
+      <p:sp>
+        <p:nvSpPr>
+          <p:cNvPr id="16" name="Text 13"/>
+          <p:cNvSpPr/>
+          <p:nvPr/>
+        </p:nvSpPr>
+        <p:spPr>
+          <a:xfrm>
+            <a:off x="1417320" y="1819656"/>
+            <a:ext cx="2182307" cy="658368"/>
+          </a:xfrm>
+          <a:prstGeom prst="rect">
+            <a:avLst/>
+          </a:prstGeom>
+          <a:noFill/>
+          <a:ln/>
+        </p:spPr>
+        <p:txBody>
+          <a:bodyPr wrap="square" rtlCol="0" anchor="ctr"/>
+          <a:lstStyle/>
+          <a:p>
+            <a:pPr indent="0" marL="0">
+              <a:buNone/>
+            </a:pPr>
+            <a:r>
+              <a:rPr lang="en-US" sz="1400" b="1" dirty="0">
+                <a:solidFill>
+                  <a:srgbClr val="B1420A"/>
+                </a:solidFill>
+                <a:latin typeface="Microsoft JhengHei" pitchFamily="34" charset="0"/>
+                <a:ea typeface="Microsoft JhengHei" pitchFamily="34" charset="-122"/>
+                <a:cs typeface="Microsoft JhengHei" pitchFamily="34" charset="-120"/>
+              </a:rPr>
+              <a:t>製造業（進階）· 品保</a:t>
+            </a:r>
+            <a:endParaRPr lang="en-US" sz="1400" dirty="0"/>
+          </a:p>
+        </p:txBody>
+      </p:sp>
+      <p:sp>
+        <p:nvSpPr>
+          <p:cNvPr id="17" name="Text 14"/>
+          <p:cNvSpPr/>
+          <p:nvPr/>
+        </p:nvSpPr>
+        <p:spPr>
+          <a:xfrm>
+            <a:off x="3586195" y="1819656"/>
+            <a:ext cx="7747190" cy="658368"/>
+          </a:xfrm>
+          <a:prstGeom prst="rect">
+            <a:avLst/>
+          </a:prstGeom>
+          <a:noFill/>
+          <a:ln/>
+        </p:spPr>
+        <p:txBody>
+          <a:bodyPr wrap="square" rtlCol="0" anchor="ctr"/>
+          <a:lstStyle/>
+          <a:p>
+            <a:pPr indent="0" marL="0">
+              <a:lnSpc>
+                <a:spcPct val="108000"/>
+              </a:lnSpc>
+              <a:buNone/>
+            </a:pPr>
+            <a:r>
+              <a:rPr lang="en-US" sz="1350" dirty="0">
+                <a:solidFill>
+                  <a:srgbClr val="1E2235"/>
+                </a:solidFill>
+                <a:latin typeface="Microsoft JhengHei" pitchFamily="34" charset="0"/>
+                <a:ea typeface="Microsoft JhengHei" pitchFamily="34" charset="-122"/>
+                <a:cs typeface="Microsoft JhengHei" pitchFamily="34" charset="-120"/>
+              </a:rPr>
+              <a:t>💡 把「該通知誰」也寫進 OneDrive 的標準文件，讓窗口異動時只要改文件、不必改指令。</a:t>
+            </a:r>
+            <a:endParaRPr lang="en-US" sz="1350" dirty="0"/>
+          </a:p>
+        </p:txBody>
+      </p:sp>
+      <p:pic>
+        <p:nvPicPr>
+          <p:cNvPr id="18" name="Image 1" descr="preencoded.png">    </p:cNvPr>
           <p:cNvPicPr>
             <a:picLocks noChangeAspect="1"/>
           </p:cNvPicPr>
@@ -12094,8 +12188,8 @@
         </p:blipFill>
         <p:spPr>
           <a:xfrm>
-            <a:off x="804672" y="2039112"/>
-            <a:ext cx="448056" cy="448056"/>
+            <a:off x="950976" y="2880360"/>
+            <a:ext cx="219456" cy="219456"/>
           </a:xfrm>
           <a:prstGeom prst="rect">
             <a:avLst/>
@@ -12104,14 +12198,14 @@
       </p:pic>
       <p:sp>
         <p:nvSpPr>
-          <p:cNvPr id="7" name="Text 4"/>
-          <p:cNvSpPr/>
-          <p:nvPr/>
-        </p:nvSpPr>
-        <p:spPr>
-          <a:xfrm>
-            <a:off x="1691640" y="1856232"/>
-            <a:ext cx="6858000" cy="347472"/>
+          <p:cNvPr id="19" name="Text 15"/>
+          <p:cNvSpPr/>
+          <p:nvPr/>
+        </p:nvSpPr>
+        <p:spPr>
+          <a:xfrm>
+            <a:off x="1417320" y="2660904"/>
+            <a:ext cx="2182307" cy="658368"/>
           </a:xfrm>
           <a:prstGeom prst="rect">
             <a:avLst/>
@@ -12127,30 +12221,30 @@
               <a:buNone/>
             </a:pPr>
             <a:r>
-              <a:rPr lang="en-US" sz="1700" b="1" dirty="0">
-                <a:solidFill>
-                  <a:srgbClr val="FFFFFF"/>
-                </a:solidFill>
-                <a:latin typeface="Microsoft JhengHei" pitchFamily="34" charset="0"/>
-                <a:ea typeface="Microsoft JhengHei" pitchFamily="34" charset="-122"/>
-                <a:cs typeface="Microsoft JhengHei" pitchFamily="34" charset="-120"/>
-              </a:rPr>
-              <a:t>行動前審核</a:t>
-            </a:r>
-            <a:endParaRPr lang="en-US" sz="1700" dirty="0"/>
-          </a:p>
-        </p:txBody>
-      </p:sp>
-      <p:sp>
-        <p:nvSpPr>
-          <p:cNvPr id="8" name="Text 5"/>
-          <p:cNvSpPr/>
-          <p:nvPr/>
-        </p:nvSpPr>
-        <p:spPr>
-          <a:xfrm>
-            <a:off x="1691640" y="2203704"/>
-            <a:ext cx="9966960" cy="658368"/>
+              <a:rPr lang="en-US" sz="1400" b="1" dirty="0">
+                <a:solidFill>
+                  <a:srgbClr val="C50F1F"/>
+                </a:solidFill>
+                <a:latin typeface="Microsoft JhengHei" pitchFamily="34" charset="0"/>
+                <a:ea typeface="Microsoft JhengHei" pitchFamily="34" charset="-122"/>
+                <a:cs typeface="Microsoft JhengHei" pitchFamily="34" charset="-120"/>
+              </a:rPr>
+              <a:t>製造業（進階）· 應變</a:t>
+            </a:r>
+            <a:endParaRPr lang="en-US" sz="1400" dirty="0"/>
+          </a:p>
+        </p:txBody>
+      </p:sp>
+      <p:sp>
+        <p:nvSpPr>
+          <p:cNvPr id="20" name="Text 16"/>
+          <p:cNvSpPr/>
+          <p:nvPr/>
+        </p:nvSpPr>
+        <p:spPr>
+          <a:xfrm>
+            <a:off x="3586195" y="2660904"/>
+            <a:ext cx="7747190" cy="658368"/>
           </a:xfrm>
           <a:prstGeom prst="rect">
             <a:avLst/>
@@ -12164,59 +12258,28 @@
           <a:p>
             <a:pPr indent="0" marL="0">
               <a:lnSpc>
-                <a:spcPct val="118000"/>
+                <a:spcPct val="108000"/>
               </a:lnSpc>
               <a:buNone/>
             </a:pPr>
             <a:r>
-              <a:rPr lang="en-US" sz="1300" dirty="0">
-                <a:solidFill>
-                  <a:srgbClr val="C7CAEC"/>
-                </a:solidFill>
-                <a:latin typeface="Microsoft JhengHei" pitchFamily="34" charset="0"/>
-                <a:ea typeface="Microsoft JhengHei" pitchFamily="34" charset="-122"/>
-                <a:cs typeface="Microsoft JhengHei" pitchFamily="34" charset="-120"/>
-              </a:rPr>
-              <a:t>中高風險動作會顯示 RISK-LEVEL；寄信、發 Teams、建立會議等動作先攤開可編輯預覽，核准後才送出。</a:t>
-            </a:r>
-            <a:endParaRPr lang="en-US" sz="1300" dirty="0"/>
-          </a:p>
-        </p:txBody>
-      </p:sp>
-      <p:sp>
-        <p:nvSpPr>
-          <p:cNvPr id="9" name="Shape 6"/>
-          <p:cNvSpPr/>
-          <p:nvPr/>
-        </p:nvSpPr>
-        <p:spPr>
-          <a:xfrm>
-            <a:off x="640080" y="3044952"/>
-            <a:ext cx="777240" cy="777240"/>
-          </a:xfrm>
-          <a:prstGeom prst="roundRect">
-            <a:avLst>
-              <a:gd name="adj" fmla="val 18824"/>
-            </a:avLst>
-          </a:prstGeom>
-          <a:solidFill>
-            <a:srgbClr val="FFFFFF">
-              <a:alpha val="14000"/>
-            </a:srgbClr>
-          </a:solidFill>
-          <a:ln w="12700">
-            <a:solidFill>
-              <a:srgbClr val="22D3EE">
-                <a:alpha val="60000"/>
-              </a:srgbClr>
-            </a:solidFill>
-            <a:prstDash val="solid"/>
-          </a:ln>
-        </p:spPr>
+              <a:rPr lang="en-US" sz="1350" dirty="0">
+                <a:solidFill>
+                  <a:srgbClr val="1E2235"/>
+                </a:solidFill>
+                <a:latin typeface="Microsoft JhengHei" pitchFamily="34" charset="0"/>
+                <a:ea typeface="Microsoft JhengHei" pitchFamily="34" charset="-122"/>
+                <a:cs typeface="Microsoft JhengHei" pitchFamily="34" charset="-120"/>
+              </a:rPr>
+              <a:t>💡 把觸發關鍵字換成你們實際的事故通報主旨前綴，例如「[異常通報]」。</a:t>
+            </a:r>
+            <a:endParaRPr lang="en-US" sz="1350" dirty="0"/>
+          </a:p>
+        </p:txBody>
       </p:sp>
       <p:pic>
         <p:nvPicPr>
-          <p:cNvPr id="10" name="Image 1" descr="preencoded.png">    </p:cNvPr>
+          <p:cNvPr id="21" name="Image 2" descr="preencoded.png">    </p:cNvPr>
           <p:cNvPicPr>
             <a:picLocks noChangeAspect="1"/>
           </p:cNvPicPr>
@@ -12230,8 +12293,8 @@
         </p:blipFill>
         <p:spPr>
           <a:xfrm>
-            <a:off x="804672" y="3209544"/>
-            <a:ext cx="448056" cy="448056"/>
+            <a:off x="950976" y="3721608"/>
+            <a:ext cx="219456" cy="219456"/>
           </a:xfrm>
           <a:prstGeom prst="rect">
             <a:avLst/>
@@ -12240,14 +12303,14 @@
       </p:pic>
       <p:sp>
         <p:nvSpPr>
-          <p:cNvPr id="11" name="Text 7"/>
-          <p:cNvSpPr/>
-          <p:nvPr/>
-        </p:nvSpPr>
-        <p:spPr>
-          <a:xfrm>
-            <a:off x="1691640" y="3026664"/>
-            <a:ext cx="6858000" cy="347472"/>
+          <p:cNvPr id="22" name="Text 17"/>
+          <p:cNvSpPr/>
+          <p:nvPr/>
+        </p:nvSpPr>
+        <p:spPr>
+          <a:xfrm>
+            <a:off x="1417320" y="3502152"/>
+            <a:ext cx="2182307" cy="658368"/>
           </a:xfrm>
           <a:prstGeom prst="rect">
             <a:avLst/>
@@ -12263,30 +12326,30 @@
               <a:buNone/>
             </a:pPr>
             <a:r>
-              <a:rPr lang="en-US" sz="1700" b="1" dirty="0">
-                <a:solidFill>
-                  <a:srgbClr val="FFFFFF"/>
-                </a:solidFill>
-                <a:latin typeface="Microsoft JhengHei" pitchFamily="34" charset="0"/>
-                <a:ea typeface="Microsoft JhengHei" pitchFamily="34" charset="-122"/>
-                <a:cs typeface="Microsoft JhengHei" pitchFamily="34" charset="-120"/>
-              </a:rPr>
-              <a:t>控制範圍清楚</a:t>
-            </a:r>
-            <a:endParaRPr lang="en-US" sz="1700" dirty="0"/>
-          </a:p>
-        </p:txBody>
-      </p:sp>
-      <p:sp>
-        <p:nvSpPr>
-          <p:cNvPr id="12" name="Text 8"/>
-          <p:cNvSpPr/>
-          <p:nvPr/>
-        </p:nvSpPr>
-        <p:spPr>
-          <a:xfrm>
-            <a:off x="1691640" y="3374136"/>
-            <a:ext cx="9966960" cy="658368"/>
+              <a:rPr lang="en-US" sz="1400" b="1" dirty="0">
+                <a:solidFill>
+                  <a:srgbClr val="0B6A0B"/>
+                </a:solidFill>
+                <a:latin typeface="Microsoft JhengHei" pitchFamily="34" charset="0"/>
+                <a:ea typeface="Microsoft JhengHei" pitchFamily="34" charset="-122"/>
+                <a:cs typeface="Microsoft JhengHei" pitchFamily="34" charset="-120"/>
+              </a:rPr>
+              <a:t>製造業（進階）· 生產</a:t>
+            </a:r>
+            <a:endParaRPr lang="en-US" sz="1400" dirty="0"/>
+          </a:p>
+        </p:txBody>
+      </p:sp>
+      <p:sp>
+        <p:nvSpPr>
+          <p:cNvPr id="23" name="Text 18"/>
+          <p:cNvSpPr/>
+          <p:nvPr/>
+        </p:nvSpPr>
+        <p:spPr>
+          <a:xfrm>
+            <a:off x="3586195" y="3502152"/>
+            <a:ext cx="7747190" cy="658368"/>
           </a:xfrm>
           <a:prstGeom prst="rect">
             <a:avLst/>
@@ -12300,59 +12363,28 @@
           <a:p>
             <a:pPr indent="0" marL="0">
               <a:lnSpc>
-                <a:spcPct val="118000"/>
+                <a:spcPct val="108000"/>
               </a:lnSpc>
               <a:buNone/>
             </a:pPr>
             <a:r>
-              <a:rPr lang="en-US" sz="1300" dirty="0">
-                <a:solidFill>
-                  <a:srgbClr val="C7CAEC"/>
-                </a:solidFill>
-                <a:latin typeface="Microsoft JhengHei" pitchFamily="34" charset="0"/>
-                <a:ea typeface="Microsoft JhengHei" pitchFamily="34" charset="-122"/>
-                <a:cs typeface="Microsoft JhengHei" pitchFamily="34" charset="-120"/>
-              </a:rPr>
-              <a:t>don’t ask again 可限定 per-recipient、per-domain 或 always；任務可軟／硬暫停、恢復或取消。</a:t>
-            </a:r>
-            <a:endParaRPr lang="en-US" sz="1300" dirty="0"/>
-          </a:p>
-        </p:txBody>
-      </p:sp>
-      <p:sp>
-        <p:nvSpPr>
-          <p:cNvPr id="13" name="Shape 9"/>
-          <p:cNvSpPr/>
-          <p:nvPr/>
-        </p:nvSpPr>
-        <p:spPr>
-          <a:xfrm>
-            <a:off x="640080" y="4215384"/>
-            <a:ext cx="777240" cy="777240"/>
-          </a:xfrm>
-          <a:prstGeom prst="roundRect">
-            <a:avLst>
-              <a:gd name="adj" fmla="val 18824"/>
-            </a:avLst>
-          </a:prstGeom>
-          <a:solidFill>
-            <a:srgbClr val="FFFFFF">
-              <a:alpha val="14000"/>
-            </a:srgbClr>
-          </a:solidFill>
-          <a:ln w="12700">
-            <a:solidFill>
-              <a:srgbClr val="22D3EE">
-                <a:alpha val="60000"/>
-              </a:srgbClr>
-            </a:solidFill>
-            <a:prstDash val="solid"/>
-          </a:ln>
-        </p:spPr>
+              <a:rPr lang="en-US" sz="1350" dirty="0">
+                <a:solidFill>
+                  <a:srgbClr val="1E2235"/>
+                </a:solidFill>
+                <a:latin typeface="Microsoft JhengHei" pitchFamily="34" charset="0"/>
+                <a:ea typeface="Microsoft JhengHei" pitchFamily="34" charset="-122"/>
+                <a:cs typeface="Microsoft JhengHei" pitchFamily="34" charset="-120"/>
+              </a:rPr>
+              <a:t>💡 把警訊門檻改成你們自己的 KPI 標準，只改 OneDrive 的規則文件、不動排程任務。</a:t>
+            </a:r>
+            <a:endParaRPr lang="en-US" sz="1350" dirty="0"/>
+          </a:p>
+        </p:txBody>
       </p:sp>
       <p:pic>
         <p:nvPicPr>
-          <p:cNvPr id="14" name="Image 2" descr="preencoded.png">    </p:cNvPr>
+          <p:cNvPr id="24" name="Image 3" descr="preencoded.png">    </p:cNvPr>
           <p:cNvPicPr>
             <a:picLocks noChangeAspect="1"/>
           </p:cNvPicPr>
@@ -12366,8 +12398,8 @@
         </p:blipFill>
         <p:spPr>
           <a:xfrm>
-            <a:off x="804672" y="4379976"/>
-            <a:ext cx="448056" cy="448056"/>
+            <a:off x="950976" y="4562856"/>
+            <a:ext cx="219456" cy="219456"/>
           </a:xfrm>
           <a:prstGeom prst="rect">
             <a:avLst/>
@@ -12376,14 +12408,14 @@
       </p:pic>
       <p:sp>
         <p:nvSpPr>
-          <p:cNvPr id="15" name="Text 10"/>
-          <p:cNvSpPr/>
-          <p:nvPr/>
-        </p:nvSpPr>
-        <p:spPr>
-          <a:xfrm>
-            <a:off x="1691640" y="4197096"/>
-            <a:ext cx="6858000" cy="347472"/>
+          <p:cNvPr id="25" name="Text 19"/>
+          <p:cNvSpPr/>
+          <p:nvPr/>
+        </p:nvSpPr>
+        <p:spPr>
+          <a:xfrm>
+            <a:off x="1417320" y="4343400"/>
+            <a:ext cx="2182307" cy="658368"/>
           </a:xfrm>
           <a:prstGeom prst="rect">
             <a:avLst/>
@@ -12399,30 +12431,30 @@
               <a:buNone/>
             </a:pPr>
             <a:r>
-              <a:rPr lang="en-US" sz="1700" b="1" dirty="0">
-                <a:solidFill>
-                  <a:srgbClr val="FFFFFF"/>
-                </a:solidFill>
-                <a:latin typeface="Microsoft JhengHei" pitchFamily="34" charset="0"/>
-                <a:ea typeface="Microsoft JhengHei" pitchFamily="34" charset="-122"/>
-                <a:cs typeface="Microsoft JhengHei" pitchFamily="34" charset="-120"/>
-              </a:rPr>
-              <a:t>自動化任務也有把關</a:t>
-            </a:r>
-            <a:endParaRPr lang="en-US" sz="1700" dirty="0"/>
-          </a:p>
-        </p:txBody>
-      </p:sp>
-      <p:sp>
-        <p:nvSpPr>
-          <p:cNvPr id="16" name="Text 11"/>
-          <p:cNvSpPr/>
-          <p:nvPr/>
-        </p:nvSpPr>
-        <p:spPr>
-          <a:xfrm>
-            <a:off x="1691640" y="4544568"/>
-            <a:ext cx="9966960" cy="658368"/>
+              <a:rPr lang="en-US" sz="1400" b="1" dirty="0">
+                <a:solidFill>
+                  <a:srgbClr val="005B70"/>
+                </a:solidFill>
+                <a:latin typeface="Microsoft JhengHei" pitchFamily="34" charset="0"/>
+                <a:ea typeface="Microsoft JhengHei" pitchFamily="34" charset="-122"/>
+                <a:cs typeface="Microsoft JhengHei" pitchFamily="34" charset="-120"/>
+              </a:rPr>
+              <a:t>製造業（進階）· 稽核</a:t>
+            </a:r>
+            <a:endParaRPr lang="en-US" sz="1400" dirty="0"/>
+          </a:p>
+        </p:txBody>
+      </p:sp>
+      <p:sp>
+        <p:nvSpPr>
+          <p:cNvPr id="26" name="Text 20"/>
+          <p:cNvSpPr/>
+          <p:nvPr/>
+        </p:nvSpPr>
+        <p:spPr>
+          <a:xfrm>
+            <a:off x="3586195" y="4343400"/>
+            <a:ext cx="7747190" cy="658368"/>
           </a:xfrm>
           <a:prstGeom prst="rect">
             <a:avLst/>
@@ -12436,59 +12468,28 @@
           <a:p>
             <a:pPr indent="0" marL="0">
               <a:lnSpc>
-                <a:spcPct val="118000"/>
+                <a:spcPct val="108000"/>
               </a:lnSpc>
               <a:buNone/>
             </a:pPr>
             <a:r>
-              <a:rPr lang="en-US" sz="1300" dirty="0">
-                <a:solidFill>
-                  <a:srgbClr val="C7CAEC"/>
-                </a:solidFill>
-                <a:latin typeface="Microsoft JhengHei" pitchFamily="34" charset="0"/>
-                <a:ea typeface="Microsoft JhengHei" pitchFamily="34" charset="-122"/>
-                <a:cs typeface="Microsoft JhengHei" pitchFamily="34" charset="-120"/>
-              </a:rPr>
-              <a:t>排程提示與事件驅動任務有執行頻率限制與防迴圈保護；一律以建立者權限執行，且與其他 Cowork 活動一同記錄在統一稽核日誌，套用 Microsoft Purview 政策。</a:t>
-            </a:r>
-            <a:endParaRPr lang="en-US" sz="1300" dirty="0"/>
-          </a:p>
-        </p:txBody>
-      </p:sp>
-      <p:sp>
-        <p:nvSpPr>
-          <p:cNvPr id="17" name="Shape 12"/>
-          <p:cNvSpPr/>
-          <p:nvPr/>
-        </p:nvSpPr>
-        <p:spPr>
-          <a:xfrm>
-            <a:off x="640080" y="5385816"/>
-            <a:ext cx="777240" cy="777240"/>
-          </a:xfrm>
-          <a:prstGeom prst="roundRect">
-            <a:avLst>
-              <a:gd name="adj" fmla="val 18824"/>
-            </a:avLst>
-          </a:prstGeom>
-          <a:solidFill>
-            <a:srgbClr val="FFFFFF">
-              <a:alpha val="14000"/>
-            </a:srgbClr>
-          </a:solidFill>
-          <a:ln w="12700">
-            <a:solidFill>
-              <a:srgbClr val="22D3EE">
-                <a:alpha val="60000"/>
-              </a:srgbClr>
-            </a:solidFill>
-            <a:prstDash val="solid"/>
-          </a:ln>
-        </p:spPr>
+              <a:rPr lang="en-US" sz="1350" dirty="0">
+                <a:solidFill>
+                  <a:srgbClr val="1E2235"/>
+                </a:solidFill>
+                <a:latin typeface="Microsoft JhengHei" pitchFamily="34" charset="0"/>
+                <a:ea typeface="Microsoft JhengHei" pitchFamily="34" charset="-122"/>
+                <a:cs typeface="Microsoft JhengHei" pitchFamily="34" charset="-120"/>
+              </a:rPr>
+              <a:t>💡 把檢核表換成你們實際的內稽查檢核表，測試同一套流程能不能直接沿用。</a:t>
+            </a:r>
+            <a:endParaRPr lang="en-US" sz="1350" dirty="0"/>
+          </a:p>
+        </p:txBody>
       </p:sp>
       <p:pic>
         <p:nvPicPr>
-          <p:cNvPr id="18" name="Image 3" descr="preencoded.png">    </p:cNvPr>
+          <p:cNvPr id="27" name="Image 4" descr="preencoded.png">    </p:cNvPr>
           <p:cNvPicPr>
             <a:picLocks noChangeAspect="1"/>
           </p:cNvPicPr>
@@ -12502,8 +12503,8 @@
         </p:blipFill>
         <p:spPr>
           <a:xfrm>
-            <a:off x="804672" y="5550408"/>
-            <a:ext cx="448056" cy="448056"/>
+            <a:off x="950976" y="5404104"/>
+            <a:ext cx="219456" cy="219456"/>
           </a:xfrm>
           <a:prstGeom prst="rect">
             <a:avLst/>
@@ -12512,14 +12513,14 @@
       </p:pic>
       <p:sp>
         <p:nvSpPr>
-          <p:cNvPr id="19" name="Text 13"/>
-          <p:cNvSpPr/>
-          <p:nvPr/>
-        </p:nvSpPr>
-        <p:spPr>
-          <a:xfrm>
-            <a:off x="1691640" y="5367528"/>
-            <a:ext cx="6858000" cy="347472"/>
+          <p:cNvPr id="28" name="Text 21"/>
+          <p:cNvSpPr/>
+          <p:nvPr/>
+        </p:nvSpPr>
+        <p:spPr>
+          <a:xfrm>
+            <a:off x="1417320" y="5184648"/>
+            <a:ext cx="2182307" cy="658368"/>
           </a:xfrm>
           <a:prstGeom prst="rect">
             <a:avLst/>
@@ -12535,30 +12536,30 @@
               <a:buNone/>
             </a:pPr>
             <a:r>
-              <a:rPr lang="en-US" sz="1700" b="1" dirty="0">
-                <a:solidFill>
-                  <a:srgbClr val="FFFFFF"/>
-                </a:solidFill>
-                <a:latin typeface="Microsoft JhengHei" pitchFamily="34" charset="0"/>
-                <a:ea typeface="Microsoft JhengHei" pitchFamily="34" charset="-122"/>
-                <a:cs typeface="Microsoft JhengHei" pitchFamily="34" charset="-120"/>
-              </a:rPr>
-              <a:t>限制也要知道</a:t>
-            </a:r>
-            <a:endParaRPr lang="en-US" sz="1700" dirty="0"/>
-          </a:p>
-        </p:txBody>
-      </p:sp>
-      <p:sp>
-        <p:nvSpPr>
-          <p:cNvPr id="20" name="Text 14"/>
-          <p:cNvSpPr/>
-          <p:nvPr/>
-        </p:nvSpPr>
-        <p:spPr>
-          <a:xfrm>
-            <a:off x="1691640" y="5715000"/>
-            <a:ext cx="9966960" cy="658368"/>
+              <a:rPr lang="en-US" sz="1400" b="1" dirty="0">
+                <a:solidFill>
+                  <a:srgbClr val="5C2E91"/>
+                </a:solidFill>
+                <a:latin typeface="Microsoft JhengHei" pitchFamily="34" charset="0"/>
+                <a:ea typeface="Microsoft JhengHei" pitchFamily="34" charset="-122"/>
+                <a:cs typeface="Microsoft JhengHei" pitchFamily="34" charset="-120"/>
+              </a:rPr>
+              <a:t>製造業（進階）· 自訂技能</a:t>
+            </a:r>
+            <a:endParaRPr lang="en-US" sz="1400" dirty="0"/>
+          </a:p>
+        </p:txBody>
+      </p:sp>
+      <p:sp>
+        <p:nvSpPr>
+          <p:cNvPr id="29" name="Text 22"/>
+          <p:cNvSpPr/>
+          <p:nvPr/>
+        </p:nvSpPr>
+        <p:spPr>
+          <a:xfrm>
+            <a:off x="3586195" y="5184648"/>
+            <a:ext cx="7747190" cy="658368"/>
           </a:xfrm>
           <a:prstGeom prst="rect">
             <a:avLst/>
@@ -12572,28 +12573,28 @@
           <a:p>
             <a:pPr indent="0" marL="0">
               <a:lnSpc>
-                <a:spcPct val="118000"/>
+                <a:spcPct val="108000"/>
               </a:lnSpc>
               <a:buNone/>
             </a:pPr>
             <a:r>
-              <a:rPr lang="en-US" sz="1300" dirty="0">
-                <a:solidFill>
-                  <a:srgbClr val="C7CAEC"/>
-                </a:solidFill>
-                <a:latin typeface="Microsoft JhengHei" pitchFamily="34" charset="0"/>
-                <a:ea typeface="Microsoft JhengHei" pitchFamily="34" charset="-122"/>
-                <a:cs typeface="Microsoft JhengHei" pitchFamily="34" charset="-120"/>
-              </a:rPr>
-              <a:t>不能存取本機檔案、刪除 OneDrive/SharePoint 檔案或讀取加密檔；附件 &lt;200MB；自訂技能與第三方 plugin 未經 Microsoft 驗證，需自行審閱。官方明列不適用於「免人工審查即需保證正確」的用途。</a:t>
-            </a:r>
-            <a:endParaRPr lang="en-US" sz="1300" dirty="0"/>
-          </a:p>
-        </p:txBody>
-      </p:sp>
-      <p:sp>
-        <p:nvSpPr>
-          <p:cNvPr id="21" name="Text 15"/>
+              <a:rPr lang="en-US" sz="1350" dirty="0">
+                <a:solidFill>
+                  <a:srgbClr val="1E2235"/>
+                </a:solidFill>
+                <a:latin typeface="Microsoft JhengHei" pitchFamily="34" charset="0"/>
+                <a:ea typeface="Microsoft JhengHei" pitchFamily="34" charset="-122"/>
+                <a:cs typeface="Microsoft JhengHei" pitchFamily="34" charset="-120"/>
+              </a:rPr>
+              <a:t>💡 把 MFGX1 的 CAR 開立判定也做成技能，讓品保與生產各有一套可分享的標準。</a:t>
+            </a:r>
+            <a:endParaRPr lang="en-US" sz="1350" dirty="0"/>
+          </a:p>
+        </p:txBody>
+      </p:sp>
+      <p:sp>
+        <p:nvSpPr>
+          <p:cNvPr id="30" name="Text 23"/>
           <p:cNvSpPr/>
           <p:nvPr/>
         </p:nvSpPr>
@@ -12618,7 +12619,7 @@
             <a:r>
               <a:rPr lang="en-US" sz="900" dirty="0">
                 <a:solidFill>
-                  <a:srgbClr val="8A8FB5"/>
+                  <a:srgbClr val="5B6079"/>
                 </a:solidFill>
                 <a:latin typeface="Microsoft JhengHei" pitchFamily="34" charset="0"/>
                 <a:ea typeface="Microsoft JhengHei" pitchFamily="34" charset="-122"/>
@@ -12632,7 +12633,7 @@
       </p:sp>
       <p:sp>
         <p:nvSpPr>
-          <p:cNvPr id="22" name="Text 16"/>
+          <p:cNvPr id="31" name="Text 24"/>
           <p:cNvSpPr/>
           <p:nvPr/>
         </p:nvSpPr>
@@ -12657,7 +12658,7 @@
             <a:r>
               <a:rPr lang="en-US" sz="900" dirty="0">
                 <a:solidFill>
-                  <a:srgbClr val="8A8FB5"/>
+                  <a:srgbClr val="5B6079"/>
                 </a:solidFill>
                 <a:latin typeface="Microsoft JhengHei" pitchFamily="34" charset="0"/>
                 <a:ea typeface="Microsoft JhengHei" pitchFamily="34" charset="-122"/>
@@ -12807,7 +12808,7 @@
         </p:nvSpPr>
         <p:spPr>
           <a:xfrm>
-            <a:off x="640080" y="1737360"/>
+            <a:off x="640080" y="1664208"/>
             <a:ext cx="1005840" cy="822960"/>
           </a:xfrm>
           <a:prstGeom prst="rect">
@@ -12824,7 +12825,7 @@
               <a:buNone/>
             </a:pPr>
             <a:r>
-              <a:rPr lang="en-US" sz="3800" b="1" dirty="0">
+              <a:rPr lang="en-US" sz="3400" b="1" dirty="0">
                 <a:solidFill>
                   <a:srgbClr val="6366F1"/>
                 </a:solidFill>
@@ -12834,7 +12835,7 @@
               </a:rPr>
               <a:t>01</a:t>
             </a:r>
-            <a:endParaRPr lang="en-US" sz="3800" dirty="0"/>
+            <a:endParaRPr lang="en-US" sz="3400" dirty="0"/>
           </a:p>
         </p:txBody>
       </p:sp>
@@ -12846,7 +12847,7 @@
         </p:nvSpPr>
         <p:spPr>
           <a:xfrm>
-            <a:off x="1737360" y="1773936"/>
+            <a:off x="1737360" y="1700784"/>
             <a:ext cx="3657600" cy="457200"/>
           </a:xfrm>
           <a:prstGeom prst="rect">
@@ -12863,7 +12864,7 @@
               <a:buNone/>
             </a:pPr>
             <a:r>
-              <a:rPr lang="en-US" sz="2000" b="1" dirty="0">
+              <a:rPr lang="en-US" sz="1900" b="1" dirty="0">
                 <a:solidFill>
                   <a:srgbClr val="1E2235"/>
                 </a:solidFill>
@@ -12873,7 +12874,7 @@
               </a:rPr>
               <a:t>認識 Cowork</a:t>
             </a:r>
-            <a:endParaRPr lang="en-US" sz="2000" dirty="0"/>
+            <a:endParaRPr lang="en-US" sz="1900" dirty="0"/>
           </a:p>
         </p:txBody>
       </p:sp>
@@ -12885,7 +12886,7 @@
         </p:nvSpPr>
         <p:spPr>
           <a:xfrm>
-            <a:off x="1737360" y="2212848"/>
+            <a:off x="1737360" y="2121408"/>
             <a:ext cx="9601200" cy="365760"/>
           </a:xfrm>
           <a:prstGeom prst="rect">
@@ -12902,7 +12903,7 @@
               <a:buNone/>
             </a:pPr>
             <a:r>
-              <a:rPr lang="en-US" sz="1400" dirty="0">
+              <a:rPr lang="en-US" sz="1350" dirty="0">
                 <a:solidFill>
                   <a:srgbClr val="5B6079"/>
                 </a:solidFill>
@@ -12912,7 +12913,7 @@
               </a:rPr>
               <a:t>什麼是代理式 AI，和一般 Copilot Chat 有何不同</a:t>
             </a:r>
-            <a:endParaRPr lang="en-US" sz="1400" dirty="0"/>
+            <a:endParaRPr lang="en-US" sz="1350" dirty="0"/>
           </a:p>
         </p:txBody>
       </p:sp>
@@ -12924,7 +12925,7 @@
         </p:nvSpPr>
         <p:spPr>
           <a:xfrm>
-            <a:off x="640080" y="2816352"/>
+            <a:off x="640080" y="2578608"/>
             <a:ext cx="1005840" cy="822960"/>
           </a:xfrm>
           <a:prstGeom prst="rect">
@@ -12941,7 +12942,7 @@
               <a:buNone/>
             </a:pPr>
             <a:r>
-              <a:rPr lang="en-US" sz="3800" b="1" dirty="0">
+              <a:rPr lang="en-US" sz="3400" b="1" dirty="0">
                 <a:solidFill>
                   <a:srgbClr val="6366F1"/>
                 </a:solidFill>
@@ -12951,7 +12952,7 @@
               </a:rPr>
               <a:t>02</a:t>
             </a:r>
-            <a:endParaRPr lang="en-US" sz="3800" dirty="0"/>
+            <a:endParaRPr lang="en-US" sz="3400" dirty="0"/>
           </a:p>
         </p:txBody>
       </p:sp>
@@ -12963,7 +12964,7 @@
         </p:nvSpPr>
         <p:spPr>
           <a:xfrm>
-            <a:off x="1737360" y="2852928"/>
+            <a:off x="1737360" y="2615184"/>
             <a:ext cx="3657600" cy="457200"/>
           </a:xfrm>
           <a:prstGeom prst="rect">
@@ -12980,7 +12981,7 @@
               <a:buNone/>
             </a:pPr>
             <a:r>
-              <a:rPr lang="en-US" sz="2000" b="1" dirty="0">
+              <a:rPr lang="en-US" sz="1900" b="1" dirty="0">
                 <a:solidFill>
                   <a:srgbClr val="1E2235"/>
                 </a:solidFill>
@@ -12990,7 +12991,7 @@
               </a:rPr>
               <a:t>核心能力與運作</a:t>
             </a:r>
-            <a:endParaRPr lang="en-US" sz="2000" dirty="0"/>
+            <a:endParaRPr lang="en-US" sz="1900" dirty="0"/>
           </a:p>
         </p:txBody>
       </p:sp>
@@ -13002,7 +13003,7 @@
         </p:nvSpPr>
         <p:spPr>
           <a:xfrm>
-            <a:off x="1737360" y="3291840"/>
+            <a:off x="1737360" y="3035808"/>
             <a:ext cx="9601200" cy="365760"/>
           </a:xfrm>
           <a:prstGeom prst="rect">
@@ -13019,7 +13020,7 @@
               <a:buNone/>
             </a:pPr>
             <a:r>
-              <a:rPr lang="en-US" sz="1400" dirty="0">
+              <a:rPr lang="en-US" sz="1350" dirty="0">
                 <a:solidFill>
                   <a:srgbClr val="5B6079"/>
                 </a:solidFill>
@@ -13029,7 +13030,7 @@
               </a:rPr>
               <a:t>技能、工作區、行動前審核、自我驗證</a:t>
             </a:r>
-            <a:endParaRPr lang="en-US" sz="1400" dirty="0"/>
+            <a:endParaRPr lang="en-US" sz="1350" dirty="0"/>
           </a:p>
         </p:txBody>
       </p:sp>
@@ -13041,7 +13042,7 @@
         </p:nvSpPr>
         <p:spPr>
           <a:xfrm>
-            <a:off x="640080" y="3895344"/>
+            <a:off x="640080" y="3493008"/>
             <a:ext cx="1005840" cy="822960"/>
           </a:xfrm>
           <a:prstGeom prst="rect">
@@ -13058,7 +13059,7 @@
               <a:buNone/>
             </a:pPr>
             <a:r>
-              <a:rPr lang="en-US" sz="3800" b="1" dirty="0">
+              <a:rPr lang="en-US" sz="3400" b="1" dirty="0">
                 <a:solidFill>
                   <a:srgbClr val="6366F1"/>
                 </a:solidFill>
@@ -13068,7 +13069,7 @@
               </a:rPr>
               <a:t>03</a:t>
             </a:r>
-            <a:endParaRPr lang="en-US" sz="3800" dirty="0"/>
+            <a:endParaRPr lang="en-US" sz="3400" dirty="0"/>
           </a:p>
         </p:txBody>
       </p:sp>
@@ -13080,7 +13081,7 @@
         </p:nvSpPr>
         <p:spPr>
           <a:xfrm>
-            <a:off x="1737360" y="3931920"/>
+            <a:off x="1737360" y="3529584"/>
             <a:ext cx="3657600" cy="457200"/>
           </a:xfrm>
           <a:prstGeom prst="rect">
@@ -13097,7 +13098,7 @@
               <a:buNone/>
             </a:pPr>
             <a:r>
-              <a:rPr lang="en-US" sz="2000" b="1" dirty="0">
+              <a:rPr lang="en-US" sz="1900" b="1" dirty="0">
                 <a:solidFill>
                   <a:srgbClr val="1E2235"/>
                 </a:solidFill>
@@ -13105,21 +13106,138 @@
                 <a:ea typeface="Microsoft JhengHei" pitchFamily="34" charset="-122"/>
                 <a:cs typeface="Microsoft JhengHei" pitchFamily="34" charset="-120"/>
               </a:rPr>
+              <a:t>練習環境準備</a:t>
+            </a:r>
+            <a:endParaRPr lang="en-US" sz="1900" dirty="0"/>
+          </a:p>
+        </p:txBody>
+      </p:sp>
+      <p:sp>
+        <p:nvSpPr>
+          <p:cNvPr id="13" name="Text 11"/>
+          <p:cNvSpPr/>
+          <p:nvPr/>
+        </p:nvSpPr>
+        <p:spPr>
+          <a:xfrm>
+            <a:off x="1737360" y="3950208"/>
+            <a:ext cx="9601200" cy="365760"/>
+          </a:xfrm>
+          <a:prstGeom prst="rect">
+            <a:avLst/>
+          </a:prstGeom>
+          <a:noFill/>
+          <a:ln/>
+        </p:spPr>
+        <p:txBody>
+          <a:bodyPr wrap="square" rtlCol="0" anchor="ctr"/>
+          <a:lstStyle/>
+          <a:p>
+            <a:pPr indent="0" marL="0">
+              <a:buNone/>
+            </a:pPr>
+            <a:r>
+              <a:rPr lang="en-US" sz="1350" dirty="0">
+                <a:solidFill>
+                  <a:srgbClr val="5B6079"/>
+                </a:solidFill>
+                <a:latin typeface="Microsoft JhengHei" pitchFamily="34" charset="0"/>
+                <a:ea typeface="Microsoft JhengHei" pitchFamily="34" charset="-122"/>
+                <a:cs typeface="Microsoft JhengHei" pitchFamily="34" charset="-120"/>
+              </a:rPr>
+              <a:t>素材課前放進 OneDrive 與信箱，讓 Cowork 自己去找</a:t>
+            </a:r>
+            <a:endParaRPr lang="en-US" sz="1350" dirty="0"/>
+          </a:p>
+        </p:txBody>
+      </p:sp>
+      <p:sp>
+        <p:nvSpPr>
+          <p:cNvPr id="14" name="Text 12"/>
+          <p:cNvSpPr/>
+          <p:nvPr/>
+        </p:nvSpPr>
+        <p:spPr>
+          <a:xfrm>
+            <a:off x="640080" y="4407408"/>
+            <a:ext cx="1005840" cy="822960"/>
+          </a:xfrm>
+          <a:prstGeom prst="rect">
+            <a:avLst/>
+          </a:prstGeom>
+          <a:noFill/>
+          <a:ln/>
+        </p:spPr>
+        <p:txBody>
+          <a:bodyPr wrap="square" rtlCol="0" anchor="ctr"/>
+          <a:lstStyle/>
+          <a:p>
+            <a:pPr algn="l" indent="0" marL="0">
+              <a:buNone/>
+            </a:pPr>
+            <a:r>
+              <a:rPr lang="en-US" sz="3400" b="1" dirty="0">
+                <a:solidFill>
+                  <a:srgbClr val="6366F1"/>
+                </a:solidFill>
+                <a:latin typeface="Microsoft JhengHei" pitchFamily="34" charset="0"/>
+                <a:ea typeface="Microsoft JhengHei" pitchFamily="34" charset="-122"/>
+                <a:cs typeface="Microsoft JhengHei" pitchFamily="34" charset="-120"/>
+              </a:rPr>
+              <a:t>04</a:t>
+            </a:r>
+            <a:endParaRPr lang="en-US" sz="3400" dirty="0"/>
+          </a:p>
+        </p:txBody>
+      </p:sp>
+      <p:sp>
+        <p:nvSpPr>
+          <p:cNvPr id="15" name="Text 13"/>
+          <p:cNvSpPr/>
+          <p:nvPr/>
+        </p:nvSpPr>
+        <p:spPr>
+          <a:xfrm>
+            <a:off x="1737360" y="4443984"/>
+            <a:ext cx="3657600" cy="457200"/>
+          </a:xfrm>
+          <a:prstGeom prst="rect">
+            <a:avLst/>
+          </a:prstGeom>
+          <a:noFill/>
+          <a:ln/>
+        </p:spPr>
+        <p:txBody>
+          <a:bodyPr wrap="square" rtlCol="0" anchor="ctr"/>
+          <a:lstStyle/>
+          <a:p>
+            <a:pPr indent="0" marL="0">
+              <a:buNone/>
+            </a:pPr>
+            <a:r>
+              <a:rPr lang="en-US" sz="1900" b="1" dirty="0">
+                <a:solidFill>
+                  <a:srgbClr val="1E2235"/>
+                </a:solidFill>
+                <a:latin typeface="Microsoft JhengHei" pitchFamily="34" charset="0"/>
+                <a:ea typeface="Microsoft JhengHei" pitchFamily="34" charset="-122"/>
+                <a:cs typeface="Microsoft JhengHei" pitchFamily="34" charset="-120"/>
+              </a:rPr>
               <a:t>5 個實戰情境</a:t>
             </a:r>
-            <a:endParaRPr lang="en-US" sz="2000" dirty="0"/>
-          </a:p>
-        </p:txBody>
-      </p:sp>
-      <p:sp>
-        <p:nvSpPr>
-          <p:cNvPr id="13" name="Text 11"/>
-          <p:cNvSpPr/>
-          <p:nvPr/>
-        </p:nvSpPr>
-        <p:spPr>
-          <a:xfrm>
-            <a:off x="1737360" y="4370832"/>
+            <a:endParaRPr lang="en-US" sz="1900" dirty="0"/>
+          </a:p>
+        </p:txBody>
+      </p:sp>
+      <p:sp>
+        <p:nvSpPr>
+          <p:cNvPr id="16" name="Text 14"/>
+          <p:cNvSpPr/>
+          <p:nvPr/>
+        </p:nvSpPr>
+        <p:spPr>
+          <a:xfrm>
+            <a:off x="1737360" y="4864608"/>
             <a:ext cx="9601200" cy="365760"/>
           </a:xfrm>
           <a:prstGeom prst="rect">
@@ -13136,7 +13254,7 @@
               <a:buNone/>
             </a:pPr>
             <a:r>
-              <a:rPr lang="en-US" sz="1400" dirty="0">
+              <a:rPr lang="en-US" sz="1350" dirty="0">
                 <a:solidFill>
                   <a:srgbClr val="5B6079"/>
                 </a:solidFill>
@@ -13146,19 +13264,19 @@
               </a:rPr>
               <a:t>進料異常端到端、停線事件觸發待命、每日 07:30 排程晨報、ISO 稽核前置盤點、停線判定自訂技能，五個「只有 Cowork 做得到」的工作流</a:t>
             </a:r>
-            <a:endParaRPr lang="en-US" sz="1400" dirty="0"/>
-          </a:p>
-        </p:txBody>
-      </p:sp>
-      <p:sp>
-        <p:nvSpPr>
-          <p:cNvPr id="14" name="Text 12"/>
-          <p:cNvSpPr/>
-          <p:nvPr/>
-        </p:nvSpPr>
-        <p:spPr>
-          <a:xfrm>
-            <a:off x="640080" y="4974336"/>
+            <a:endParaRPr lang="en-US" sz="1350" dirty="0"/>
+          </a:p>
+        </p:txBody>
+      </p:sp>
+      <p:sp>
+        <p:nvSpPr>
+          <p:cNvPr id="17" name="Text 15"/>
+          <p:cNvSpPr/>
+          <p:nvPr/>
+        </p:nvSpPr>
+        <p:spPr>
+          <a:xfrm>
+            <a:off x="640080" y="5321808"/>
             <a:ext cx="1005840" cy="822960"/>
           </a:xfrm>
           <a:prstGeom prst="rect">
@@ -13175,7 +13293,7 @@
               <a:buNone/>
             </a:pPr>
             <a:r>
-              <a:rPr lang="en-US" sz="3800" b="1" dirty="0">
+              <a:rPr lang="en-US" sz="3400" b="1" dirty="0">
                 <a:solidFill>
                   <a:srgbClr val="6366F1"/>
                 </a:solidFill>
@@ -13183,21 +13301,21 @@
                 <a:ea typeface="Microsoft JhengHei" pitchFamily="34" charset="-122"/>
                 <a:cs typeface="Microsoft JhengHei" pitchFamily="34" charset="-120"/>
               </a:rPr>
-              <a:t>04</a:t>
-            </a:r>
-            <a:endParaRPr lang="en-US" sz="3800" dirty="0"/>
-          </a:p>
-        </p:txBody>
-      </p:sp>
-      <p:sp>
-        <p:nvSpPr>
-          <p:cNvPr id="15" name="Text 13"/>
-          <p:cNvSpPr/>
-          <p:nvPr/>
-        </p:nvSpPr>
-        <p:spPr>
-          <a:xfrm>
-            <a:off x="1737360" y="5010912"/>
+              <a:t>05</a:t>
+            </a:r>
+            <a:endParaRPr lang="en-US" sz="3400" dirty="0"/>
+          </a:p>
+        </p:txBody>
+      </p:sp>
+      <p:sp>
+        <p:nvSpPr>
+          <p:cNvPr id="18" name="Text 16"/>
+          <p:cNvSpPr/>
+          <p:nvPr/>
+        </p:nvSpPr>
+        <p:spPr>
+          <a:xfrm>
+            <a:off x="1737360" y="5358384"/>
             <a:ext cx="3657600" cy="457200"/>
           </a:xfrm>
           <a:prstGeom prst="rect">
@@ -13214,7 +13332,7 @@
               <a:buNone/>
             </a:pPr>
             <a:r>
-              <a:rPr lang="en-US" sz="2000" b="1" dirty="0">
+              <a:rPr lang="en-US" sz="1900" b="1" dirty="0">
                 <a:solidFill>
                   <a:srgbClr val="1E2235"/>
                 </a:solidFill>
@@ -13224,19 +13342,19 @@
               </a:rPr>
               <a:t>套用到你的日常</a:t>
             </a:r>
-            <a:endParaRPr lang="en-US" sz="2000" dirty="0"/>
-          </a:p>
-        </p:txBody>
-      </p:sp>
-      <p:sp>
-        <p:nvSpPr>
-          <p:cNvPr id="16" name="Text 14"/>
-          <p:cNvSpPr/>
-          <p:nvPr/>
-        </p:nvSpPr>
-        <p:spPr>
-          <a:xfrm>
-            <a:off x="1737360" y="5449824"/>
+            <a:endParaRPr lang="en-US" sz="1900" dirty="0"/>
+          </a:p>
+        </p:txBody>
+      </p:sp>
+      <p:sp>
+        <p:nvSpPr>
+          <p:cNvPr id="19" name="Text 17"/>
+          <p:cNvSpPr/>
+          <p:nvPr/>
+        </p:nvSpPr>
+        <p:spPr>
+          <a:xfrm>
+            <a:off x="1737360" y="5779008"/>
             <a:ext cx="9601200" cy="365760"/>
           </a:xfrm>
           <a:prstGeom prst="rect">
@@ -13253,7 +13371,7 @@
               <a:buNone/>
             </a:pPr>
             <a:r>
-              <a:rPr lang="en-US" sz="1400" dirty="0">
+              <a:rPr lang="en-US" sz="1350" dirty="0">
                 <a:solidFill>
                   <a:srgbClr val="5B6079"/>
                 </a:solidFill>
@@ -13263,13 +13381,13 @@
               </a:rPr>
               <a:t>如何把這些情境延伸到自己的工作</a:t>
             </a:r>
-            <a:endParaRPr lang="en-US" sz="1400" dirty="0"/>
-          </a:p>
-        </p:txBody>
-      </p:sp>
-      <p:sp>
-        <p:nvSpPr>
-          <p:cNvPr id="17" name="Text 15"/>
+            <a:endParaRPr lang="en-US" sz="1350" dirty="0"/>
+          </a:p>
+        </p:txBody>
+      </p:sp>
+      <p:sp>
+        <p:nvSpPr>
+          <p:cNvPr id="20" name="Text 18"/>
           <p:cNvSpPr/>
           <p:nvPr/>
         </p:nvSpPr>
@@ -13308,7 +13426,7 @@
       </p:sp>
       <p:sp>
         <p:nvSpPr>
-          <p:cNvPr id="18" name="Text 16"/>
+          <p:cNvPr id="21" name="Text 19"/>
           <p:cNvSpPr/>
           <p:nvPr/>
         </p:nvSpPr>
@@ -13386,14 +13504,34 @@
       </p:grpSpPr>
       <p:sp>
         <p:nvSpPr>
-          <p:cNvPr id="2" name="Text 0"/>
-          <p:cNvSpPr/>
-          <p:nvPr/>
-        </p:nvSpPr>
-        <p:spPr>
-          <a:xfrm>
-            <a:off x="640080" y="1371600"/>
-            <a:ext cx="10058400" cy="822960"/>
+          <p:cNvPr id="2" name="Shape 0"/>
+          <p:cNvSpPr/>
+          <p:nvPr/>
+        </p:nvSpPr>
+        <p:spPr>
+          <a:xfrm>
+            <a:off x="640080" y="566928"/>
+            <a:ext cx="384048" cy="128016"/>
+          </a:xfrm>
+          <a:prstGeom prst="rect">
+            <a:avLst/>
+          </a:prstGeom>
+          <a:solidFill>
+            <a:srgbClr val="22D3EE"/>
+          </a:solidFill>
+          <a:ln/>
+        </p:spPr>
+      </p:sp>
+      <p:sp>
+        <p:nvSpPr>
+          <p:cNvPr id="3" name="Text 1"/>
+          <p:cNvSpPr/>
+          <p:nvPr/>
+        </p:nvSpPr>
+        <p:spPr>
+          <a:xfrm>
+            <a:off x="1143000" y="457200"/>
+            <a:ext cx="8229600" cy="310896"/>
           </a:xfrm>
           <a:prstGeom prst="rect">
             <a:avLst/>
@@ -13409,7 +13547,46 @@
               <a:buNone/>
             </a:pPr>
             <a:r>
-              <a:rPr lang="en-US" sz="4000" b="1" dirty="0">
+              <a:rPr lang="en-US" sz="1200" b="1" spc="200" kern="0" dirty="0">
+                <a:solidFill>
+                  <a:srgbClr val="22D3EE"/>
+                </a:solidFill>
+                <a:latin typeface="Microsoft JhengHei" pitchFamily="34" charset="0"/>
+                <a:ea typeface="Microsoft JhengHei" pitchFamily="34" charset="-122"/>
+                <a:cs typeface="Microsoft JhengHei" pitchFamily="34" charset="-120"/>
+              </a:rPr>
+              <a:t>TRUST &amp; CONTROL</a:t>
+            </a:r>
+            <a:endParaRPr lang="en-US" sz="1200" dirty="0"/>
+          </a:p>
+        </p:txBody>
+      </p:sp>
+      <p:sp>
+        <p:nvSpPr>
+          <p:cNvPr id="4" name="Text 2"/>
+          <p:cNvSpPr/>
+          <p:nvPr/>
+        </p:nvSpPr>
+        <p:spPr>
+          <a:xfrm>
+            <a:off x="640080" y="786384"/>
+            <a:ext cx="10972800" cy="640080"/>
+          </a:xfrm>
+          <a:prstGeom prst="rect">
+            <a:avLst/>
+          </a:prstGeom>
+          <a:noFill/>
+          <a:ln/>
+        </p:spPr>
+        <p:txBody>
+          <a:bodyPr wrap="square" rtlCol="0" anchor="ctr"/>
+          <a:lstStyle/>
+          <a:p>
+            <a:pPr indent="0" marL="0">
+              <a:buNone/>
+            </a:pPr>
+            <a:r>
+              <a:rPr lang="en-US" sz="3000" b="1" dirty="0">
                 <a:solidFill>
                   <a:srgbClr val="FFFFFF"/>
                 </a:solidFill>
@@ -13417,76 +13594,37 @@
                 <a:ea typeface="Microsoft JhengHei" pitchFamily="34" charset="-122"/>
                 <a:cs typeface="Microsoft JhengHei" pitchFamily="34" charset="-120"/>
               </a:rPr>
-              <a:t>現在就開始練習</a:t>
-            </a:r>
-            <a:endParaRPr lang="en-US" sz="4000" dirty="0"/>
-          </a:p>
-        </p:txBody>
-      </p:sp>
-      <p:sp>
-        <p:nvSpPr>
-          <p:cNvPr id="3" name="Text 1"/>
-          <p:cNvSpPr/>
-          <p:nvPr/>
-        </p:nvSpPr>
-        <p:spPr>
-          <a:xfrm>
-            <a:off x="640080" y="2377440"/>
-            <a:ext cx="10058400" cy="548640"/>
-          </a:xfrm>
-          <a:prstGeom prst="rect">
-            <a:avLst/>
-          </a:prstGeom>
-          <a:noFill/>
-          <a:ln/>
-        </p:spPr>
-        <p:txBody>
-          <a:bodyPr wrap="square" rtlCol="0" anchor="ctr"/>
-          <a:lstStyle/>
-          <a:p>
-            <a:pPr indent="0" marL="0">
-              <a:buNone/>
-            </a:pPr>
-            <a:r>
-              <a:rPr lang="en-US" sz="1500" dirty="0">
-                <a:solidFill>
-                  <a:srgbClr val="C7CAEC"/>
-                </a:solidFill>
-                <a:latin typeface="Microsoft JhengHei" pitchFamily="34" charset="0"/>
-                <a:ea typeface="Microsoft JhengHei" pitchFamily="34" charset="-122"/>
-                <a:cs typeface="Microsoft JhengHei" pitchFamily="34" charset="-120"/>
-              </a:rPr>
-              <a:t>開始前請確認：每位使用者一張 M365 Copilot 授權、管理員已啟用用量計費（Copilot Credits，未啟用則無法存取）、租戶位於 Anthropic 支援地區；可在 Web/桌面/行動/Outlook/Teams 使用（本機瀏覽器工作僅限網頁版＋Edge 150 以上，且預設停用需管理員開啟）。</a:t>
-            </a:r>
-            <a:endParaRPr lang="en-US" sz="1500" dirty="0"/>
-          </a:p>
-        </p:txBody>
-      </p:sp>
-      <p:sp>
-        <p:nvSpPr>
-          <p:cNvPr id="4" name="Shape 2"/>
-          <p:cNvSpPr/>
-          <p:nvPr/>
-        </p:nvSpPr>
-        <p:spPr>
-          <a:xfrm>
-            <a:off x="640080" y="3017520"/>
-            <a:ext cx="8686800" cy="868680"/>
+              <a:t>自動化，但你始終是決策者</a:t>
+            </a:r>
+            <a:endParaRPr lang="en-US" sz="3000" dirty="0"/>
+          </a:p>
+        </p:txBody>
+      </p:sp>
+      <p:sp>
+        <p:nvSpPr>
+          <p:cNvPr id="5" name="Shape 3"/>
+          <p:cNvSpPr/>
+          <p:nvPr/>
+        </p:nvSpPr>
+        <p:spPr>
+          <a:xfrm>
+            <a:off x="640080" y="1874520"/>
+            <a:ext cx="777240" cy="777240"/>
           </a:xfrm>
           <a:prstGeom prst="roundRect">
             <a:avLst>
-              <a:gd name="adj" fmla="val 12632"/>
+              <a:gd name="adj" fmla="val 18824"/>
             </a:avLst>
           </a:prstGeom>
           <a:solidFill>
             <a:srgbClr val="FFFFFF">
-              <a:alpha val="10000"/>
+              <a:alpha val="14000"/>
             </a:srgbClr>
           </a:solidFill>
           <a:ln w="12700">
             <a:solidFill>
-              <a:srgbClr val="FFFFFF">
-                <a:alpha val="35000"/>
+              <a:srgbClr val="22D3EE">
+                <a:alpha val="60000"/>
               </a:srgbClr>
             </a:solidFill>
             <a:prstDash val="solid"/>
@@ -13495,7 +13633,7 @@
       </p:sp>
       <p:pic>
         <p:nvPicPr>
-          <p:cNvPr id="5" name="Image 0" descr="preencoded.png">    </p:cNvPr>
+          <p:cNvPr id="6" name="Image 0" descr="preencoded.png">    </p:cNvPr>
           <p:cNvPicPr>
             <a:picLocks noChangeAspect="1"/>
           </p:cNvPicPr>
@@ -13509,8 +13647,8 @@
         </p:blipFill>
         <p:spPr>
           <a:xfrm>
-            <a:off x="914400" y="3291840"/>
-            <a:ext cx="329184" cy="329184"/>
+            <a:off x="804672" y="2039112"/>
+            <a:ext cx="448056" cy="448056"/>
           </a:xfrm>
           <a:prstGeom prst="rect">
             <a:avLst/>
@@ -13519,14 +13657,14 @@
       </p:pic>
       <p:sp>
         <p:nvSpPr>
-          <p:cNvPr id="6" name="Text 3"/>
-          <p:cNvSpPr/>
-          <p:nvPr/>
-        </p:nvSpPr>
-        <p:spPr>
-          <a:xfrm>
-            <a:off x="1417320" y="3127248"/>
-            <a:ext cx="7315200" cy="320040"/>
+          <p:cNvPr id="7" name="Text 4"/>
+          <p:cNvSpPr/>
+          <p:nvPr/>
+        </p:nvSpPr>
+        <p:spPr>
+          <a:xfrm>
+            <a:off x="1691640" y="1856232"/>
+            <a:ext cx="6858000" cy="347472"/>
           </a:xfrm>
           <a:prstGeom prst="rect">
             <a:avLst/>
@@ -13542,7 +13680,7 @@
               <a:buNone/>
             </a:pPr>
             <a:r>
-              <a:rPr lang="en-US" sz="1400" b="1" dirty="0">
+              <a:rPr lang="en-US" sz="1700" b="1" dirty="0">
                 <a:solidFill>
                   <a:srgbClr val="FFFFFF"/>
                 </a:solidFill>
@@ -13550,24 +13688,22 @@
                 <a:ea typeface="Microsoft JhengHei" pitchFamily="34" charset="-122"/>
                 <a:cs typeface="Microsoft JhengHei" pitchFamily="34" charset="-120"/>
               </a:rPr>
-              <a:t>Cowork 練習手冊</a:t>
-            </a:r>
-            <a:endParaRPr lang="en-US" sz="1400" dirty="0"/>
-          </a:p>
-        </p:txBody>
-      </p:sp>
-      <p:sp>
-        <p:nvSpPr>
-          <p:cNvPr id="7" name="Text 4">
-            <a:hlinkClick r:id="rId3" tooltip=""/>
-          </p:cNvPr>
-          <p:cNvSpPr/>
-          <p:nvPr/>
-        </p:nvSpPr>
-        <p:spPr>
-          <a:xfrm>
-            <a:off x="1417320" y="3419856"/>
-            <a:ext cx="7772400" cy="320040"/>
+              <a:t>行動前審核</a:t>
+            </a:r>
+            <a:endParaRPr lang="en-US" sz="1700" dirty="0"/>
+          </a:p>
+        </p:txBody>
+      </p:sp>
+      <p:sp>
+        <p:nvSpPr>
+          <p:cNvPr id="8" name="Text 5"/>
+          <p:cNvSpPr/>
+          <p:nvPr/>
+        </p:nvSpPr>
+        <p:spPr>
+          <a:xfrm>
+            <a:off x="1691640" y="2203704"/>
+            <a:ext cx="9966960" cy="658368"/>
           </a:xfrm>
           <a:prstGeom prst="rect">
             <a:avLst/>
@@ -13580,33 +13716,196 @@
           <a:lstStyle/>
           <a:p>
             <a:pPr indent="0" marL="0">
-              <a:buNone/>
-            </a:pPr>
-            <a:r>
-              <a:rPr lang="en-US" sz="1300" u="sng" dirty="0">
-                <a:solidFill>
-                  <a:srgbClr val="9FE9FF"/>
-                </a:solidFill>
-                <a:latin typeface="Microsoft JhengHei" pitchFamily="34" charset="0"/>
-                <a:ea typeface="Microsoft JhengHei" pitchFamily="34" charset="-122"/>
-                <a:cs typeface="Microsoft JhengHei" pitchFamily="34" charset="-120"/>
-                <a:hlinkClick r:id="rId3" invalidUrl="" action="" tgtFrame="" tooltip="" history="1" highlightClick="0" endSnd="0">
-                  <a:extLst>
-                    <a:ext uri="{A12FA001-AC4F-418D-AE19-62706E023703}">
-                      <ahyp:hlinkClr xmlns:ahyp="http://schemas.microsoft.com/office/drawing/2018/hyperlinkcolor" val="tx"/>
-                    </a:ext>
-                  </a:extLst>
-                </a:hlinkClick>
-              </a:rPr>
-              <a:t>andyhung11.github.io/Copilot-in-1mins/CoworkPlaybook/</a:t>
+              <a:lnSpc>
+                <a:spcPct val="118000"/>
+              </a:lnSpc>
+              <a:buNone/>
+            </a:pPr>
+            <a:r>
+              <a:rPr lang="en-US" sz="1300" dirty="0">
+                <a:solidFill>
+                  <a:srgbClr val="C7CAEC"/>
+                </a:solidFill>
+                <a:latin typeface="Microsoft JhengHei" pitchFamily="34" charset="0"/>
+                <a:ea typeface="Microsoft JhengHei" pitchFamily="34" charset="-122"/>
+                <a:cs typeface="Microsoft JhengHei" pitchFamily="34" charset="-120"/>
+              </a:rPr>
+              <a:t>中高風險動作會顯示 RISK-LEVEL；寄信、發 Teams、建立會議等動作先攤開可編輯預覽，核准後才送出。</a:t>
             </a:r>
             <a:endParaRPr lang="en-US" sz="1300" dirty="0"/>
           </a:p>
         </p:txBody>
+      </p:sp>
+      <p:sp>
+        <p:nvSpPr>
+          <p:cNvPr id="9" name="Shape 6"/>
+          <p:cNvSpPr/>
+          <p:nvPr/>
+        </p:nvSpPr>
+        <p:spPr>
+          <a:xfrm>
+            <a:off x="640080" y="3044952"/>
+            <a:ext cx="777240" cy="777240"/>
+          </a:xfrm>
+          <a:prstGeom prst="roundRect">
+            <a:avLst>
+              <a:gd name="adj" fmla="val 18824"/>
+            </a:avLst>
+          </a:prstGeom>
+          <a:solidFill>
+            <a:srgbClr val="FFFFFF">
+              <a:alpha val="14000"/>
+            </a:srgbClr>
+          </a:solidFill>
+          <a:ln w="12700">
+            <a:solidFill>
+              <a:srgbClr val="22D3EE">
+                <a:alpha val="60000"/>
+              </a:srgbClr>
+            </a:solidFill>
+            <a:prstDash val="solid"/>
+          </a:ln>
+        </p:spPr>
       </p:sp>
       <p:pic>
         <p:nvPicPr>
-          <p:cNvPr id="8" name="Image 1" descr="preencoded.png">    </p:cNvPr>
+          <p:cNvPr id="10" name="Image 1" descr="preencoded.png">    </p:cNvPr>
+          <p:cNvPicPr>
+            <a:picLocks noChangeAspect="1"/>
+          </p:cNvPicPr>
+          <p:nvPr/>
+        </p:nvPicPr>
+        <p:blipFill>
+          <a:blip r:embed="rId3"/>
+          <a:stretch>
+            <a:fillRect/>
+          </a:stretch>
+        </p:blipFill>
+        <p:spPr>
+          <a:xfrm>
+            <a:off x="804672" y="3209544"/>
+            <a:ext cx="448056" cy="448056"/>
+          </a:xfrm>
+          <a:prstGeom prst="rect">
+            <a:avLst/>
+          </a:prstGeom>
+        </p:spPr>
+      </p:pic>
+      <p:sp>
+        <p:nvSpPr>
+          <p:cNvPr id="11" name="Text 7"/>
+          <p:cNvSpPr/>
+          <p:nvPr/>
+        </p:nvSpPr>
+        <p:spPr>
+          <a:xfrm>
+            <a:off x="1691640" y="3026664"/>
+            <a:ext cx="6858000" cy="347472"/>
+          </a:xfrm>
+          <a:prstGeom prst="rect">
+            <a:avLst/>
+          </a:prstGeom>
+          <a:noFill/>
+          <a:ln/>
+        </p:spPr>
+        <p:txBody>
+          <a:bodyPr wrap="square" rtlCol="0" anchor="ctr"/>
+          <a:lstStyle/>
+          <a:p>
+            <a:pPr indent="0" marL="0">
+              <a:buNone/>
+            </a:pPr>
+            <a:r>
+              <a:rPr lang="en-US" sz="1700" b="1" dirty="0">
+                <a:solidFill>
+                  <a:srgbClr val="FFFFFF"/>
+                </a:solidFill>
+                <a:latin typeface="Microsoft JhengHei" pitchFamily="34" charset="0"/>
+                <a:ea typeface="Microsoft JhengHei" pitchFamily="34" charset="-122"/>
+                <a:cs typeface="Microsoft JhengHei" pitchFamily="34" charset="-120"/>
+              </a:rPr>
+              <a:t>控制範圍清楚</a:t>
+            </a:r>
+            <a:endParaRPr lang="en-US" sz="1700" dirty="0"/>
+          </a:p>
+        </p:txBody>
+      </p:sp>
+      <p:sp>
+        <p:nvSpPr>
+          <p:cNvPr id="12" name="Text 8"/>
+          <p:cNvSpPr/>
+          <p:nvPr/>
+        </p:nvSpPr>
+        <p:spPr>
+          <a:xfrm>
+            <a:off x="1691640" y="3374136"/>
+            <a:ext cx="9966960" cy="658368"/>
+          </a:xfrm>
+          <a:prstGeom prst="rect">
+            <a:avLst/>
+          </a:prstGeom>
+          <a:noFill/>
+          <a:ln/>
+        </p:spPr>
+        <p:txBody>
+          <a:bodyPr wrap="square" rtlCol="0" anchor="ctr"/>
+          <a:lstStyle/>
+          <a:p>
+            <a:pPr indent="0" marL="0">
+              <a:lnSpc>
+                <a:spcPct val="118000"/>
+              </a:lnSpc>
+              <a:buNone/>
+            </a:pPr>
+            <a:r>
+              <a:rPr lang="en-US" sz="1300" dirty="0">
+                <a:solidFill>
+                  <a:srgbClr val="C7CAEC"/>
+                </a:solidFill>
+                <a:latin typeface="Microsoft JhengHei" pitchFamily="34" charset="0"/>
+                <a:ea typeface="Microsoft JhengHei" pitchFamily="34" charset="-122"/>
+                <a:cs typeface="Microsoft JhengHei" pitchFamily="34" charset="-120"/>
+              </a:rPr>
+              <a:t>don’t ask again 可限定 per-recipient、per-domain 或 always；任務可軟／硬暫停、恢復或取消。</a:t>
+            </a:r>
+            <a:endParaRPr lang="en-US" sz="1300" dirty="0"/>
+          </a:p>
+        </p:txBody>
+      </p:sp>
+      <p:sp>
+        <p:nvSpPr>
+          <p:cNvPr id="13" name="Shape 9"/>
+          <p:cNvSpPr/>
+          <p:nvPr/>
+        </p:nvSpPr>
+        <p:spPr>
+          <a:xfrm>
+            <a:off x="640080" y="4215384"/>
+            <a:ext cx="777240" cy="777240"/>
+          </a:xfrm>
+          <a:prstGeom prst="roundRect">
+            <a:avLst>
+              <a:gd name="adj" fmla="val 18824"/>
+            </a:avLst>
+          </a:prstGeom>
+          <a:solidFill>
+            <a:srgbClr val="FFFFFF">
+              <a:alpha val="14000"/>
+            </a:srgbClr>
+          </a:solidFill>
+          <a:ln w="12700">
+            <a:solidFill>
+              <a:srgbClr val="22D3EE">
+                <a:alpha val="60000"/>
+              </a:srgbClr>
+            </a:solidFill>
+            <a:prstDash val="solid"/>
+          </a:ln>
+        </p:spPr>
+      </p:sp>
+      <p:pic>
+        <p:nvPicPr>
+          <p:cNvPr id="14" name="Image 2" descr="preencoded.png">    </p:cNvPr>
           <p:cNvPicPr>
             <a:picLocks noChangeAspect="1"/>
           </p:cNvPicPr>
@@ -13620,8 +13919,8 @@
         </p:blipFill>
         <p:spPr>
           <a:xfrm>
-            <a:off x="640080" y="4315968"/>
-            <a:ext cx="237744" cy="237744"/>
+            <a:off x="804672" y="4379976"/>
+            <a:ext cx="448056" cy="448056"/>
           </a:xfrm>
           <a:prstGeom prst="rect">
             <a:avLst/>
@@ -13630,14 +13929,14 @@
       </p:pic>
       <p:sp>
         <p:nvSpPr>
-          <p:cNvPr id="9" name="Text 5"/>
-          <p:cNvSpPr/>
-          <p:nvPr/>
-        </p:nvSpPr>
-        <p:spPr>
-          <a:xfrm>
-            <a:off x="1005840" y="4261104"/>
-            <a:ext cx="9144000" cy="365760"/>
+          <p:cNvPr id="15" name="Text 10"/>
+          <p:cNvSpPr/>
+          <p:nvPr/>
+        </p:nvSpPr>
+        <p:spPr>
+          <a:xfrm>
+            <a:off x="1691640" y="4197096"/>
+            <a:ext cx="6858000" cy="347472"/>
           </a:xfrm>
           <a:prstGeom prst="rect">
             <a:avLst/>
@@ -13653,23 +13952,96 @@
               <a:buNone/>
             </a:pPr>
             <a:r>
-              <a:rPr lang="en-US" sz="1400" dirty="0">
-                <a:solidFill>
-                  <a:srgbClr val="E3E5F7"/>
-                </a:solidFill>
-                <a:latin typeface="Microsoft JhengHei" pitchFamily="34" charset="0"/>
-                <a:ea typeface="Microsoft JhengHei" pitchFamily="34" charset="-122"/>
-                <a:cs typeface="Microsoft JhengHei" pitchFamily="34" charset="-120"/>
-              </a:rPr>
-              <a:t>挑一個最貼近你工作的情境開始</a:t>
-            </a:r>
-            <a:endParaRPr lang="en-US" sz="1400" dirty="0"/>
-          </a:p>
-        </p:txBody>
+              <a:rPr lang="en-US" sz="1700" b="1" dirty="0">
+                <a:solidFill>
+                  <a:srgbClr val="FFFFFF"/>
+                </a:solidFill>
+                <a:latin typeface="Microsoft JhengHei" pitchFamily="34" charset="0"/>
+                <a:ea typeface="Microsoft JhengHei" pitchFamily="34" charset="-122"/>
+                <a:cs typeface="Microsoft JhengHei" pitchFamily="34" charset="-120"/>
+              </a:rPr>
+              <a:t>自動化任務也有把關</a:t>
+            </a:r>
+            <a:endParaRPr lang="en-US" sz="1700" dirty="0"/>
+          </a:p>
+        </p:txBody>
+      </p:sp>
+      <p:sp>
+        <p:nvSpPr>
+          <p:cNvPr id="16" name="Text 11"/>
+          <p:cNvSpPr/>
+          <p:nvPr/>
+        </p:nvSpPr>
+        <p:spPr>
+          <a:xfrm>
+            <a:off x="1691640" y="4544568"/>
+            <a:ext cx="9966960" cy="658368"/>
+          </a:xfrm>
+          <a:prstGeom prst="rect">
+            <a:avLst/>
+          </a:prstGeom>
+          <a:noFill/>
+          <a:ln/>
+        </p:spPr>
+        <p:txBody>
+          <a:bodyPr wrap="square" rtlCol="0" anchor="ctr"/>
+          <a:lstStyle/>
+          <a:p>
+            <a:pPr indent="0" marL="0">
+              <a:lnSpc>
+                <a:spcPct val="118000"/>
+              </a:lnSpc>
+              <a:buNone/>
+            </a:pPr>
+            <a:r>
+              <a:rPr lang="en-US" sz="1300" dirty="0">
+                <a:solidFill>
+                  <a:srgbClr val="C7CAEC"/>
+                </a:solidFill>
+                <a:latin typeface="Microsoft JhengHei" pitchFamily="34" charset="0"/>
+                <a:ea typeface="Microsoft JhengHei" pitchFamily="34" charset="-122"/>
+                <a:cs typeface="Microsoft JhengHei" pitchFamily="34" charset="-120"/>
+              </a:rPr>
+              <a:t>排程提示與事件驅動任務有執行頻率限制與防迴圈保護；一律以建立者權限執行，且與其他 Cowork 活動一同記錄在統一稽核日誌，套用 Microsoft Purview 政策。</a:t>
+            </a:r>
+            <a:endParaRPr lang="en-US" sz="1300" dirty="0"/>
+          </a:p>
+        </p:txBody>
+      </p:sp>
+      <p:sp>
+        <p:nvSpPr>
+          <p:cNvPr id="17" name="Shape 12"/>
+          <p:cNvSpPr/>
+          <p:nvPr/>
+        </p:nvSpPr>
+        <p:spPr>
+          <a:xfrm>
+            <a:off x="640080" y="5385816"/>
+            <a:ext cx="777240" cy="777240"/>
+          </a:xfrm>
+          <a:prstGeom prst="roundRect">
+            <a:avLst>
+              <a:gd name="adj" fmla="val 18824"/>
+            </a:avLst>
+          </a:prstGeom>
+          <a:solidFill>
+            <a:srgbClr val="FFFFFF">
+              <a:alpha val="14000"/>
+            </a:srgbClr>
+          </a:solidFill>
+          <a:ln w="12700">
+            <a:solidFill>
+              <a:srgbClr val="22D3EE">
+                <a:alpha val="60000"/>
+              </a:srgbClr>
+            </a:solidFill>
+            <a:prstDash val="solid"/>
+          </a:ln>
+        </p:spPr>
       </p:sp>
       <p:pic>
         <p:nvPicPr>
-          <p:cNvPr id="10" name="Image 2" descr="preencoded.png">    </p:cNvPr>
+          <p:cNvPr id="18" name="Image 3" descr="preencoded.png">    </p:cNvPr>
           <p:cNvPicPr>
             <a:picLocks noChangeAspect="1"/>
           </p:cNvPicPr>
@@ -13683,8 +14055,8 @@
         </p:blipFill>
         <p:spPr>
           <a:xfrm>
-            <a:off x="640080" y="4791456"/>
-            <a:ext cx="237744" cy="237744"/>
+            <a:off x="804672" y="5550408"/>
+            <a:ext cx="448056" cy="448056"/>
           </a:xfrm>
           <a:prstGeom prst="rect">
             <a:avLst/>
@@ -13693,14 +14065,14 @@
       </p:pic>
       <p:sp>
         <p:nvSpPr>
-          <p:cNvPr id="11" name="Text 6"/>
-          <p:cNvSpPr/>
-          <p:nvPr/>
-        </p:nvSpPr>
-        <p:spPr>
-          <a:xfrm>
-            <a:off x="1005840" y="4736592"/>
-            <a:ext cx="9144000" cy="365760"/>
+          <p:cNvPr id="19" name="Text 13"/>
+          <p:cNvSpPr/>
+          <p:nvPr/>
+        </p:nvSpPr>
+        <p:spPr>
+          <a:xfrm>
+            <a:off x="1691640" y="5367528"/>
+            <a:ext cx="6858000" cy="347472"/>
           </a:xfrm>
           <a:prstGeom prst="rect">
             <a:avLst/>
@@ -13716,54 +14088,30 @@
               <a:buNone/>
             </a:pPr>
             <a:r>
-              <a:rPr lang="en-US" sz="1400" dirty="0">
-                <a:solidFill>
-                  <a:srgbClr val="E3E5F7"/>
-                </a:solidFill>
-                <a:latin typeface="Microsoft JhengHei" pitchFamily="34" charset="0"/>
-                <a:ea typeface="Microsoft JhengHei" pitchFamily="34" charset="-122"/>
-                <a:cs typeface="Microsoft JhengHei" pitchFamily="34" charset="-120"/>
-              </a:rPr>
-              <a:t>自訂技能放 OneDrive /Documents/Cowork/skills/ 的 SKILL.md（最多 50 個、每個 1MB）</a:t>
-            </a:r>
-            <a:endParaRPr lang="en-US" sz="1400" dirty="0"/>
-          </a:p>
-        </p:txBody>
-      </p:sp>
-      <p:pic>
-        <p:nvPicPr>
-          <p:cNvPr id="12" name="Image 3" descr="preencoded.png">    </p:cNvPr>
-          <p:cNvPicPr>
-            <a:picLocks noChangeAspect="1"/>
-          </p:cNvPicPr>
-          <p:nvPr/>
-        </p:nvPicPr>
-        <p:blipFill>
-          <a:blip r:embed="rId6"/>
-          <a:stretch>
-            <a:fillRect/>
-          </a:stretch>
-        </p:blipFill>
-        <p:spPr>
-          <a:xfrm>
-            <a:off x="640080" y="5266944"/>
-            <a:ext cx="237744" cy="237744"/>
-          </a:xfrm>
-          <a:prstGeom prst="rect">
-            <a:avLst/>
-          </a:prstGeom>
-        </p:spPr>
-      </p:pic>
-      <p:sp>
-        <p:nvSpPr>
-          <p:cNvPr id="13" name="Text 7"/>
-          <p:cNvSpPr/>
-          <p:nvPr/>
-        </p:nvSpPr>
-        <p:spPr>
-          <a:xfrm>
-            <a:off x="1005840" y="5212080"/>
-            <a:ext cx="9144000" cy="365760"/>
+              <a:rPr lang="en-US" sz="1700" b="1" dirty="0">
+                <a:solidFill>
+                  <a:srgbClr val="FFFFFF"/>
+                </a:solidFill>
+                <a:latin typeface="Microsoft JhengHei" pitchFamily="34" charset="0"/>
+                <a:ea typeface="Microsoft JhengHei" pitchFamily="34" charset="-122"/>
+                <a:cs typeface="Microsoft JhengHei" pitchFamily="34" charset="-120"/>
+              </a:rPr>
+              <a:t>限制也要知道</a:t>
+            </a:r>
+            <a:endParaRPr lang="en-US" sz="1700" dirty="0"/>
+          </a:p>
+        </p:txBody>
+      </p:sp>
+      <p:sp>
+        <p:nvSpPr>
+          <p:cNvPr id="20" name="Text 14"/>
+          <p:cNvSpPr/>
+          <p:nvPr/>
+        </p:nvSpPr>
+        <p:spPr>
+          <a:xfrm>
+            <a:off x="1691640" y="5715000"/>
+            <a:ext cx="9966960" cy="658368"/>
           </a:xfrm>
           <a:prstGeom prst="rect">
             <a:avLst/>
@@ -13776,83 +14124,101 @@
           <a:lstStyle/>
           <a:p>
             <a:pPr indent="0" marL="0">
-              <a:buNone/>
-            </a:pPr>
-            <a:r>
-              <a:rPr lang="en-US" sz="1400" dirty="0">
-                <a:solidFill>
-                  <a:srgbClr val="E3E5F7"/>
-                </a:solidFill>
-                <a:latin typeface="Microsoft JhengHei" pitchFamily="34" charset="0"/>
-                <a:ea typeface="Microsoft JhengHei" pitchFamily="34" charset="-122"/>
-                <a:cs typeface="Microsoft JhengHei" pitchFamily="34" charset="-120"/>
-              </a:rPr>
-              <a:t>模型選擇器：Auto（預設）、GPT 5.5 Frontier、GPT 5.6 Sol／Terra、Opus 5、Sonnet 5、Fable 5（預覽・預設關閉）</a:t>
-            </a:r>
-            <a:endParaRPr lang="en-US" sz="1400" dirty="0"/>
-          </a:p>
-        </p:txBody>
-      </p:sp>
-      <p:pic>
-        <p:nvPicPr>
-          <p:cNvPr id="14" name="Image 4" descr="preencoded.png">    </p:cNvPr>
-          <p:cNvPicPr>
-            <a:picLocks noChangeAspect="1"/>
-          </p:cNvPicPr>
-          <p:nvPr/>
-        </p:nvPicPr>
-        <p:blipFill>
-          <a:blip r:embed="rId7"/>
-          <a:stretch>
-            <a:fillRect/>
-          </a:stretch>
-        </p:blipFill>
-        <p:spPr>
-          <a:xfrm>
-            <a:off x="640080" y="5742432"/>
-            <a:ext cx="237744" cy="237744"/>
-          </a:xfrm>
-          <a:prstGeom prst="rect">
-            <a:avLst/>
-          </a:prstGeom>
-        </p:spPr>
-      </p:pic>
-      <p:sp>
-        <p:nvSpPr>
-          <p:cNvPr id="15" name="Text 8"/>
-          <p:cNvSpPr/>
-          <p:nvPr/>
-        </p:nvSpPr>
-        <p:spPr>
-          <a:xfrm>
-            <a:off x="1005840" y="5687568"/>
-            <a:ext cx="9144000" cy="365760"/>
-          </a:xfrm>
-          <a:prstGeom prst="rect">
-            <a:avLst/>
-          </a:prstGeom>
-          <a:noFill/>
-          <a:ln/>
-        </p:spPr>
-        <p:txBody>
-          <a:bodyPr wrap="square" rtlCol="0" anchor="ctr"/>
-          <a:lstStyle/>
-          <a:p>
-            <a:pPr indent="0" marL="0">
-              <a:buNone/>
-            </a:pPr>
-            <a:r>
-              <a:rPr lang="en-US" sz="1400" dirty="0">
-                <a:solidFill>
-                  <a:srgbClr val="E3E5F7"/>
-                </a:solidFill>
-                <a:latin typeface="Microsoft JhengHei" pitchFamily="34" charset="0"/>
-                <a:ea typeface="Microsoft JhengHei" pitchFamily="34" charset="-122"/>
-                <a:cs typeface="Microsoft JhengHei" pitchFamily="34" charset="-120"/>
-              </a:rPr>
-              <a:t>想要自動觸發？到「Automations」頁設定排程提示（上限 5 個）或事件觸發任務（收信／被 @提及）</a:t>
-            </a:r>
-            <a:endParaRPr lang="en-US" sz="1400" dirty="0"/>
+              <a:lnSpc>
+                <a:spcPct val="118000"/>
+              </a:lnSpc>
+              <a:buNone/>
+            </a:pPr>
+            <a:r>
+              <a:rPr lang="en-US" sz="1300" dirty="0">
+                <a:solidFill>
+                  <a:srgbClr val="C7CAEC"/>
+                </a:solidFill>
+                <a:latin typeface="Microsoft JhengHei" pitchFamily="34" charset="0"/>
+                <a:ea typeface="Microsoft JhengHei" pitchFamily="34" charset="-122"/>
+                <a:cs typeface="Microsoft JhengHei" pitchFamily="34" charset="-120"/>
+              </a:rPr>
+              <a:t>不能存取本機檔案、刪除 OneDrive/SharePoint 檔案或讀取加密檔；附件 &lt;200MB；自訂技能與第三方 plugin 未經 Microsoft 驗證，需自行審閱。官方明列不適用於「免人工審查即需保證正確」的用途。</a:t>
+            </a:r>
+            <a:endParaRPr lang="en-US" sz="1300" dirty="0"/>
+          </a:p>
+        </p:txBody>
+      </p:sp>
+      <p:sp>
+        <p:nvSpPr>
+          <p:cNvPr id="21" name="Text 15"/>
+          <p:cNvSpPr/>
+          <p:nvPr/>
+        </p:nvSpPr>
+        <p:spPr>
+          <a:xfrm>
+            <a:off x="640080" y="6473952"/>
+            <a:ext cx="5486400" cy="274320"/>
+          </a:xfrm>
+          <a:prstGeom prst="rect">
+            <a:avLst/>
+          </a:prstGeom>
+          <a:noFill/>
+          <a:ln/>
+        </p:spPr>
+        <p:txBody>
+          <a:bodyPr wrap="square" rtlCol="0" anchor="ctr"/>
+          <a:lstStyle/>
+          <a:p>
+            <a:pPr algn="l" indent="0" marL="0">
+              <a:buNone/>
+            </a:pPr>
+            <a:r>
+              <a:rPr lang="en-US" sz="900" dirty="0">
+                <a:solidFill>
+                  <a:srgbClr val="8A8FB5"/>
+                </a:solidFill>
+                <a:latin typeface="Microsoft JhengHei" pitchFamily="34" charset="0"/>
+                <a:ea typeface="Microsoft JhengHei" pitchFamily="34" charset="-122"/>
+                <a:cs typeface="Microsoft JhengHei" pitchFamily="34" charset="-120"/>
+              </a:rPr>
+              <a:t>Microsoft 365 Copilot Cowork</a:t>
+            </a:r>
+            <a:endParaRPr lang="en-US" sz="900" dirty="0"/>
+          </a:p>
+        </p:txBody>
+      </p:sp>
+      <p:sp>
+        <p:nvSpPr>
+          <p:cNvPr id="22" name="Text 16"/>
+          <p:cNvSpPr/>
+          <p:nvPr/>
+        </p:nvSpPr>
+        <p:spPr>
+          <a:xfrm>
+            <a:off x="11002975" y="6473952"/>
+            <a:ext cx="548640" cy="274320"/>
+          </a:xfrm>
+          <a:prstGeom prst="rect">
+            <a:avLst/>
+          </a:prstGeom>
+          <a:noFill/>
+          <a:ln/>
+        </p:spPr>
+        <p:txBody>
+          <a:bodyPr wrap="square" rtlCol="0" anchor="ctr"/>
+          <a:lstStyle/>
+          <a:p>
+            <a:pPr algn="r" indent="0" marL="0">
+              <a:buNone/>
+            </a:pPr>
+            <a:r>
+              <a:rPr lang="en-US" sz="900" dirty="0">
+                <a:solidFill>
+                  <a:srgbClr val="8A8FB5"/>
+                </a:solidFill>
+                <a:latin typeface="Microsoft JhengHei" pitchFamily="34" charset="0"/>
+                <a:ea typeface="Microsoft JhengHei" pitchFamily="34" charset="-122"/>
+                <a:cs typeface="Microsoft JhengHei" pitchFamily="34" charset="-120"/>
+              </a:rPr>
+              <a:t>19</a:t>
+            </a:r>
+            <a:endParaRPr lang="en-US" sz="900" dirty="0"/>
           </a:p>
         </p:txBody>
       </p:sp>
@@ -13903,6 +14269,517 @@
         </p:nvSpPr>
         <p:spPr>
           <a:xfrm>
+            <a:off x="640080" y="1371600"/>
+            <a:ext cx="10058400" cy="822960"/>
+          </a:xfrm>
+          <a:prstGeom prst="rect">
+            <a:avLst/>
+          </a:prstGeom>
+          <a:noFill/>
+          <a:ln/>
+        </p:spPr>
+        <p:txBody>
+          <a:bodyPr wrap="square" rtlCol="0" anchor="ctr"/>
+          <a:lstStyle/>
+          <a:p>
+            <a:pPr indent="0" marL="0">
+              <a:buNone/>
+            </a:pPr>
+            <a:r>
+              <a:rPr lang="en-US" sz="4000" b="1" dirty="0">
+                <a:solidFill>
+                  <a:srgbClr val="FFFFFF"/>
+                </a:solidFill>
+                <a:latin typeface="Microsoft JhengHei" pitchFamily="34" charset="0"/>
+                <a:ea typeface="Microsoft JhengHei" pitchFamily="34" charset="-122"/>
+                <a:cs typeface="Microsoft JhengHei" pitchFamily="34" charset="-120"/>
+              </a:rPr>
+              <a:t>現在就開始練習</a:t>
+            </a:r>
+            <a:endParaRPr lang="en-US" sz="4000" dirty="0"/>
+          </a:p>
+        </p:txBody>
+      </p:sp>
+      <p:sp>
+        <p:nvSpPr>
+          <p:cNvPr id="3" name="Text 1"/>
+          <p:cNvSpPr/>
+          <p:nvPr/>
+        </p:nvSpPr>
+        <p:spPr>
+          <a:xfrm>
+            <a:off x="640080" y="2377440"/>
+            <a:ext cx="10058400" cy="548640"/>
+          </a:xfrm>
+          <a:prstGeom prst="rect">
+            <a:avLst/>
+          </a:prstGeom>
+          <a:noFill/>
+          <a:ln/>
+        </p:spPr>
+        <p:txBody>
+          <a:bodyPr wrap="square" rtlCol="0" anchor="ctr"/>
+          <a:lstStyle/>
+          <a:p>
+            <a:pPr indent="0" marL="0">
+              <a:buNone/>
+            </a:pPr>
+            <a:r>
+              <a:rPr lang="en-US" sz="1500" dirty="0">
+                <a:solidFill>
+                  <a:srgbClr val="C7CAEC"/>
+                </a:solidFill>
+                <a:latin typeface="Microsoft JhengHei" pitchFamily="34" charset="0"/>
+                <a:ea typeface="Microsoft JhengHei" pitchFamily="34" charset="-122"/>
+                <a:cs typeface="Microsoft JhengHei" pitchFamily="34" charset="-120"/>
+              </a:rPr>
+              <a:t>開始前請確認：每位使用者一張 M365 Copilot 授權、管理員已啟用用量計費（Copilot Credits，未啟用則無法存取）、租戶位於 Anthropic 支援地區；可在 Web/桌面/行動/Outlook/Teams 使用（本機瀏覽器工作僅限網頁版＋Edge 150 以上，且預設停用需管理員開啟）。</a:t>
+            </a:r>
+            <a:endParaRPr lang="en-US" sz="1500" dirty="0"/>
+          </a:p>
+        </p:txBody>
+      </p:sp>
+      <p:sp>
+        <p:nvSpPr>
+          <p:cNvPr id="4" name="Shape 2"/>
+          <p:cNvSpPr/>
+          <p:nvPr/>
+        </p:nvSpPr>
+        <p:spPr>
+          <a:xfrm>
+            <a:off x="640080" y="3017520"/>
+            <a:ext cx="8686800" cy="868680"/>
+          </a:xfrm>
+          <a:prstGeom prst="roundRect">
+            <a:avLst>
+              <a:gd name="adj" fmla="val 12632"/>
+            </a:avLst>
+          </a:prstGeom>
+          <a:solidFill>
+            <a:srgbClr val="FFFFFF">
+              <a:alpha val="10000"/>
+            </a:srgbClr>
+          </a:solidFill>
+          <a:ln w="12700">
+            <a:solidFill>
+              <a:srgbClr val="FFFFFF">
+                <a:alpha val="35000"/>
+              </a:srgbClr>
+            </a:solidFill>
+            <a:prstDash val="solid"/>
+          </a:ln>
+        </p:spPr>
+      </p:sp>
+      <p:pic>
+        <p:nvPicPr>
+          <p:cNvPr id="5" name="Image 0" descr="preencoded.png">    </p:cNvPr>
+          <p:cNvPicPr>
+            <a:picLocks noChangeAspect="1"/>
+          </p:cNvPicPr>
+          <p:nvPr/>
+        </p:nvPicPr>
+        <p:blipFill>
+          <a:blip r:embed="rId2"/>
+          <a:stretch>
+            <a:fillRect/>
+          </a:stretch>
+        </p:blipFill>
+        <p:spPr>
+          <a:xfrm>
+            <a:off x="914400" y="3291840"/>
+            <a:ext cx="329184" cy="329184"/>
+          </a:xfrm>
+          <a:prstGeom prst="rect">
+            <a:avLst/>
+          </a:prstGeom>
+        </p:spPr>
+      </p:pic>
+      <p:sp>
+        <p:nvSpPr>
+          <p:cNvPr id="6" name="Text 3"/>
+          <p:cNvSpPr/>
+          <p:nvPr/>
+        </p:nvSpPr>
+        <p:spPr>
+          <a:xfrm>
+            <a:off x="1417320" y="3127248"/>
+            <a:ext cx="7315200" cy="320040"/>
+          </a:xfrm>
+          <a:prstGeom prst="rect">
+            <a:avLst/>
+          </a:prstGeom>
+          <a:noFill/>
+          <a:ln/>
+        </p:spPr>
+        <p:txBody>
+          <a:bodyPr wrap="square" rtlCol="0" anchor="ctr"/>
+          <a:lstStyle/>
+          <a:p>
+            <a:pPr indent="0" marL="0">
+              <a:buNone/>
+            </a:pPr>
+            <a:r>
+              <a:rPr lang="en-US" sz="1400" b="1" dirty="0">
+                <a:solidFill>
+                  <a:srgbClr val="FFFFFF"/>
+                </a:solidFill>
+                <a:latin typeface="Microsoft JhengHei" pitchFamily="34" charset="0"/>
+                <a:ea typeface="Microsoft JhengHei" pitchFamily="34" charset="-122"/>
+                <a:cs typeface="Microsoft JhengHei" pitchFamily="34" charset="-120"/>
+              </a:rPr>
+              <a:t>Cowork 練習手冊</a:t>
+            </a:r>
+            <a:endParaRPr lang="en-US" sz="1400" dirty="0"/>
+          </a:p>
+        </p:txBody>
+      </p:sp>
+      <p:sp>
+        <p:nvSpPr>
+          <p:cNvPr id="7" name="Text 4">
+            <a:hlinkClick r:id="rId3" tooltip=""/>
+          </p:cNvPr>
+          <p:cNvSpPr/>
+          <p:nvPr/>
+        </p:nvSpPr>
+        <p:spPr>
+          <a:xfrm>
+            <a:off x="1417320" y="3419856"/>
+            <a:ext cx="7772400" cy="320040"/>
+          </a:xfrm>
+          <a:prstGeom prst="rect">
+            <a:avLst/>
+          </a:prstGeom>
+          <a:noFill/>
+          <a:ln/>
+        </p:spPr>
+        <p:txBody>
+          <a:bodyPr wrap="square" rtlCol="0" anchor="ctr"/>
+          <a:lstStyle/>
+          <a:p>
+            <a:pPr indent="0" marL="0">
+              <a:buNone/>
+            </a:pPr>
+            <a:r>
+              <a:rPr lang="en-US" sz="1300" u="sng" dirty="0">
+                <a:solidFill>
+                  <a:srgbClr val="9FE9FF"/>
+                </a:solidFill>
+                <a:latin typeface="Microsoft JhengHei" pitchFamily="34" charset="0"/>
+                <a:ea typeface="Microsoft JhengHei" pitchFamily="34" charset="-122"/>
+                <a:cs typeface="Microsoft JhengHei" pitchFamily="34" charset="-120"/>
+                <a:hlinkClick r:id="rId3" invalidUrl="" action="" tgtFrame="" tooltip="" history="1" highlightClick="0" endSnd="0">
+                  <a:extLst>
+                    <a:ext uri="{A12FA001-AC4F-418D-AE19-62706E023703}">
+                      <ahyp:hlinkClr xmlns:ahyp="http://schemas.microsoft.com/office/drawing/2018/hyperlinkcolor" val="tx"/>
+                    </a:ext>
+                  </a:extLst>
+                </a:hlinkClick>
+              </a:rPr>
+              <a:t>andyhung11.github.io/Copilot-in-1mins/CoworkPlaybook/</a:t>
+            </a:r>
+            <a:endParaRPr lang="en-US" sz="1300" dirty="0"/>
+          </a:p>
+        </p:txBody>
+      </p:sp>
+      <p:pic>
+        <p:nvPicPr>
+          <p:cNvPr id="8" name="Image 1" descr="preencoded.png">    </p:cNvPr>
+          <p:cNvPicPr>
+            <a:picLocks noChangeAspect="1"/>
+          </p:cNvPicPr>
+          <p:nvPr/>
+        </p:nvPicPr>
+        <p:blipFill>
+          <a:blip r:embed="rId4"/>
+          <a:stretch>
+            <a:fillRect/>
+          </a:stretch>
+        </p:blipFill>
+        <p:spPr>
+          <a:xfrm>
+            <a:off x="640080" y="4315968"/>
+            <a:ext cx="237744" cy="237744"/>
+          </a:xfrm>
+          <a:prstGeom prst="rect">
+            <a:avLst/>
+          </a:prstGeom>
+        </p:spPr>
+      </p:pic>
+      <p:sp>
+        <p:nvSpPr>
+          <p:cNvPr id="9" name="Text 5"/>
+          <p:cNvSpPr/>
+          <p:nvPr/>
+        </p:nvSpPr>
+        <p:spPr>
+          <a:xfrm>
+            <a:off x="1005840" y="4261104"/>
+            <a:ext cx="9144000" cy="365760"/>
+          </a:xfrm>
+          <a:prstGeom prst="rect">
+            <a:avLst/>
+          </a:prstGeom>
+          <a:noFill/>
+          <a:ln/>
+        </p:spPr>
+        <p:txBody>
+          <a:bodyPr wrap="square" rtlCol="0" anchor="ctr"/>
+          <a:lstStyle/>
+          <a:p>
+            <a:pPr indent="0" marL="0">
+              <a:buNone/>
+            </a:pPr>
+            <a:r>
+              <a:rPr lang="en-US" sz="1400" dirty="0">
+                <a:solidFill>
+                  <a:srgbClr val="E3E5F7"/>
+                </a:solidFill>
+                <a:latin typeface="Microsoft JhengHei" pitchFamily="34" charset="0"/>
+                <a:ea typeface="Microsoft JhengHei" pitchFamily="34" charset="-122"/>
+                <a:cs typeface="Microsoft JhengHei" pitchFamily="34" charset="-120"/>
+              </a:rPr>
+              <a:t>挑一個最貼近你工作的情境開始</a:t>
+            </a:r>
+            <a:endParaRPr lang="en-US" sz="1400" dirty="0"/>
+          </a:p>
+        </p:txBody>
+      </p:sp>
+      <p:pic>
+        <p:nvPicPr>
+          <p:cNvPr id="10" name="Image 2" descr="preencoded.png">    </p:cNvPr>
+          <p:cNvPicPr>
+            <a:picLocks noChangeAspect="1"/>
+          </p:cNvPicPr>
+          <p:nvPr/>
+        </p:nvPicPr>
+        <p:blipFill>
+          <a:blip r:embed="rId5"/>
+          <a:stretch>
+            <a:fillRect/>
+          </a:stretch>
+        </p:blipFill>
+        <p:spPr>
+          <a:xfrm>
+            <a:off x="640080" y="4791456"/>
+            <a:ext cx="237744" cy="237744"/>
+          </a:xfrm>
+          <a:prstGeom prst="rect">
+            <a:avLst/>
+          </a:prstGeom>
+        </p:spPr>
+      </p:pic>
+      <p:sp>
+        <p:nvSpPr>
+          <p:cNvPr id="11" name="Text 6"/>
+          <p:cNvSpPr/>
+          <p:nvPr/>
+        </p:nvSpPr>
+        <p:spPr>
+          <a:xfrm>
+            <a:off x="1005840" y="4736592"/>
+            <a:ext cx="9144000" cy="365760"/>
+          </a:xfrm>
+          <a:prstGeom prst="rect">
+            <a:avLst/>
+          </a:prstGeom>
+          <a:noFill/>
+          <a:ln/>
+        </p:spPr>
+        <p:txBody>
+          <a:bodyPr wrap="square" rtlCol="0" anchor="ctr"/>
+          <a:lstStyle/>
+          <a:p>
+            <a:pPr indent="0" marL="0">
+              <a:buNone/>
+            </a:pPr>
+            <a:r>
+              <a:rPr lang="en-US" sz="1400" dirty="0">
+                <a:solidFill>
+                  <a:srgbClr val="E3E5F7"/>
+                </a:solidFill>
+                <a:latin typeface="Microsoft JhengHei" pitchFamily="34" charset="0"/>
+                <a:ea typeface="Microsoft JhengHei" pitchFamily="34" charset="-122"/>
+                <a:cs typeface="Microsoft JhengHei" pitchFamily="34" charset="-120"/>
+              </a:rPr>
+              <a:t>自訂技能放 OneDrive /Documents/Cowork/skills/ 的 SKILL.md（最多 50 個、每個 1MB）</a:t>
+            </a:r>
+            <a:endParaRPr lang="en-US" sz="1400" dirty="0"/>
+          </a:p>
+        </p:txBody>
+      </p:sp>
+      <p:pic>
+        <p:nvPicPr>
+          <p:cNvPr id="12" name="Image 3" descr="preencoded.png">    </p:cNvPr>
+          <p:cNvPicPr>
+            <a:picLocks noChangeAspect="1"/>
+          </p:cNvPicPr>
+          <p:nvPr/>
+        </p:nvPicPr>
+        <p:blipFill>
+          <a:blip r:embed="rId6"/>
+          <a:stretch>
+            <a:fillRect/>
+          </a:stretch>
+        </p:blipFill>
+        <p:spPr>
+          <a:xfrm>
+            <a:off x="640080" y="5266944"/>
+            <a:ext cx="237744" cy="237744"/>
+          </a:xfrm>
+          <a:prstGeom prst="rect">
+            <a:avLst/>
+          </a:prstGeom>
+        </p:spPr>
+      </p:pic>
+      <p:sp>
+        <p:nvSpPr>
+          <p:cNvPr id="13" name="Text 7"/>
+          <p:cNvSpPr/>
+          <p:nvPr/>
+        </p:nvSpPr>
+        <p:spPr>
+          <a:xfrm>
+            <a:off x="1005840" y="5212080"/>
+            <a:ext cx="9144000" cy="365760"/>
+          </a:xfrm>
+          <a:prstGeom prst="rect">
+            <a:avLst/>
+          </a:prstGeom>
+          <a:noFill/>
+          <a:ln/>
+        </p:spPr>
+        <p:txBody>
+          <a:bodyPr wrap="square" rtlCol="0" anchor="ctr"/>
+          <a:lstStyle/>
+          <a:p>
+            <a:pPr indent="0" marL="0">
+              <a:buNone/>
+            </a:pPr>
+            <a:r>
+              <a:rPr lang="en-US" sz="1400" dirty="0">
+                <a:solidFill>
+                  <a:srgbClr val="E3E5F7"/>
+                </a:solidFill>
+                <a:latin typeface="Microsoft JhengHei" pitchFamily="34" charset="0"/>
+                <a:ea typeface="Microsoft JhengHei" pitchFamily="34" charset="-122"/>
+                <a:cs typeface="Microsoft JhengHei" pitchFamily="34" charset="-120"/>
+              </a:rPr>
+              <a:t>模型選擇器：Auto（預設）、GPT 5.5 Frontier、GPT 5.6 Sol／Terra、Opus 5、Sonnet 5、Fable 5（預覽・預設關閉）</a:t>
+            </a:r>
+            <a:endParaRPr lang="en-US" sz="1400" dirty="0"/>
+          </a:p>
+        </p:txBody>
+      </p:sp>
+      <p:pic>
+        <p:nvPicPr>
+          <p:cNvPr id="14" name="Image 4" descr="preencoded.png">    </p:cNvPr>
+          <p:cNvPicPr>
+            <a:picLocks noChangeAspect="1"/>
+          </p:cNvPicPr>
+          <p:nvPr/>
+        </p:nvPicPr>
+        <p:blipFill>
+          <a:blip r:embed="rId7"/>
+          <a:stretch>
+            <a:fillRect/>
+          </a:stretch>
+        </p:blipFill>
+        <p:spPr>
+          <a:xfrm>
+            <a:off x="640080" y="5742432"/>
+            <a:ext cx="237744" cy="237744"/>
+          </a:xfrm>
+          <a:prstGeom prst="rect">
+            <a:avLst/>
+          </a:prstGeom>
+        </p:spPr>
+      </p:pic>
+      <p:sp>
+        <p:nvSpPr>
+          <p:cNvPr id="15" name="Text 8"/>
+          <p:cNvSpPr/>
+          <p:nvPr/>
+        </p:nvSpPr>
+        <p:spPr>
+          <a:xfrm>
+            <a:off x="1005840" y="5687568"/>
+            <a:ext cx="9144000" cy="365760"/>
+          </a:xfrm>
+          <a:prstGeom prst="rect">
+            <a:avLst/>
+          </a:prstGeom>
+          <a:noFill/>
+          <a:ln/>
+        </p:spPr>
+        <p:txBody>
+          <a:bodyPr wrap="square" rtlCol="0" anchor="ctr"/>
+          <a:lstStyle/>
+          <a:p>
+            <a:pPr indent="0" marL="0">
+              <a:buNone/>
+            </a:pPr>
+            <a:r>
+              <a:rPr lang="en-US" sz="1400" dirty="0">
+                <a:solidFill>
+                  <a:srgbClr val="E3E5F7"/>
+                </a:solidFill>
+                <a:latin typeface="Microsoft JhengHei" pitchFamily="34" charset="0"/>
+                <a:ea typeface="Microsoft JhengHei" pitchFamily="34" charset="-122"/>
+                <a:cs typeface="Microsoft JhengHei" pitchFamily="34" charset="-120"/>
+              </a:rPr>
+              <a:t>想要自動觸發？到「Automations」頁設定排程提示（上限 5 個）或事件觸發任務（收信／被 @提及）</a:t>
+            </a:r>
+            <a:endParaRPr lang="en-US" sz="1400" dirty="0"/>
+          </a:p>
+        </p:txBody>
+      </p:sp>
+    </p:spTree>
+  </p:cSld>
+  <p:clrMapOvr>
+    <a:masterClrMapping/>
+  </p:clrMapOvr>
+</p:sld>
+</file>
+
+<file path=ppt/slides/slide22.xml><?xml version="1.0" encoding="utf-8"?>
+<p:sld xmlns:a="http://schemas.openxmlformats.org/drawingml/2006/main" xmlns:r="http://schemas.openxmlformats.org/officeDocument/2006/relationships" xmlns:p="http://schemas.openxmlformats.org/presentationml/2006/main">
+  <p:cSld name="Slide 22">
+    <p:bg>
+      <p:bgPr>
+        <a:blipFill dpi="0" rotWithShape="1">
+          <a:blip r:embed="rId1">
+            <a:lum/>
+          </a:blip>
+          <a:srcRect/>
+          <a:stretch>
+            <a:fillRect/>
+          </a:stretch>
+        </a:blipFill>
+        <a:effectLst/>
+      </p:bgPr>
+    </p:bg>
+    <p:spTree>
+      <p:nvGrpSpPr>
+        <p:cNvPr id="1" name=""/>
+        <p:cNvGrpSpPr/>
+        <p:nvPr/>
+      </p:nvGrpSpPr>
+      <p:grpSpPr>
+        <a:xfrm>
+          <a:off x="0" y="0"/>
+          <a:ext cx="0" cy="0"/>
+          <a:chOff x="0" y="0"/>
+          <a:chExt cx="0" cy="0"/>
+        </a:xfrm>
+      </p:grpSpPr>
+      <p:sp>
+        <p:nvSpPr>
+          <p:cNvPr id="2" name="Text 0"/>
+          <p:cNvSpPr/>
+          <p:nvPr/>
+        </p:nvSpPr>
+        <p:spPr>
+          <a:xfrm>
             <a:off x="640080" y="2377440"/>
             <a:ext cx="10058400" cy="1097280"/>
           </a:xfrm>
@@ -18829,6 +19706,1681 @@
                 <a:ea typeface="Microsoft JhengHei" pitchFamily="34" charset="-122"/>
                 <a:cs typeface="Microsoft JhengHei" pitchFamily="34" charset="-120"/>
               </a:rPr>
+              <a:t>BEFORE YOU START</a:t>
+            </a:r>
+            <a:endParaRPr lang="en-US" sz="1200" dirty="0"/>
+          </a:p>
+        </p:txBody>
+      </p:sp>
+      <p:sp>
+        <p:nvSpPr>
+          <p:cNvPr id="4" name="Text 2"/>
+          <p:cNvSpPr/>
+          <p:nvPr/>
+        </p:nvSpPr>
+        <p:spPr>
+          <a:xfrm>
+            <a:off x="640080" y="786384"/>
+            <a:ext cx="10972800" cy="640080"/>
+          </a:xfrm>
+          <a:prstGeom prst="rect">
+            <a:avLst/>
+          </a:prstGeom>
+          <a:noFill/>
+          <a:ln/>
+        </p:spPr>
+        <p:txBody>
+          <a:bodyPr wrap="square" rtlCol="0" anchor="ctr"/>
+          <a:lstStyle/>
+          <a:p>
+            <a:pPr indent="0" marL="0">
+              <a:buNone/>
+            </a:pPr>
+            <a:r>
+              <a:rPr lang="en-US" sz="3000" b="1" dirty="0">
+                <a:solidFill>
+                  <a:srgbClr val="1E2235"/>
+                </a:solidFill>
+                <a:latin typeface="Microsoft JhengHei" pitchFamily="34" charset="0"/>
+                <a:ea typeface="Microsoft JhengHei" pitchFamily="34" charset="-122"/>
+                <a:cs typeface="Microsoft JhengHei" pitchFamily="34" charset="-120"/>
+              </a:rPr>
+              <a:t>練習環境準備</a:t>
+            </a:r>
+            <a:endParaRPr lang="en-US" sz="3000" dirty="0"/>
+          </a:p>
+        </p:txBody>
+      </p:sp>
+      <p:sp>
+        <p:nvSpPr>
+          <p:cNvPr id="5" name="Text 3"/>
+          <p:cNvSpPr/>
+          <p:nvPr/>
+        </p:nvSpPr>
+        <p:spPr>
+          <a:xfrm>
+            <a:off x="640080" y="1481328"/>
+            <a:ext cx="10972800" cy="329184"/>
+          </a:xfrm>
+          <a:prstGeom prst="rect">
+            <a:avLst/>
+          </a:prstGeom>
+          <a:noFill/>
+          <a:ln/>
+        </p:spPr>
+        <p:txBody>
+          <a:bodyPr wrap="square" rtlCol="0" anchor="ctr"/>
+          <a:lstStyle/>
+          <a:p>
+            <a:pPr indent="0" marL="0">
+              <a:buNone/>
+            </a:pPr>
+            <a:r>
+              <a:rPr lang="en-US" sz="1300" dirty="0">
+                <a:solidFill>
+                  <a:srgbClr val="5B6079"/>
+                </a:solidFill>
+                <a:latin typeface="Microsoft JhengHei" pitchFamily="34" charset="0"/>
+                <a:ea typeface="Microsoft JhengHei" pitchFamily="34" charset="-122"/>
+                <a:cs typeface="Microsoft JhengHei" pitchFamily="34" charset="-120"/>
+              </a:rPr>
+              <a:t>素材課前先放進 OneDrive 的 文件/Cowork_Lab/製造業進階/，練習時 Cowork 自己去找 · 準備時間 約 10 分鐘</a:t>
+            </a:r>
+            <a:endParaRPr lang="en-US" sz="1300" dirty="0"/>
+          </a:p>
+        </p:txBody>
+      </p:sp>
+      <p:sp>
+        <p:nvSpPr>
+          <p:cNvPr id="6" name="Shape 4"/>
+          <p:cNvSpPr/>
+          <p:nvPr/>
+        </p:nvSpPr>
+        <p:spPr>
+          <a:xfrm>
+            <a:off x="640080" y="1874520"/>
+            <a:ext cx="5272888" cy="777240"/>
+          </a:xfrm>
+          <a:prstGeom prst="rect">
+            <a:avLst/>
+          </a:prstGeom>
+          <a:solidFill>
+            <a:srgbClr val="FFFFFF"/>
+          </a:solidFill>
+          <a:ln w="12700">
+            <a:solidFill>
+              <a:srgbClr val="E4E7F2"/>
+            </a:solidFill>
+            <a:prstDash val="solid"/>
+          </a:ln>
+        </p:spPr>
+      </p:sp>
+      <p:sp>
+        <p:nvSpPr>
+          <p:cNvPr id="7" name="Shape 5"/>
+          <p:cNvSpPr/>
+          <p:nvPr/>
+        </p:nvSpPr>
+        <p:spPr>
+          <a:xfrm>
+            <a:off x="640080" y="1874520"/>
+            <a:ext cx="68580" cy="777240"/>
+          </a:xfrm>
+          <a:prstGeom prst="rect">
+            <a:avLst/>
+          </a:prstGeom>
+          <a:solidFill>
+            <a:srgbClr val="6366F1"/>
+          </a:solidFill>
+          <a:ln/>
+        </p:spPr>
+      </p:sp>
+      <p:sp>
+        <p:nvSpPr>
+          <p:cNvPr id="8" name="Text 6"/>
+          <p:cNvSpPr/>
+          <p:nvPr/>
+        </p:nvSpPr>
+        <p:spPr>
+          <a:xfrm>
+            <a:off x="804672" y="1929384"/>
+            <a:ext cx="411480" cy="329184"/>
+          </a:xfrm>
+          <a:prstGeom prst="rect">
+            <a:avLst/>
+          </a:prstGeom>
+          <a:noFill/>
+          <a:ln/>
+        </p:spPr>
+        <p:txBody>
+          <a:bodyPr wrap="square" rtlCol="0" anchor="ctr"/>
+          <a:lstStyle/>
+          <a:p>
+            <a:pPr algn="ctr" indent="0" marL="0">
+              <a:buNone/>
+            </a:pPr>
+            <a:r>
+              <a:rPr lang="en-US" sz="1500" dirty="0">
+                <a:solidFill>
+                  <a:srgbClr val="000000"/>
+                </a:solidFill>
+                <a:latin typeface="Microsoft JhengHei" pitchFamily="34" charset="0"/>
+                <a:ea typeface="Microsoft JhengHei" pitchFamily="34" charset="-122"/>
+                <a:cs typeface="Microsoft JhengHei" pitchFamily="34" charset="-120"/>
+              </a:rPr>
+              <a:t>📁</a:t>
+            </a:r>
+            <a:endParaRPr lang="en-US" sz="1500" dirty="0"/>
+          </a:p>
+        </p:txBody>
+      </p:sp>
+      <p:sp>
+        <p:nvSpPr>
+          <p:cNvPr id="9" name="Text 7"/>
+          <p:cNvSpPr/>
+          <p:nvPr/>
+        </p:nvSpPr>
+        <p:spPr>
+          <a:xfrm>
+            <a:off x="1243584" y="1920240"/>
+            <a:ext cx="4495648" cy="292608"/>
+          </a:xfrm>
+          <a:prstGeom prst="rect">
+            <a:avLst/>
+          </a:prstGeom>
+          <a:noFill/>
+          <a:ln/>
+        </p:spPr>
+        <p:txBody>
+          <a:bodyPr wrap="square" rtlCol="0" anchor="ctr"/>
+          <a:lstStyle/>
+          <a:p>
+            <a:pPr indent="0" marL="0">
+              <a:buNone/>
+            </a:pPr>
+            <a:r>
+              <a:rPr lang="en-US" sz="1250" b="1" dirty="0">
+                <a:solidFill>
+                  <a:srgbClr val="1E2235"/>
+                </a:solidFill>
+                <a:latin typeface="Microsoft JhengHei" pitchFamily="34" charset="0"/>
+                <a:ea typeface="Microsoft JhengHei" pitchFamily="34" charset="-122"/>
+                <a:cs typeface="Microsoft JhengHei" pitchFamily="34" charset="-120"/>
+              </a:rPr>
+              <a:t>建立 OneDrive 資料夾，把四個情境的素材放進去</a:t>
+            </a:r>
+            <a:endParaRPr lang="en-US" sz="1250" dirty="0"/>
+          </a:p>
+        </p:txBody>
+      </p:sp>
+      <p:sp>
+        <p:nvSpPr>
+          <p:cNvPr id="10" name="Text 8"/>
+          <p:cNvSpPr/>
+          <p:nvPr/>
+        </p:nvSpPr>
+        <p:spPr>
+          <a:xfrm>
+            <a:off x="1243584" y="2194560"/>
+            <a:ext cx="4495648" cy="411480"/>
+          </a:xfrm>
+          <a:prstGeom prst="rect">
+            <a:avLst/>
+          </a:prstGeom>
+          <a:noFill/>
+          <a:ln/>
+        </p:spPr>
+        <p:txBody>
+          <a:bodyPr wrap="square" rtlCol="0" anchor="ctr"/>
+          <a:lstStyle/>
+          <a:p>
+            <a:pPr indent="0" marL="0">
+              <a:lnSpc>
+                <a:spcPct val="112000"/>
+              </a:lnSpc>
+              <a:buNone/>
+            </a:pPr>
+            <a:r>
+              <a:rPr lang="en-US" sz="1050" dirty="0">
+                <a:solidFill>
+                  <a:srgbClr val="5B6079"/>
+                </a:solidFill>
+                <a:latin typeface="Microsoft JhengHei" pitchFamily="34" charset="0"/>
+                <a:ea typeface="Microsoft JhengHei" pitchFamily="34" charset="-122"/>
+                <a:cs typeface="Microsoft JhengHei" pitchFamily="34" charset="-120"/>
+              </a:rPr>
+              <a:t>在 OneDrive 建立 文件/Cowork_Lab/製造業進階/，底下再開四個子資料夾：MFGX1_品保…</a:t>
+            </a:r>
+            <a:endParaRPr lang="en-US" sz="1050" dirty="0"/>
+          </a:p>
+        </p:txBody>
+      </p:sp>
+      <p:sp>
+        <p:nvSpPr>
+          <p:cNvPr id="11" name="Shape 9"/>
+          <p:cNvSpPr/>
+          <p:nvPr/>
+        </p:nvSpPr>
+        <p:spPr>
+          <a:xfrm>
+            <a:off x="6278728" y="1874520"/>
+            <a:ext cx="5272888" cy="777240"/>
+          </a:xfrm>
+          <a:prstGeom prst="rect">
+            <a:avLst/>
+          </a:prstGeom>
+          <a:solidFill>
+            <a:srgbClr val="FFFFFF"/>
+          </a:solidFill>
+          <a:ln w="12700">
+            <a:solidFill>
+              <a:srgbClr val="E4E7F2"/>
+            </a:solidFill>
+            <a:prstDash val="solid"/>
+          </a:ln>
+        </p:spPr>
+      </p:sp>
+      <p:sp>
+        <p:nvSpPr>
+          <p:cNvPr id="12" name="Shape 10"/>
+          <p:cNvSpPr/>
+          <p:nvPr/>
+        </p:nvSpPr>
+        <p:spPr>
+          <a:xfrm>
+            <a:off x="6278728" y="1874520"/>
+            <a:ext cx="68580" cy="777240"/>
+          </a:xfrm>
+          <a:prstGeom prst="rect">
+            <a:avLst/>
+          </a:prstGeom>
+          <a:solidFill>
+            <a:srgbClr val="6366F1"/>
+          </a:solidFill>
+          <a:ln/>
+        </p:spPr>
+      </p:sp>
+      <p:sp>
+        <p:nvSpPr>
+          <p:cNvPr id="13" name="Text 11"/>
+          <p:cNvSpPr/>
+          <p:nvPr/>
+        </p:nvSpPr>
+        <p:spPr>
+          <a:xfrm>
+            <a:off x="6443320" y="1929384"/>
+            <a:ext cx="411480" cy="329184"/>
+          </a:xfrm>
+          <a:prstGeom prst="rect">
+            <a:avLst/>
+          </a:prstGeom>
+          <a:noFill/>
+          <a:ln/>
+        </p:spPr>
+        <p:txBody>
+          <a:bodyPr wrap="square" rtlCol="0" anchor="ctr"/>
+          <a:lstStyle/>
+          <a:p>
+            <a:pPr algn="ctr" indent="0" marL="0">
+              <a:buNone/>
+            </a:pPr>
+            <a:r>
+              <a:rPr lang="en-US" sz="1500" dirty="0">
+                <a:solidFill>
+                  <a:srgbClr val="000000"/>
+                </a:solidFill>
+                <a:latin typeface="Microsoft JhengHei" pitchFamily="34" charset="0"/>
+                <a:ea typeface="Microsoft JhengHei" pitchFamily="34" charset="-122"/>
+                <a:cs typeface="Microsoft JhengHei" pitchFamily="34" charset="-120"/>
+              </a:rPr>
+              <a:t>📇</a:t>
+            </a:r>
+            <a:endParaRPr lang="en-US" sz="1500" dirty="0"/>
+          </a:p>
+        </p:txBody>
+      </p:sp>
+      <p:sp>
+        <p:nvSpPr>
+          <p:cNvPr id="14" name="Text 12"/>
+          <p:cNvSpPr/>
+          <p:nvPr/>
+        </p:nvSpPr>
+        <p:spPr>
+          <a:xfrm>
+            <a:off x="6882232" y="1920240"/>
+            <a:ext cx="4495648" cy="292608"/>
+          </a:xfrm>
+          <a:prstGeom prst="rect">
+            <a:avLst/>
+          </a:prstGeom>
+          <a:noFill/>
+          <a:ln/>
+        </p:spPr>
+        <p:txBody>
+          <a:bodyPr wrap="square" rtlCol="0" anchor="ctr"/>
+          <a:lstStyle/>
+          <a:p>
+            <a:pPr indent="0" marL="0">
+              <a:buNone/>
+            </a:pPr>
+            <a:r>
+              <a:rPr lang="en-US" sz="1250" b="1" dirty="0">
+                <a:solidFill>
+                  <a:srgbClr val="1E2235"/>
+                </a:solidFill>
+                <a:latin typeface="Microsoft JhengHei" pitchFamily="34" charset="0"/>
+                <a:ea typeface="Microsoft JhengHei" pitchFamily="34" charset="-122"/>
+                <a:cs typeface="Microsoft JhengHei" pitchFamily="34" charset="-120"/>
+              </a:rPr>
+              <a:t>把聯絡窗口清單放在母層，信件才寄得出去</a:t>
+            </a:r>
+            <a:endParaRPr lang="en-US" sz="1250" dirty="0"/>
+          </a:p>
+        </p:txBody>
+      </p:sp>
+      <p:sp>
+        <p:nvSpPr>
+          <p:cNvPr id="15" name="Text 13"/>
+          <p:cNvSpPr/>
+          <p:nvPr/>
+        </p:nvSpPr>
+        <p:spPr>
+          <a:xfrm>
+            <a:off x="6882232" y="2194560"/>
+            <a:ext cx="4495648" cy="411480"/>
+          </a:xfrm>
+          <a:prstGeom prst="rect">
+            <a:avLst/>
+          </a:prstGeom>
+          <a:noFill/>
+          <a:ln/>
+        </p:spPr>
+        <p:txBody>
+          <a:bodyPr wrap="square" rtlCol="0" anchor="ctr"/>
+          <a:lstStyle/>
+          <a:p>
+            <a:pPr indent="0" marL="0">
+              <a:lnSpc>
+                <a:spcPct val="112000"/>
+              </a:lnSpc>
+              <a:buNone/>
+            </a:pPr>
+            <a:r>
+              <a:rPr lang="en-US" sz="1050" dirty="0">
+                <a:solidFill>
+                  <a:srgbClr val="5B6079"/>
+                </a:solidFill>
+                <a:latin typeface="Microsoft JhengHei" pitchFamily="34" charset="0"/>
+                <a:ea typeface="Microsoft JhengHei" pitchFamily="34" charset="-122"/>
+                <a:cs typeface="Microsoft JhengHei" pitchFamily="34" charset="-120"/>
+              </a:rPr>
+              <a:t>聯絡窗口清單.md 要放在 製造業進階 母資料夾，不要放進任何子資料夾 —— 放母層 Cowork 比較容易撈到。</a:t>
+            </a:r>
+            <a:endParaRPr lang="en-US" sz="1050" dirty="0"/>
+          </a:p>
+        </p:txBody>
+      </p:sp>
+      <p:sp>
+        <p:nvSpPr>
+          <p:cNvPr id="16" name="Shape 14"/>
+          <p:cNvSpPr/>
+          <p:nvPr/>
+        </p:nvSpPr>
+        <p:spPr>
+          <a:xfrm>
+            <a:off x="640080" y="2779776"/>
+            <a:ext cx="5272888" cy="777240"/>
+          </a:xfrm>
+          <a:prstGeom prst="rect">
+            <a:avLst/>
+          </a:prstGeom>
+          <a:solidFill>
+            <a:srgbClr val="FFFFFF"/>
+          </a:solidFill>
+          <a:ln w="12700">
+            <a:solidFill>
+              <a:srgbClr val="E4E7F2"/>
+            </a:solidFill>
+            <a:prstDash val="solid"/>
+          </a:ln>
+        </p:spPr>
+      </p:sp>
+      <p:sp>
+        <p:nvSpPr>
+          <p:cNvPr id="17" name="Shape 15"/>
+          <p:cNvSpPr/>
+          <p:nvPr/>
+        </p:nvSpPr>
+        <p:spPr>
+          <a:xfrm>
+            <a:off x="640080" y="2779776"/>
+            <a:ext cx="68580" cy="777240"/>
+          </a:xfrm>
+          <a:prstGeom prst="rect">
+            <a:avLst/>
+          </a:prstGeom>
+          <a:solidFill>
+            <a:srgbClr val="6366F1"/>
+          </a:solidFill>
+          <a:ln/>
+        </p:spPr>
+      </p:sp>
+      <p:sp>
+        <p:nvSpPr>
+          <p:cNvPr id="18" name="Text 16"/>
+          <p:cNvSpPr/>
+          <p:nvPr/>
+        </p:nvSpPr>
+        <p:spPr>
+          <a:xfrm>
+            <a:off x="804672" y="2834640"/>
+            <a:ext cx="411480" cy="329184"/>
+          </a:xfrm>
+          <a:prstGeom prst="rect">
+            <a:avLst/>
+          </a:prstGeom>
+          <a:noFill/>
+          <a:ln/>
+        </p:spPr>
+        <p:txBody>
+          <a:bodyPr wrap="square" rtlCol="0" anchor="ctr"/>
+          <a:lstStyle/>
+          <a:p>
+            <a:pPr algn="ctr" indent="0" marL="0">
+              <a:buNone/>
+            </a:pPr>
+            <a:r>
+              <a:rPr lang="en-US" sz="1500" dirty="0">
+                <a:solidFill>
+                  <a:srgbClr val="000000"/>
+                </a:solidFill>
+                <a:latin typeface="Microsoft JhengHei" pitchFamily="34" charset="0"/>
+                <a:ea typeface="Microsoft JhengHei" pitchFamily="34" charset="-122"/>
+                <a:cs typeface="Microsoft JhengHei" pitchFamily="34" charset="-120"/>
+              </a:rPr>
+              <a:t>📧</a:t>
+            </a:r>
+            <a:endParaRPr lang="en-US" sz="1500" dirty="0"/>
+          </a:p>
+        </p:txBody>
+      </p:sp>
+      <p:sp>
+        <p:nvSpPr>
+          <p:cNvPr id="19" name="Text 17"/>
+          <p:cNvSpPr/>
+          <p:nvPr/>
+        </p:nvSpPr>
+        <p:spPr>
+          <a:xfrm>
+            <a:off x="1243584" y="2825496"/>
+            <a:ext cx="4495648" cy="292608"/>
+          </a:xfrm>
+          <a:prstGeom prst="rect">
+            <a:avLst/>
+          </a:prstGeom>
+          <a:noFill/>
+          <a:ln/>
+        </p:spPr>
+        <p:txBody>
+          <a:bodyPr wrap="square" rtlCol="0" anchor="ctr"/>
+          <a:lstStyle/>
+          <a:p>
+            <a:pPr indent="0" marL="0">
+              <a:buNone/>
+            </a:pPr>
+            <a:r>
+              <a:rPr lang="en-US" sz="1250" b="1" dirty="0">
+                <a:solidFill>
+                  <a:srgbClr val="1E2235"/>
+                </a:solidFill>
+                <a:latin typeface="Microsoft JhengHei" pitchFamily="34" charset="0"/>
+                <a:ea typeface="Microsoft JhengHei" pitchFamily="34" charset="-122"/>
+                <a:cs typeface="Microsoft JhengHei" pitchFamily="34" charset="-120"/>
+              </a:rPr>
+              <a:t>寄三封 MFGX1 的供應商來信給自己（觸發信先不要寄）</a:t>
+            </a:r>
+            <a:endParaRPr lang="en-US" sz="1250" dirty="0"/>
+          </a:p>
+        </p:txBody>
+      </p:sp>
+      <p:sp>
+        <p:nvSpPr>
+          <p:cNvPr id="20" name="Text 18"/>
+          <p:cNvSpPr/>
+          <p:nvPr/>
+        </p:nvSpPr>
+        <p:spPr>
+          <a:xfrm>
+            <a:off x="1243584" y="3099816"/>
+            <a:ext cx="4495648" cy="411480"/>
+          </a:xfrm>
+          <a:prstGeom prst="rect">
+            <a:avLst/>
+          </a:prstGeom>
+          <a:noFill/>
+          <a:ln/>
+        </p:spPr>
+        <p:txBody>
+          <a:bodyPr wrap="square" rtlCol="0" anchor="ctr"/>
+          <a:lstStyle/>
+          <a:p>
+            <a:pPr indent="0" marL="0">
+              <a:lnSpc>
+                <a:spcPct val="112000"/>
+              </a:lnSpc>
+              <a:buNone/>
+            </a:pPr>
+            <a:r>
+              <a:rPr lang="en-US" sz="1050" dirty="0">
+                <a:solidFill>
+                  <a:srgbClr val="5B6079"/>
+                </a:solidFill>
+                <a:latin typeface="Microsoft JhengHei" pitchFamily="34" charset="0"/>
+                <a:ea typeface="Microsoft JhengHei" pitchFamily="34" charset="-122"/>
+                <a:cs typeface="Microsoft JhengHei" pitchFamily="34" charset="-120"/>
+              </a:rPr>
+              <a:t>照 信箱_種入用/ 三封 MFGX1 來信的主旨與內文，用你自己的帳號分別寄給自己。</a:t>
+            </a:r>
+            <a:endParaRPr lang="en-US" sz="1050" dirty="0"/>
+          </a:p>
+        </p:txBody>
+      </p:sp>
+      <p:sp>
+        <p:nvSpPr>
+          <p:cNvPr id="21" name="Shape 19"/>
+          <p:cNvSpPr/>
+          <p:nvPr/>
+        </p:nvSpPr>
+        <p:spPr>
+          <a:xfrm>
+            <a:off x="6278728" y="2779776"/>
+            <a:ext cx="5272888" cy="777240"/>
+          </a:xfrm>
+          <a:prstGeom prst="rect">
+            <a:avLst/>
+          </a:prstGeom>
+          <a:solidFill>
+            <a:srgbClr val="FFFFFF"/>
+          </a:solidFill>
+          <a:ln w="12700">
+            <a:solidFill>
+              <a:srgbClr val="E4E7F2"/>
+            </a:solidFill>
+            <a:prstDash val="solid"/>
+          </a:ln>
+        </p:spPr>
+      </p:sp>
+      <p:sp>
+        <p:nvSpPr>
+          <p:cNvPr id="22" name="Shape 20"/>
+          <p:cNvSpPr/>
+          <p:nvPr/>
+        </p:nvSpPr>
+        <p:spPr>
+          <a:xfrm>
+            <a:off x="6278728" y="2779776"/>
+            <a:ext cx="68580" cy="777240"/>
+          </a:xfrm>
+          <a:prstGeom prst="rect">
+            <a:avLst/>
+          </a:prstGeom>
+          <a:solidFill>
+            <a:srgbClr val="6366F1"/>
+          </a:solidFill>
+          <a:ln/>
+        </p:spPr>
+      </p:sp>
+      <p:sp>
+        <p:nvSpPr>
+          <p:cNvPr id="23" name="Text 21"/>
+          <p:cNvSpPr/>
+          <p:nvPr/>
+        </p:nvSpPr>
+        <p:spPr>
+          <a:xfrm>
+            <a:off x="6443320" y="2834640"/>
+            <a:ext cx="411480" cy="329184"/>
+          </a:xfrm>
+          <a:prstGeom prst="rect">
+            <a:avLst/>
+          </a:prstGeom>
+          <a:noFill/>
+          <a:ln/>
+        </p:spPr>
+        <p:txBody>
+          <a:bodyPr wrap="square" rtlCol="0" anchor="ctr"/>
+          <a:lstStyle/>
+          <a:p>
+            <a:pPr algn="ctr" indent="0" marL="0">
+              <a:buNone/>
+            </a:pPr>
+            <a:r>
+              <a:rPr lang="en-US" sz="1500" dirty="0">
+                <a:solidFill>
+                  <a:srgbClr val="000000"/>
+                </a:solidFill>
+                <a:latin typeface="Microsoft JhengHei" pitchFamily="34" charset="0"/>
+                <a:ea typeface="Microsoft JhengHei" pitchFamily="34" charset="-122"/>
+                <a:cs typeface="Microsoft JhengHei" pitchFamily="34" charset="-120"/>
+              </a:rPr>
+              <a:t>💬</a:t>
+            </a:r>
+            <a:endParaRPr lang="en-US" sz="1500" dirty="0"/>
+          </a:p>
+        </p:txBody>
+      </p:sp>
+      <p:sp>
+        <p:nvSpPr>
+          <p:cNvPr id="24" name="Text 22"/>
+          <p:cNvSpPr/>
+          <p:nvPr/>
+        </p:nvSpPr>
+        <p:spPr>
+          <a:xfrm>
+            <a:off x="6882232" y="2825496"/>
+            <a:ext cx="4495648" cy="292608"/>
+          </a:xfrm>
+          <a:prstGeom prst="rect">
+            <a:avLst/>
+          </a:prstGeom>
+          <a:noFill/>
+          <a:ln/>
+        </p:spPr>
+        <p:txBody>
+          <a:bodyPr wrap="square" rtlCol="0" anchor="ctr"/>
+          <a:lstStyle/>
+          <a:p>
+            <a:pPr indent="0" marL="0">
+              <a:buNone/>
+            </a:pPr>
+            <a:r>
+              <a:rPr lang="en-US" sz="1250" b="1" dirty="0">
+                <a:solidFill>
+                  <a:srgbClr val="1E2235"/>
+                </a:solidFill>
+                <a:latin typeface="Microsoft JhengHei" pitchFamily="34" charset="0"/>
+                <a:ea typeface="Microsoft JhengHei" pitchFamily="34" charset="-122"/>
+                <a:cs typeface="Microsoft JhengHei" pitchFamily="34" charset="-120"/>
+              </a:rPr>
+              <a:t>建一個 Teams 頻道當作生產群組</a:t>
+            </a:r>
+            <a:endParaRPr lang="en-US" sz="1250" dirty="0"/>
+          </a:p>
+        </p:txBody>
+      </p:sp>
+      <p:sp>
+        <p:nvSpPr>
+          <p:cNvPr id="25" name="Text 23"/>
+          <p:cNvSpPr/>
+          <p:nvPr/>
+        </p:nvSpPr>
+        <p:spPr>
+          <a:xfrm>
+            <a:off x="6882232" y="3099816"/>
+            <a:ext cx="4495648" cy="411480"/>
+          </a:xfrm>
+          <a:prstGeom prst="rect">
+            <a:avLst/>
+          </a:prstGeom>
+          <a:noFill/>
+          <a:ln/>
+        </p:spPr>
+        <p:txBody>
+          <a:bodyPr wrap="square" rtlCol="0" anchor="ctr"/>
+          <a:lstStyle/>
+          <a:p>
+            <a:pPr indent="0" marL="0">
+              <a:lnSpc>
+                <a:spcPct val="112000"/>
+              </a:lnSpc>
+              <a:buNone/>
+            </a:pPr>
+            <a:r>
+              <a:rPr lang="en-US" sz="1050" dirty="0">
+                <a:solidFill>
+                  <a:srgbClr val="5B6079"/>
+                </a:solidFill>
+                <a:latin typeface="Microsoft JhengHei" pitchFamily="34" charset="0"/>
+                <a:ea typeface="Microsoft JhengHei" pitchFamily="34" charset="-122"/>
+                <a:cs typeface="Microsoft JhengHei" pitchFamily="34" charset="-120"/>
+              </a:rPr>
+              <a:t>MFGX1 會把 CAR 摘要貼到品保頻道、MFGX2 的通報也會貼到同一處…</a:t>
+            </a:r>
+            <a:endParaRPr lang="en-US" sz="1050" dirty="0"/>
+          </a:p>
+        </p:txBody>
+      </p:sp>
+      <p:sp>
+        <p:nvSpPr>
+          <p:cNvPr id="26" name="Shape 24"/>
+          <p:cNvSpPr/>
+          <p:nvPr/>
+        </p:nvSpPr>
+        <p:spPr>
+          <a:xfrm>
+            <a:off x="640080" y="3685032"/>
+            <a:ext cx="5272888" cy="777240"/>
+          </a:xfrm>
+          <a:prstGeom prst="rect">
+            <a:avLst/>
+          </a:prstGeom>
+          <a:solidFill>
+            <a:srgbClr val="FFFFFF"/>
+          </a:solidFill>
+          <a:ln w="12700">
+            <a:solidFill>
+              <a:srgbClr val="E4E7F2"/>
+            </a:solidFill>
+            <a:prstDash val="solid"/>
+          </a:ln>
+        </p:spPr>
+      </p:sp>
+      <p:sp>
+        <p:nvSpPr>
+          <p:cNvPr id="27" name="Shape 25"/>
+          <p:cNvSpPr/>
+          <p:nvPr/>
+        </p:nvSpPr>
+        <p:spPr>
+          <a:xfrm>
+            <a:off x="640080" y="3685032"/>
+            <a:ext cx="68580" cy="777240"/>
+          </a:xfrm>
+          <a:prstGeom prst="rect">
+            <a:avLst/>
+          </a:prstGeom>
+          <a:solidFill>
+            <a:srgbClr val="6366F1"/>
+          </a:solidFill>
+          <a:ln/>
+        </p:spPr>
+      </p:sp>
+      <p:sp>
+        <p:nvSpPr>
+          <p:cNvPr id="28" name="Text 26"/>
+          <p:cNvSpPr/>
+          <p:nvPr/>
+        </p:nvSpPr>
+        <p:spPr>
+          <a:xfrm>
+            <a:off x="804672" y="3739896"/>
+            <a:ext cx="411480" cy="329184"/>
+          </a:xfrm>
+          <a:prstGeom prst="rect">
+            <a:avLst/>
+          </a:prstGeom>
+          <a:noFill/>
+          <a:ln/>
+        </p:spPr>
+        <p:txBody>
+          <a:bodyPr wrap="square" rtlCol="0" anchor="ctr"/>
+          <a:lstStyle/>
+          <a:p>
+            <a:pPr algn="ctr" indent="0" marL="0">
+              <a:buNone/>
+            </a:pPr>
+            <a:r>
+              <a:rPr lang="en-US" sz="1500" dirty="0">
+                <a:solidFill>
+                  <a:srgbClr val="000000"/>
+                </a:solidFill>
+                <a:latin typeface="Microsoft JhengHei" pitchFamily="34" charset="0"/>
+                <a:ea typeface="Microsoft JhengHei" pitchFamily="34" charset="-122"/>
+                <a:cs typeface="Microsoft JhengHei" pitchFamily="34" charset="-120"/>
+              </a:rPr>
+              <a:t>📅</a:t>
+            </a:r>
+            <a:endParaRPr lang="en-US" sz="1500" dirty="0"/>
+          </a:p>
+        </p:txBody>
+      </p:sp>
+      <p:sp>
+        <p:nvSpPr>
+          <p:cNvPr id="29" name="Text 27"/>
+          <p:cNvSpPr/>
+          <p:nvPr/>
+        </p:nvSpPr>
+        <p:spPr>
+          <a:xfrm>
+            <a:off x="1243584" y="3730752"/>
+            <a:ext cx="4495648" cy="292608"/>
+          </a:xfrm>
+          <a:prstGeom prst="rect">
+            <a:avLst/>
+          </a:prstGeom>
+          <a:noFill/>
+          <a:ln/>
+        </p:spPr>
+        <p:txBody>
+          <a:bodyPr wrap="square" rtlCol="0" anchor="ctr"/>
+          <a:lstStyle/>
+          <a:p>
+            <a:pPr indent="0" marL="0">
+              <a:buNone/>
+            </a:pPr>
+            <a:r>
+              <a:rPr lang="en-US" sz="1250" b="1" dirty="0">
+                <a:solidFill>
+                  <a:srgbClr val="1E2235"/>
+                </a:solidFill>
+                <a:latin typeface="Microsoft JhengHei" pitchFamily="34" charset="0"/>
+                <a:ea typeface="Microsoft JhengHei" pitchFamily="34" charset="-122"/>
+                <a:cs typeface="Microsoft JhengHei" pitchFamily="34" charset="-120"/>
+              </a:rPr>
+              <a:t>行事曆放兩三個今天的會議</a:t>
+            </a:r>
+            <a:endParaRPr lang="en-US" sz="1250" dirty="0"/>
+          </a:p>
+        </p:txBody>
+      </p:sp>
+      <p:sp>
+        <p:nvSpPr>
+          <p:cNvPr id="30" name="Text 28"/>
+          <p:cNvSpPr/>
+          <p:nvPr/>
+        </p:nvSpPr>
+        <p:spPr>
+          <a:xfrm>
+            <a:off x="1243584" y="4005072"/>
+            <a:ext cx="4495648" cy="411480"/>
+          </a:xfrm>
+          <a:prstGeom prst="rect">
+            <a:avLst/>
+          </a:prstGeom>
+          <a:noFill/>
+          <a:ln/>
+        </p:spPr>
+        <p:txBody>
+          <a:bodyPr wrap="square" rtlCol="0" anchor="ctr"/>
+          <a:lstStyle/>
+          <a:p>
+            <a:pPr indent="0" marL="0">
+              <a:lnSpc>
+                <a:spcPct val="112000"/>
+              </a:lnSpc>
+              <a:buNone/>
+            </a:pPr>
+            <a:r>
+              <a:rPr lang="en-US" sz="1050" dirty="0">
+                <a:solidFill>
+                  <a:srgbClr val="5B6079"/>
+                </a:solidFill>
+                <a:latin typeface="Microsoft JhengHei" pitchFamily="34" charset="0"/>
+                <a:ea typeface="Microsoft JhengHei" pitchFamily="34" charset="-122"/>
+                <a:cs typeface="Microsoft JhengHei" pitchFamily="34" charset="-120"/>
+              </a:rPr>
+              <a:t>MFGX3 晨報的第 3 段會去撈你今天的行事曆，所以放 2–3 個今天的會議（例如生產晨會…</a:t>
+            </a:r>
+            <a:endParaRPr lang="en-US" sz="1050" dirty="0"/>
+          </a:p>
+        </p:txBody>
+      </p:sp>
+      <p:sp>
+        <p:nvSpPr>
+          <p:cNvPr id="31" name="Shape 29"/>
+          <p:cNvSpPr/>
+          <p:nvPr/>
+        </p:nvSpPr>
+        <p:spPr>
+          <a:xfrm>
+            <a:off x="6278728" y="3685032"/>
+            <a:ext cx="5272888" cy="777240"/>
+          </a:xfrm>
+          <a:prstGeom prst="rect">
+            <a:avLst/>
+          </a:prstGeom>
+          <a:solidFill>
+            <a:srgbClr val="FFFFFF"/>
+          </a:solidFill>
+          <a:ln w="12700">
+            <a:solidFill>
+              <a:srgbClr val="E4E7F2"/>
+            </a:solidFill>
+            <a:prstDash val="solid"/>
+          </a:ln>
+        </p:spPr>
+      </p:sp>
+      <p:sp>
+        <p:nvSpPr>
+          <p:cNvPr id="32" name="Shape 30"/>
+          <p:cNvSpPr/>
+          <p:nvPr/>
+        </p:nvSpPr>
+        <p:spPr>
+          <a:xfrm>
+            <a:off x="6278728" y="3685032"/>
+            <a:ext cx="68580" cy="777240"/>
+          </a:xfrm>
+          <a:prstGeom prst="rect">
+            <a:avLst/>
+          </a:prstGeom>
+          <a:solidFill>
+            <a:srgbClr val="6366F1"/>
+          </a:solidFill>
+          <a:ln/>
+        </p:spPr>
+      </p:sp>
+      <p:sp>
+        <p:nvSpPr>
+          <p:cNvPr id="33" name="Text 31"/>
+          <p:cNvSpPr/>
+          <p:nvPr/>
+        </p:nvSpPr>
+        <p:spPr>
+          <a:xfrm>
+            <a:off x="6443320" y="3739896"/>
+            <a:ext cx="411480" cy="329184"/>
+          </a:xfrm>
+          <a:prstGeom prst="rect">
+            <a:avLst/>
+          </a:prstGeom>
+          <a:noFill/>
+          <a:ln/>
+        </p:spPr>
+        <p:txBody>
+          <a:bodyPr wrap="square" rtlCol="0" anchor="ctr"/>
+          <a:lstStyle/>
+          <a:p>
+            <a:pPr algn="ctr" indent="0" marL="0">
+              <a:buNone/>
+            </a:pPr>
+            <a:r>
+              <a:rPr lang="en-US" sz="1500" dirty="0">
+                <a:solidFill>
+                  <a:srgbClr val="000000"/>
+                </a:solidFill>
+                <a:latin typeface="Microsoft JhengHei" pitchFamily="34" charset="0"/>
+                <a:ea typeface="Microsoft JhengHei" pitchFamily="34" charset="-122"/>
+                <a:cs typeface="Microsoft JhengHei" pitchFamily="34" charset="-120"/>
+              </a:rPr>
+              <a:t>🧩</a:t>
+            </a:r>
+            <a:endParaRPr lang="en-US" sz="1500" dirty="0"/>
+          </a:p>
+        </p:txBody>
+      </p:sp>
+      <p:sp>
+        <p:nvSpPr>
+          <p:cNvPr id="34" name="Text 32"/>
+          <p:cNvSpPr/>
+          <p:nvPr/>
+        </p:nvSpPr>
+        <p:spPr>
+          <a:xfrm>
+            <a:off x="6882232" y="3730752"/>
+            <a:ext cx="4495648" cy="292608"/>
+          </a:xfrm>
+          <a:prstGeom prst="rect">
+            <a:avLst/>
+          </a:prstGeom>
+          <a:noFill/>
+          <a:ln/>
+        </p:spPr>
+        <p:txBody>
+          <a:bodyPr wrap="square" rtlCol="0" anchor="ctr"/>
+          <a:lstStyle/>
+          <a:p>
+            <a:pPr indent="0" marL="0">
+              <a:buNone/>
+            </a:pPr>
+            <a:r>
+              <a:rPr lang="en-US" sz="1250" b="1" dirty="0">
+                <a:solidFill>
+                  <a:srgbClr val="1E2235"/>
+                </a:solidFill>
+                <a:latin typeface="Microsoft JhengHei" pitchFamily="34" charset="0"/>
+                <a:ea typeface="Microsoft JhengHei" pitchFamily="34" charset="-122"/>
+                <a:cs typeface="Microsoft JhengHei" pitchFamily="34" charset="-120"/>
+              </a:rPr>
+              <a:t>技能資料夾先保持乾淨</a:t>
+            </a:r>
+            <a:endParaRPr lang="en-US" sz="1250" dirty="0"/>
+          </a:p>
+        </p:txBody>
+      </p:sp>
+      <p:sp>
+        <p:nvSpPr>
+          <p:cNvPr id="35" name="Text 33"/>
+          <p:cNvSpPr/>
+          <p:nvPr/>
+        </p:nvSpPr>
+        <p:spPr>
+          <a:xfrm>
+            <a:off x="6882232" y="4005072"/>
+            <a:ext cx="4495648" cy="411480"/>
+          </a:xfrm>
+          <a:prstGeom prst="rect">
+            <a:avLst/>
+          </a:prstGeom>
+          <a:noFill/>
+          <a:ln/>
+        </p:spPr>
+        <p:txBody>
+          <a:bodyPr wrap="square" rtlCol="0" anchor="ctr"/>
+          <a:lstStyle/>
+          <a:p>
+            <a:pPr indent="0" marL="0">
+              <a:lnSpc>
+                <a:spcPct val="112000"/>
+              </a:lnSpc>
+              <a:buNone/>
+            </a:pPr>
+            <a:r>
+              <a:rPr lang="en-US" sz="1050" dirty="0">
+                <a:solidFill>
+                  <a:srgbClr val="5B6079"/>
+                </a:solidFill>
+                <a:latin typeface="Microsoft JhengHei" pitchFamily="34" charset="0"/>
+                <a:ea typeface="Microsoft JhengHei" pitchFamily="34" charset="-122"/>
+                <a:cs typeface="Microsoft JhengHei" pitchFamily="34" charset="-120"/>
+              </a:rPr>
+              <a:t>MFGX5 是現場建立技能的示範，所以不要先把 MFGX5_SKILL.md 放進 文件/Cowork/skil…</a:t>
+            </a:r>
+            <a:endParaRPr lang="en-US" sz="1050" dirty="0"/>
+          </a:p>
+        </p:txBody>
+      </p:sp>
+      <p:sp>
+        <p:nvSpPr>
+          <p:cNvPr id="36" name="Shape 34"/>
+          <p:cNvSpPr/>
+          <p:nvPr/>
+        </p:nvSpPr>
+        <p:spPr>
+          <a:xfrm>
+            <a:off x="640080" y="4590288"/>
+            <a:ext cx="5272888" cy="777240"/>
+          </a:xfrm>
+          <a:prstGeom prst="rect">
+            <a:avLst/>
+          </a:prstGeom>
+          <a:solidFill>
+            <a:srgbClr val="FFFFFF"/>
+          </a:solidFill>
+          <a:ln w="12700">
+            <a:solidFill>
+              <a:srgbClr val="E4E7F2"/>
+            </a:solidFill>
+            <a:prstDash val="solid"/>
+          </a:ln>
+        </p:spPr>
+      </p:sp>
+      <p:sp>
+        <p:nvSpPr>
+          <p:cNvPr id="37" name="Shape 35"/>
+          <p:cNvSpPr/>
+          <p:nvPr/>
+        </p:nvSpPr>
+        <p:spPr>
+          <a:xfrm>
+            <a:off x="640080" y="4590288"/>
+            <a:ext cx="68580" cy="777240"/>
+          </a:xfrm>
+          <a:prstGeom prst="rect">
+            <a:avLst/>
+          </a:prstGeom>
+          <a:solidFill>
+            <a:srgbClr val="6366F1"/>
+          </a:solidFill>
+          <a:ln/>
+        </p:spPr>
+      </p:sp>
+      <p:sp>
+        <p:nvSpPr>
+          <p:cNvPr id="38" name="Text 36"/>
+          <p:cNvSpPr/>
+          <p:nvPr/>
+        </p:nvSpPr>
+        <p:spPr>
+          <a:xfrm>
+            <a:off x="804672" y="4645152"/>
+            <a:ext cx="411480" cy="329184"/>
+          </a:xfrm>
+          <a:prstGeom prst="rect">
+            <a:avLst/>
+          </a:prstGeom>
+          <a:noFill/>
+          <a:ln/>
+        </p:spPr>
+        <p:txBody>
+          <a:bodyPr wrap="square" rtlCol="0" anchor="ctr"/>
+          <a:lstStyle/>
+          <a:p>
+            <a:pPr algn="ctr" indent="0" marL="0">
+              <a:buNone/>
+            </a:pPr>
+            <a:r>
+              <a:rPr lang="en-US" sz="1500" dirty="0">
+                <a:solidFill>
+                  <a:srgbClr val="000000"/>
+                </a:solidFill>
+                <a:latin typeface="Microsoft JhengHei" pitchFamily="34" charset="0"/>
+                <a:ea typeface="Microsoft JhengHei" pitchFamily="34" charset="-122"/>
+                <a:cs typeface="Microsoft JhengHei" pitchFamily="34" charset="-120"/>
+              </a:rPr>
+              <a:t>⏰</a:t>
+            </a:r>
+            <a:endParaRPr lang="en-US" sz="1500" dirty="0"/>
+          </a:p>
+        </p:txBody>
+      </p:sp>
+      <p:sp>
+        <p:nvSpPr>
+          <p:cNvPr id="39" name="Text 37"/>
+          <p:cNvSpPr/>
+          <p:nvPr/>
+        </p:nvSpPr>
+        <p:spPr>
+          <a:xfrm>
+            <a:off x="1243584" y="4636008"/>
+            <a:ext cx="4495648" cy="292608"/>
+          </a:xfrm>
+          <a:prstGeom prst="rect">
+            <a:avLst/>
+          </a:prstGeom>
+          <a:noFill/>
+          <a:ln/>
+        </p:spPr>
+        <p:txBody>
+          <a:bodyPr wrap="square" rtlCol="0" anchor="ctr"/>
+          <a:lstStyle/>
+          <a:p>
+            <a:pPr indent="0" marL="0">
+              <a:buNone/>
+            </a:pPr>
+            <a:r>
+              <a:rPr lang="en-US" sz="1250" b="1" dirty="0">
+                <a:solidFill>
+                  <a:srgbClr val="1E2235"/>
+                </a:solidFill>
+                <a:latin typeface="Microsoft JhengHei" pitchFamily="34" charset="0"/>
+                <a:ea typeface="Microsoft JhengHei" pitchFamily="34" charset="-122"/>
+                <a:cs typeface="Microsoft JhengHei" pitchFamily="34" charset="-120"/>
+              </a:rPr>
+              <a:t>自動化頁面先清乾淨，示範完也要收</a:t>
+            </a:r>
+            <a:endParaRPr lang="en-US" sz="1250" dirty="0"/>
+          </a:p>
+        </p:txBody>
+      </p:sp>
+      <p:sp>
+        <p:nvSpPr>
+          <p:cNvPr id="40" name="Text 38"/>
+          <p:cNvSpPr/>
+          <p:nvPr/>
+        </p:nvSpPr>
+        <p:spPr>
+          <a:xfrm>
+            <a:off x="1243584" y="4910328"/>
+            <a:ext cx="4495648" cy="411480"/>
+          </a:xfrm>
+          <a:prstGeom prst="rect">
+            <a:avLst/>
+          </a:prstGeom>
+          <a:noFill/>
+          <a:ln/>
+        </p:spPr>
+        <p:txBody>
+          <a:bodyPr wrap="square" rtlCol="0" anchor="ctr"/>
+          <a:lstStyle/>
+          <a:p>
+            <a:pPr indent="0" marL="0">
+              <a:lnSpc>
+                <a:spcPct val="112000"/>
+              </a:lnSpc>
+              <a:buNone/>
+            </a:pPr>
+            <a:r>
+              <a:rPr lang="en-US" sz="1050" dirty="0">
+                <a:solidFill>
+                  <a:srgbClr val="5B6079"/>
+                </a:solidFill>
+                <a:latin typeface="Microsoft JhengHei" pitchFamily="34" charset="0"/>
+                <a:ea typeface="Microsoft JhengHei" pitchFamily="34" charset="-122"/>
+                <a:cs typeface="Microsoft JhengHei" pitchFamily="34" charset="-120"/>
+              </a:rPr>
+              <a:t>MFGX2（事件觸發）與 MFGX3（每日 07:30 排程）都會建立自動化任務…</a:t>
+            </a:r>
+            <a:endParaRPr lang="en-US" sz="1050" dirty="0"/>
+          </a:p>
+        </p:txBody>
+      </p:sp>
+      <p:sp>
+        <p:nvSpPr>
+          <p:cNvPr id="41" name="Shape 39"/>
+          <p:cNvSpPr/>
+          <p:nvPr/>
+        </p:nvSpPr>
+        <p:spPr>
+          <a:xfrm>
+            <a:off x="640080" y="5532120"/>
+            <a:ext cx="10911535" cy="749808"/>
+          </a:xfrm>
+          <a:prstGeom prst="rect">
+            <a:avLst/>
+          </a:prstGeom>
+          <a:solidFill>
+            <a:srgbClr val="FFFFFF"/>
+          </a:solidFill>
+          <a:ln w="12700">
+            <a:solidFill>
+              <a:srgbClr val="E4E7F2"/>
+            </a:solidFill>
+            <a:prstDash val="solid"/>
+          </a:ln>
+        </p:spPr>
+      </p:sp>
+      <p:sp>
+        <p:nvSpPr>
+          <p:cNvPr id="42" name="Shape 40"/>
+          <p:cNvSpPr/>
+          <p:nvPr/>
+        </p:nvSpPr>
+        <p:spPr>
+          <a:xfrm>
+            <a:off x="640080" y="5532120"/>
+            <a:ext cx="91440" cy="749808"/>
+          </a:xfrm>
+          <a:prstGeom prst="rect">
+            <a:avLst/>
+          </a:prstGeom>
+          <a:solidFill>
+            <a:srgbClr val="6366F1"/>
+          </a:solidFill>
+          <a:ln/>
+        </p:spPr>
+      </p:sp>
+      <p:sp>
+        <p:nvSpPr>
+          <p:cNvPr id="43" name="Text 41"/>
+          <p:cNvSpPr/>
+          <p:nvPr/>
+        </p:nvSpPr>
+        <p:spPr>
+          <a:xfrm>
+            <a:off x="914400" y="5614416"/>
+            <a:ext cx="1828800" cy="274320"/>
+          </a:xfrm>
+          <a:prstGeom prst="rect">
+            <a:avLst/>
+          </a:prstGeom>
+          <a:noFill/>
+          <a:ln/>
+        </p:spPr>
+        <p:txBody>
+          <a:bodyPr wrap="square" rtlCol="0" anchor="ctr"/>
+          <a:lstStyle/>
+          <a:p>
+            <a:pPr indent="0" marL="0">
+              <a:buNone/>
+            </a:pPr>
+            <a:r>
+              <a:rPr lang="en-US" sz="1200" b="1" dirty="0">
+                <a:solidFill>
+                  <a:srgbClr val="1E2235"/>
+                </a:solidFill>
+                <a:latin typeface="Microsoft JhengHei" pitchFamily="34" charset="0"/>
+                <a:ea typeface="Microsoft JhengHei" pitchFamily="34" charset="-122"/>
+                <a:cs typeface="Microsoft JhengHei" pitchFamily="34" charset="-120"/>
+              </a:rPr>
+              <a:t>開課前最後檢查</a:t>
+            </a:r>
+            <a:endParaRPr lang="en-US" sz="1200" dirty="0"/>
+          </a:p>
+        </p:txBody>
+      </p:sp>
+      <p:pic>
+        <p:nvPicPr>
+          <p:cNvPr id="44" name="Image 0" descr="preencoded.png">    </p:cNvPr>
+          <p:cNvPicPr>
+            <a:picLocks noChangeAspect="1"/>
+          </p:cNvPicPr>
+          <p:nvPr/>
+        </p:nvPicPr>
+        <p:blipFill>
+          <a:blip r:embed="rId1"/>
+          <a:stretch>
+            <a:fillRect/>
+          </a:stretch>
+        </p:blipFill>
+        <p:spPr>
+          <a:xfrm>
+            <a:off x="2743200" y="5641848"/>
+            <a:ext cx="155448" cy="155448"/>
+          </a:xfrm>
+          <a:prstGeom prst="rect">
+            <a:avLst/>
+          </a:prstGeom>
+        </p:spPr>
+      </p:pic>
+      <p:sp>
+        <p:nvSpPr>
+          <p:cNvPr id="45" name="Text 42"/>
+          <p:cNvSpPr/>
+          <p:nvPr/>
+        </p:nvSpPr>
+        <p:spPr>
+          <a:xfrm>
+            <a:off x="2999232" y="5586984"/>
+            <a:ext cx="8259775" cy="237744"/>
+          </a:xfrm>
+          <a:prstGeom prst="rect">
+            <a:avLst/>
+          </a:prstGeom>
+          <a:noFill/>
+          <a:ln/>
+        </p:spPr>
+        <p:txBody>
+          <a:bodyPr wrap="square" rtlCol="0" anchor="ctr"/>
+          <a:lstStyle/>
+          <a:p>
+            <a:pPr indent="0" marL="0">
+              <a:buNone/>
+            </a:pPr>
+            <a:r>
+              <a:rPr lang="en-US" sz="1050" dirty="0">
+                <a:solidFill>
+                  <a:srgbClr val="1E2235"/>
+                </a:solidFill>
+                <a:latin typeface="Microsoft JhengHei" pitchFamily="34" charset="0"/>
+                <a:ea typeface="Microsoft JhengHei" pitchFamily="34" charset="-122"/>
+                <a:cs typeface="Microsoft JhengHei" pitchFamily="34" charset="-120"/>
+              </a:rPr>
+              <a:t>OneDrive 的「製造業進階」底下四個子資料夾都看得到，檔案打得開</a:t>
+            </a:r>
+            <a:endParaRPr lang="en-US" sz="1050" dirty="0"/>
+          </a:p>
+        </p:txBody>
+      </p:sp>
+      <p:pic>
+        <p:nvPicPr>
+          <p:cNvPr id="46" name="Image 1" descr="preencoded.png">    </p:cNvPr>
+          <p:cNvPicPr>
+            <a:picLocks noChangeAspect="1"/>
+          </p:cNvPicPr>
+          <p:nvPr/>
+        </p:nvPicPr>
+        <p:blipFill>
+          <a:blip r:embed="rId2"/>
+          <a:stretch>
+            <a:fillRect/>
+          </a:stretch>
+        </p:blipFill>
+        <p:spPr>
+          <a:xfrm>
+            <a:off x="2743200" y="5852160"/>
+            <a:ext cx="155448" cy="155448"/>
+          </a:xfrm>
+          <a:prstGeom prst="rect">
+            <a:avLst/>
+          </a:prstGeom>
+        </p:spPr>
+      </p:pic>
+      <p:sp>
+        <p:nvSpPr>
+          <p:cNvPr id="47" name="Text 43"/>
+          <p:cNvSpPr/>
+          <p:nvPr/>
+        </p:nvSpPr>
+        <p:spPr>
+          <a:xfrm>
+            <a:off x="2999232" y="5797296"/>
+            <a:ext cx="8259775" cy="237744"/>
+          </a:xfrm>
+          <a:prstGeom prst="rect">
+            <a:avLst/>
+          </a:prstGeom>
+          <a:noFill/>
+          <a:ln/>
+        </p:spPr>
+        <p:txBody>
+          <a:bodyPr wrap="square" rtlCol="0" anchor="ctr"/>
+          <a:lstStyle/>
+          <a:p>
+            <a:pPr indent="0" marL="0">
+              <a:buNone/>
+            </a:pPr>
+            <a:r>
+              <a:rPr lang="en-US" sz="1050" dirty="0">
+                <a:solidFill>
+                  <a:srgbClr val="1E2235"/>
+                </a:solidFill>
+                <a:latin typeface="Microsoft JhengHei" pitchFamily="34" charset="0"/>
+                <a:ea typeface="Microsoft JhengHei" pitchFamily="34" charset="-122"/>
+                <a:cs typeface="Microsoft JhengHei" pitchFamily="34" charset="-120"/>
+              </a:rPr>
+              <a:t>聯絡窗口清單.md 在「製造業進階」母層，不是在子資料夾裡</a:t>
+            </a:r>
+            <a:endParaRPr lang="en-US" sz="1050" dirty="0"/>
+          </a:p>
+        </p:txBody>
+      </p:sp>
+      <p:pic>
+        <p:nvPicPr>
+          <p:cNvPr id="48" name="Image 2" descr="preencoded.png">    </p:cNvPr>
+          <p:cNvPicPr>
+            <a:picLocks noChangeAspect="1"/>
+          </p:cNvPicPr>
+          <p:nvPr/>
+        </p:nvPicPr>
+        <p:blipFill>
+          <a:blip r:embed="rId3"/>
+          <a:stretch>
+            <a:fillRect/>
+          </a:stretch>
+        </p:blipFill>
+        <p:spPr>
+          <a:xfrm>
+            <a:off x="2743200" y="6062472"/>
+            <a:ext cx="155448" cy="155448"/>
+          </a:xfrm>
+          <a:prstGeom prst="rect">
+            <a:avLst/>
+          </a:prstGeom>
+        </p:spPr>
+      </p:pic>
+      <p:sp>
+        <p:nvSpPr>
+          <p:cNvPr id="49" name="Text 44"/>
+          <p:cNvSpPr/>
+          <p:nvPr/>
+        </p:nvSpPr>
+        <p:spPr>
+          <a:xfrm>
+            <a:off x="2999232" y="6007608"/>
+            <a:ext cx="8259775" cy="237744"/>
+          </a:xfrm>
+          <a:prstGeom prst="rect">
+            <a:avLst/>
+          </a:prstGeom>
+          <a:noFill/>
+          <a:ln/>
+        </p:spPr>
+        <p:txBody>
+          <a:bodyPr wrap="square" rtlCol="0" anchor="ctr"/>
+          <a:lstStyle/>
+          <a:p>
+            <a:pPr indent="0" marL="0">
+              <a:buNone/>
+            </a:pPr>
+            <a:r>
+              <a:rPr lang="en-US" sz="1050" dirty="0">
+                <a:solidFill>
+                  <a:srgbClr val="1E2235"/>
+                </a:solidFill>
+                <a:latin typeface="Microsoft JhengHei" pitchFamily="34" charset="0"/>
+                <a:ea typeface="Microsoft JhengHei" pitchFamily="34" charset="-122"/>
+                <a:cs typeface="Microsoft JhengHei" pitchFamily="34" charset="-120"/>
+              </a:rPr>
+              <a:t>MFGX4 的稽核素材保持原樣沒有被整理過（散亂就是考題）</a:t>
+            </a:r>
+            <a:endParaRPr lang="en-US" sz="1050" dirty="0"/>
+          </a:p>
+        </p:txBody>
+      </p:sp>
+      <p:sp>
+        <p:nvSpPr>
+          <p:cNvPr id="50" name="Text 45"/>
+          <p:cNvSpPr/>
+          <p:nvPr/>
+        </p:nvSpPr>
+        <p:spPr>
+          <a:xfrm>
+            <a:off x="640080" y="6473952"/>
+            <a:ext cx="5486400" cy="274320"/>
+          </a:xfrm>
+          <a:prstGeom prst="rect">
+            <a:avLst/>
+          </a:prstGeom>
+          <a:noFill/>
+          <a:ln/>
+        </p:spPr>
+        <p:txBody>
+          <a:bodyPr wrap="square" rtlCol="0" anchor="ctr"/>
+          <a:lstStyle/>
+          <a:p>
+            <a:pPr algn="l" indent="0" marL="0">
+              <a:buNone/>
+            </a:pPr>
+            <a:r>
+              <a:rPr lang="en-US" sz="900" dirty="0">
+                <a:solidFill>
+                  <a:srgbClr val="5B6079"/>
+                </a:solidFill>
+                <a:latin typeface="Microsoft JhengHei" pitchFamily="34" charset="0"/>
+                <a:ea typeface="Microsoft JhengHei" pitchFamily="34" charset="-122"/>
+                <a:cs typeface="Microsoft JhengHei" pitchFamily="34" charset="-120"/>
+              </a:rPr>
+              <a:t>Microsoft 365 Copilot Cowork</a:t>
+            </a:r>
+            <a:endParaRPr lang="en-US" sz="900" dirty="0"/>
+          </a:p>
+        </p:txBody>
+      </p:sp>
+      <p:sp>
+        <p:nvSpPr>
+          <p:cNvPr id="51" name="Text 46"/>
+          <p:cNvSpPr/>
+          <p:nvPr/>
+        </p:nvSpPr>
+        <p:spPr>
+          <a:xfrm>
+            <a:off x="11002975" y="6473952"/>
+            <a:ext cx="548640" cy="274320"/>
+          </a:xfrm>
+          <a:prstGeom prst="rect">
+            <a:avLst/>
+          </a:prstGeom>
+          <a:noFill/>
+          <a:ln/>
+        </p:spPr>
+        <p:txBody>
+          <a:bodyPr wrap="square" rtlCol="0" anchor="ctr"/>
+          <a:lstStyle/>
+          <a:p>
+            <a:pPr algn="r" indent="0" marL="0">
+              <a:buNone/>
+            </a:pPr>
+            <a:r>
+              <a:rPr lang="en-US" sz="900" dirty="0">
+                <a:solidFill>
+                  <a:srgbClr val="5B6079"/>
+                </a:solidFill>
+                <a:latin typeface="Microsoft JhengHei" pitchFamily="34" charset="0"/>
+                <a:ea typeface="Microsoft JhengHei" pitchFamily="34" charset="-122"/>
+                <a:cs typeface="Microsoft JhengHei" pitchFamily="34" charset="-120"/>
+              </a:rPr>
+              <a:t>6</a:t>
+            </a:r>
+            <a:endParaRPr lang="en-US" sz="900" dirty="0"/>
+          </a:p>
+        </p:txBody>
+      </p:sp>
+    </p:spTree>
+  </p:cSld>
+  <p:clrMapOvr>
+    <a:masterClrMapping/>
+  </p:clrMapOvr>
+</p:sld>
+</file>
+
+<file path=ppt/slides/slide8.xml><?xml version="1.0" encoding="utf-8"?>
+<p:sld xmlns:a="http://schemas.openxmlformats.org/drawingml/2006/main" xmlns:r="http://schemas.openxmlformats.org/officeDocument/2006/relationships" xmlns:p="http://schemas.openxmlformats.org/presentationml/2006/main">
+  <p:cSld name="Slide 8">
+    <p:bg>
+      <p:bgPr>
+        <a:solidFill>
+          <a:srgbClr val="F7F8FC"/>
+        </a:solidFill>
+      </p:bgPr>
+    </p:bg>
+    <p:spTree>
+      <p:nvGrpSpPr>
+        <p:cNvPr id="1" name=""/>
+        <p:cNvGrpSpPr/>
+        <p:nvPr/>
+      </p:nvGrpSpPr>
+      <p:grpSpPr>
+        <a:xfrm>
+          <a:off x="0" y="0"/>
+          <a:ext cx="0" cy="0"/>
+          <a:chOff x="0" y="0"/>
+          <a:chExt cx="0" cy="0"/>
+        </a:xfrm>
+      </p:grpSpPr>
+      <p:sp>
+        <p:nvSpPr>
+          <p:cNvPr id="2" name="Shape 0"/>
+          <p:cNvSpPr/>
+          <p:nvPr/>
+        </p:nvSpPr>
+        <p:spPr>
+          <a:xfrm>
+            <a:off x="640080" y="566928"/>
+            <a:ext cx="384048" cy="128016"/>
+          </a:xfrm>
+          <a:prstGeom prst="rect">
+            <a:avLst/>
+          </a:prstGeom>
+          <a:solidFill>
+            <a:srgbClr val="6366F1"/>
+          </a:solidFill>
+          <a:ln/>
+        </p:spPr>
+      </p:sp>
+      <p:sp>
+        <p:nvSpPr>
+          <p:cNvPr id="3" name="Text 1"/>
+          <p:cNvSpPr/>
+          <p:nvPr/>
+        </p:nvSpPr>
+        <p:spPr>
+          <a:xfrm>
+            <a:off x="1143000" y="457200"/>
+            <a:ext cx="8229600" cy="310896"/>
+          </a:xfrm>
+          <a:prstGeom prst="rect">
+            <a:avLst/>
+          </a:prstGeom>
+          <a:noFill/>
+          <a:ln/>
+        </p:spPr>
+        <p:txBody>
+          <a:bodyPr wrap="square" rtlCol="0" anchor="ctr"/>
+          <a:lstStyle/>
+          <a:p>
+            <a:pPr indent="0" marL="0">
+              <a:buNone/>
+            </a:pPr>
+            <a:r>
+              <a:rPr lang="en-US" sz="1200" b="1" spc="200" kern="0" dirty="0">
+                <a:solidFill>
+                  <a:srgbClr val="6366F1"/>
+                </a:solidFill>
+                <a:latin typeface="Microsoft JhengHei" pitchFamily="34" charset="0"/>
+                <a:ea typeface="Microsoft JhengHei" pitchFamily="34" charset="-122"/>
+                <a:cs typeface="Microsoft JhengHei" pitchFamily="34" charset="-120"/>
+              </a:rPr>
               <a:t>5 SCENARIOS</a:t>
             </a:r>
             <a:endParaRPr lang="en-US" sz="1200" dirty="0"/>
@@ -20306,7 +22858,7 @@
                 <a:ea typeface="Microsoft JhengHei" pitchFamily="34" charset="-122"/>
                 <a:cs typeface="Microsoft JhengHei" pitchFamily="34" charset="-120"/>
               </a:rPr>
-              <a:t>6</a:t>
+              <a:t>7</a:t>
             </a:r>
             <a:endParaRPr lang="en-US" sz="900" dirty="0"/>
           </a:p>
@@ -20320,9 +22872,9 @@
 </p:sld>
 </file>
 
-<file path=ppt/slides/slide8.xml><?xml version="1.0" encoding="utf-8"?>
+<file path=ppt/slides/slide9.xml><?xml version="1.0" encoding="utf-8"?>
 <p:sld xmlns:a="http://schemas.openxmlformats.org/drawingml/2006/main" xmlns:r="http://schemas.openxmlformats.org/officeDocument/2006/relationships" xmlns:p="http://schemas.openxmlformats.org/presentationml/2006/main">
-  <p:cSld name="Slide 8">
+  <p:cSld name="Slide 9">
     <p:bg>
       <p:bgPr>
         <a:solidFill>
@@ -21050,7 +23602,7 @@
                 <a:ea typeface="Microsoft JhengHei" pitchFamily="34" charset="-122"/>
                 <a:cs typeface="Microsoft JhengHei" pitchFamily="34" charset="-120"/>
               </a:rPr>
-              <a:t>刻意不要說「附件是檢驗紀錄」，也不要告訴它檔案放在哪個資料夾。</a:t>
+              <a:t>不要上傳任何檔案，也不要指定檔案位置。</a:t>
             </a:r>
             <a:endParaRPr lang="en-US" sz="1300" dirty="0"/>
           </a:p>
@@ -21197,7 +23749,7 @@
                 <a:ea typeface="Microsoft JhengHei" pitchFamily="34" charset="-122"/>
                 <a:cs typeface="Microsoft JhengHei" pitchFamily="34" charset="-120"/>
               </a:rPr>
-              <a:t>實測結果：鴻昇精密同時符合條件 1（單批不良率超過 3%）與條件 2…</a:t>
+              <a:t>不必再下指令。</a:t>
             </a:r>
             <a:endParaRPr lang="en-US" sz="1300" dirty="0"/>
           </a:p>
@@ -21344,7 +23896,7 @@
                 <a:ea typeface="Microsoft JhengHei" pitchFamily="34" charset="-122"/>
                 <a:cs typeface="Microsoft JhengHei" pitchFamily="34" charset="-120"/>
               </a:rPr>
-              <a:t>這一步出現了整個情境**最值得講的一幕**：合約摘要裡沒有寫採購窗口的信箱，通訊錄也查不到那個名字。</a:t>
+              <a:t>第一張核准卡出現時先別急著按。</a:t>
             </a:r>
             <a:endParaRPr lang="en-US" sz="1300" dirty="0"/>
           </a:p>
@@ -21491,7 +24043,7 @@
                 <a:ea typeface="Microsoft JhengHei" pitchFamily="34" charset="-122"/>
                 <a:cs typeface="Microsoft JhengHei" pitchFamily="34" charset="-120"/>
               </a:rPr>
-              <a:t>同一次對話裡換了另一個 App，而且格式跟著換 —— 給採購的是完整 CAR 內容與合約罰則條款…</a:t>
+              <a:t>看第二張核准卡，把它要貼到 Teams 的內容和上一張寄給採購的信擺在一起比較。</a:t>
             </a:r>
             <a:endParaRPr lang="en-US" sz="1300" dirty="0"/>
           </a:p>
@@ -21638,7 +24190,7 @@
                 <a:ea typeface="Microsoft JhengHei" pitchFamily="34" charset="-122"/>
                 <a:cs typeface="Microsoft JhengHei" pitchFamily="34" charset="-120"/>
               </a:rPr>
-              <a:t>第三個 App：行事曆。</a:t>
+              <a:t>看第三張核准卡。</a:t>
             </a:r>
             <a:endParaRPr lang="en-US" sz="1300" dirty="0"/>
           </a:p>
@@ -21785,7 +24337,7 @@
                 <a:ea typeface="Microsoft JhengHei" pitchFamily="34" charset="-122"/>
                 <a:cs typeface="Microsoft JhengHei" pitchFamily="34" charset="-120"/>
               </a:rPr>
-              <a:t>回頭看完整的執行紀錄，把「它究竟做了幾件事」數一遍：撈信、讀三份 OneDrive 文件、判定兩張 CAR…</a:t>
+              <a:t>回頭展開完整的執行紀錄，把它這一趟究竟做了幾件事數一遍。</a:t>
             </a:r>
             <a:endParaRPr lang="en-US" sz="1300" dirty="0"/>
           </a:p>
@@ -21858,677 +24410,6 @@
               <a:rPr lang="en-US" sz="900" dirty="0">
                 <a:solidFill>
                   <a:srgbClr val="8A8FB5"/>
-                </a:solidFill>
-                <a:latin typeface="Microsoft JhengHei" pitchFamily="34" charset="0"/>
-                <a:ea typeface="Microsoft JhengHei" pitchFamily="34" charset="-122"/>
-                <a:cs typeface="Microsoft JhengHei" pitchFamily="34" charset="-120"/>
-              </a:rPr>
-              <a:t>7</a:t>
-            </a:r>
-            <a:endParaRPr lang="en-US" sz="900" dirty="0"/>
-          </a:p>
-        </p:txBody>
-      </p:sp>
-    </p:spTree>
-  </p:cSld>
-  <p:clrMapOvr>
-    <a:masterClrMapping/>
-  </p:clrMapOvr>
-</p:sld>
-</file>
-
-<file path=ppt/slides/slide9.xml><?xml version="1.0" encoding="utf-8"?>
-<p:sld xmlns:a="http://schemas.openxmlformats.org/drawingml/2006/main" xmlns:r="http://schemas.openxmlformats.org/officeDocument/2006/relationships" xmlns:p="http://schemas.openxmlformats.org/presentationml/2006/main">
-  <p:cSld name="Slide 9">
-    <p:bg>
-      <p:bgPr>
-        <a:solidFill>
-          <a:srgbClr val="F7F8FC"/>
-        </a:solidFill>
-      </p:bgPr>
-    </p:bg>
-    <p:spTree>
-      <p:nvGrpSpPr>
-        <p:cNvPr id="1" name=""/>
-        <p:cNvGrpSpPr/>
-        <p:nvPr/>
-      </p:nvGrpSpPr>
-      <p:grpSpPr>
-        <a:xfrm>
-          <a:off x="0" y="0"/>
-          <a:ext cx="0" cy="0"/>
-          <a:chOff x="0" y="0"/>
-          <a:chExt cx="0" cy="0"/>
-        </a:xfrm>
-      </p:grpSpPr>
-      <p:sp>
-        <p:nvSpPr>
-          <p:cNvPr id="2" name="Shape 0"/>
-          <p:cNvSpPr/>
-          <p:nvPr/>
-        </p:nvSpPr>
-        <p:spPr>
-          <a:xfrm>
-            <a:off x="640080" y="566928"/>
-            <a:ext cx="384048" cy="128016"/>
-          </a:xfrm>
-          <a:prstGeom prst="rect">
-            <a:avLst/>
-          </a:prstGeom>
-          <a:solidFill>
-            <a:srgbClr val="B1420A"/>
-          </a:solidFill>
-          <a:ln/>
-        </p:spPr>
-      </p:sp>
-      <p:sp>
-        <p:nvSpPr>
-          <p:cNvPr id="3" name="Text 1"/>
-          <p:cNvSpPr/>
-          <p:nvPr/>
-        </p:nvSpPr>
-        <p:spPr>
-          <a:xfrm>
-            <a:off x="1143000" y="457200"/>
-            <a:ext cx="8229600" cy="310896"/>
-          </a:xfrm>
-          <a:prstGeom prst="rect">
-            <a:avLst/>
-          </a:prstGeom>
-          <a:noFill/>
-          <a:ln/>
-        </p:spPr>
-        <p:txBody>
-          <a:bodyPr wrap="square" rtlCol="0" anchor="ctr"/>
-          <a:lstStyle/>
-          <a:p>
-            <a:pPr indent="0" marL="0">
-              <a:buNone/>
-            </a:pPr>
-            <a:r>
-              <a:rPr lang="en-US" sz="1200" b="1" spc="200" kern="0" dirty="0">
-                <a:solidFill>
-                  <a:srgbClr val="B1420A"/>
-                </a:solidFill>
-                <a:latin typeface="Microsoft JhengHei" pitchFamily="34" charset="0"/>
-                <a:ea typeface="Microsoft JhengHei" pitchFamily="34" charset="-122"/>
-                <a:cs typeface="Microsoft JhengHei" pitchFamily="34" charset="-120"/>
-              </a:rPr>
-              <a:t>情境 01 · 實機示範</a:t>
-            </a:r>
-            <a:endParaRPr lang="en-US" sz="1200" dirty="0"/>
-          </a:p>
-        </p:txBody>
-      </p:sp>
-      <p:sp>
-        <p:nvSpPr>
-          <p:cNvPr id="4" name="Text 2"/>
-          <p:cNvSpPr/>
-          <p:nvPr/>
-        </p:nvSpPr>
-        <p:spPr>
-          <a:xfrm>
-            <a:off x="640080" y="786384"/>
-            <a:ext cx="10972800" cy="640080"/>
-          </a:xfrm>
-          <a:prstGeom prst="rect">
-            <a:avLst/>
-          </a:prstGeom>
-          <a:noFill/>
-          <a:ln/>
-        </p:spPr>
-        <p:txBody>
-          <a:bodyPr wrap="square" rtlCol="0" anchor="ctr"/>
-          <a:lstStyle/>
-          <a:p>
-            <a:pPr indent="0" marL="0">
-              <a:buNone/>
-            </a:pPr>
-            <a:r>
-              <a:rPr lang="en-US" sz="3000" b="1" dirty="0">
-                <a:solidFill>
-                  <a:srgbClr val="1E2235"/>
-                </a:solidFill>
-                <a:latin typeface="Microsoft JhengHei" pitchFamily="34" charset="0"/>
-                <a:ea typeface="Microsoft JhengHei" pitchFamily="34" charset="-122"/>
-                <a:cs typeface="Microsoft JhengHei" pitchFamily="34" charset="-120"/>
-              </a:rPr>
-              <a:t>看 Cowork 怎麼做、產出什麼</a:t>
-            </a:r>
-            <a:endParaRPr lang="en-US" sz="3000" dirty="0"/>
-          </a:p>
-        </p:txBody>
-      </p:sp>
-      <p:sp>
-        <p:nvSpPr>
-          <p:cNvPr id="5" name="Shape 3"/>
-          <p:cNvSpPr/>
-          <p:nvPr/>
-        </p:nvSpPr>
-        <p:spPr>
-          <a:xfrm>
-            <a:off x="585216" y="1773936"/>
-            <a:ext cx="5184648" cy="3433186"/>
-          </a:xfrm>
-          <a:prstGeom prst="rect">
-            <a:avLst/>
-          </a:prstGeom>
-          <a:solidFill>
-            <a:srgbClr val="FFFFFF"/>
-          </a:solidFill>
-          <a:ln w="12700">
-            <a:solidFill>
-              <a:srgbClr val="E4E7F2"/>
-            </a:solidFill>
-            <a:prstDash val="solid"/>
-          </a:ln>
-          <a:effectLst>
-            <a:outerShdw sx="100000" sy="100000" kx="0" ky="0" algn="bl" rotWithShape="0" blurRad="114300" dist="38100" dir="5400000">
-              <a:srgbClr val="8A90B5">
-                <a:alpha val="22000"/>
-              </a:srgbClr>
-            </a:outerShdw>
-          </a:effectLst>
-        </p:spPr>
-      </p:sp>
-      <p:pic>
-        <p:nvPicPr>
-          <p:cNvPr id="6" name="Image 0" descr="C:\temp\CoworkLab\v2\_working\screenshots\mfgx1_01_input.png">    </p:cNvPr>
-          <p:cNvPicPr>
-            <a:picLocks noChangeAspect="1"/>
-          </p:cNvPicPr>
-          <p:nvPr/>
-        </p:nvPicPr>
-        <p:blipFill>
-          <a:blip r:embed="rId1"/>
-          <a:stretch>
-            <a:fillRect/>
-          </a:stretch>
-        </p:blipFill>
-        <p:spPr>
-          <a:xfrm>
-            <a:off x="640080" y="1828800"/>
-            <a:ext cx="5074920" cy="3323458"/>
-          </a:xfrm>
-          <a:prstGeom prst="rect">
-            <a:avLst/>
-          </a:prstGeom>
-        </p:spPr>
-      </p:pic>
-      <p:sp>
-        <p:nvSpPr>
-          <p:cNvPr id="7" name="Text 4"/>
-          <p:cNvSpPr/>
-          <p:nvPr/>
-        </p:nvSpPr>
-        <p:spPr>
-          <a:xfrm>
-            <a:off x="640080" y="5261986"/>
-            <a:ext cx="5074920" cy="320040"/>
-          </a:xfrm>
-          <a:prstGeom prst="rect">
-            <a:avLst/>
-          </a:prstGeom>
-          <a:noFill/>
-          <a:ln/>
-        </p:spPr>
-        <p:txBody>
-          <a:bodyPr wrap="square" rtlCol="0" anchor="ctr"/>
-          <a:lstStyle/>
-          <a:p>
-            <a:pPr algn="ctr" indent="0" marL="0">
-              <a:buNone/>
-            </a:pPr>
-            <a:r>
-              <a:rPr lang="en-US" sz="1350" b="1" dirty="0">
-                <a:solidFill>
-                  <a:srgbClr val="B1420A"/>
-                </a:solidFill>
-                <a:latin typeface="Microsoft JhengHei" pitchFamily="34" charset="0"/>
-                <a:ea typeface="Microsoft JhengHei" pitchFamily="34" charset="-122"/>
-                <a:cs typeface="Microsoft JhengHei" pitchFamily="34" charset="-120"/>
-              </a:rPr>
-              <a:t>① 你的輸入與指令</a:t>
-            </a:r>
-            <a:endParaRPr lang="en-US" sz="1350" dirty="0"/>
-          </a:p>
-        </p:txBody>
-      </p:sp>
-      <p:sp>
-        <p:nvSpPr>
-          <p:cNvPr id="8" name="Shape 5"/>
-          <p:cNvSpPr/>
-          <p:nvPr/>
-        </p:nvSpPr>
-        <p:spPr>
-          <a:xfrm>
-            <a:off x="6163056" y="1773936"/>
-            <a:ext cx="5184648" cy="3433186"/>
-          </a:xfrm>
-          <a:prstGeom prst="rect">
-            <a:avLst/>
-          </a:prstGeom>
-          <a:solidFill>
-            <a:srgbClr val="FFFFFF"/>
-          </a:solidFill>
-          <a:ln w="12700">
-            <a:solidFill>
-              <a:srgbClr val="E4E7F2"/>
-            </a:solidFill>
-            <a:prstDash val="solid"/>
-          </a:ln>
-          <a:effectLst>
-            <a:outerShdw sx="100000" sy="100000" kx="0" ky="0" algn="bl" rotWithShape="0" blurRad="114300" dist="38100" dir="5400000">
-              <a:srgbClr val="8A90B5">
-                <a:alpha val="22000"/>
-              </a:srgbClr>
-            </a:outerShdw>
-          </a:effectLst>
-        </p:spPr>
-      </p:sp>
-      <p:pic>
-        <p:nvPicPr>
-          <p:cNvPr id="9" name="Image 1" descr="C:\temp\CoworkLab\v2\_working\screenshots\mfgx1_06_done.png">    </p:cNvPr>
-          <p:cNvPicPr>
-            <a:picLocks noChangeAspect="1"/>
-          </p:cNvPicPr>
-          <p:nvPr/>
-        </p:nvPicPr>
-        <p:blipFill>
-          <a:blip r:embed="rId2"/>
-          <a:stretch>
-            <a:fillRect/>
-          </a:stretch>
-        </p:blipFill>
-        <p:spPr>
-          <a:xfrm>
-            <a:off x="6217920" y="1828800"/>
-            <a:ext cx="5074920" cy="3323458"/>
-          </a:xfrm>
-          <a:prstGeom prst="rect">
-            <a:avLst/>
-          </a:prstGeom>
-        </p:spPr>
-      </p:pic>
-      <p:sp>
-        <p:nvSpPr>
-          <p:cNvPr id="10" name="Text 6"/>
-          <p:cNvSpPr/>
-          <p:nvPr/>
-        </p:nvSpPr>
-        <p:spPr>
-          <a:xfrm>
-            <a:off x="6217920" y="5261986"/>
-            <a:ext cx="5074920" cy="320040"/>
-          </a:xfrm>
-          <a:prstGeom prst="rect">
-            <a:avLst/>
-          </a:prstGeom>
-          <a:noFill/>
-          <a:ln/>
-        </p:spPr>
-        <p:txBody>
-          <a:bodyPr wrap="square" rtlCol="0" anchor="ctr"/>
-          <a:lstStyle/>
-          <a:p>
-            <a:pPr algn="ctr" indent="0" marL="0">
-              <a:buNone/>
-            </a:pPr>
-            <a:r>
-              <a:rPr lang="en-US" sz="1350" b="1" dirty="0">
-                <a:solidFill>
-                  <a:srgbClr val="B1420A"/>
-                </a:solidFill>
-                <a:latin typeface="Microsoft JhengHei" pitchFamily="34" charset="0"/>
-                <a:ea typeface="Microsoft JhengHei" pitchFamily="34" charset="-122"/>
-                <a:cs typeface="Microsoft JhengHei" pitchFamily="34" charset="-120"/>
-              </a:rPr>
-              <a:t>② 產出成果</a:t>
-            </a:r>
-            <a:endParaRPr lang="en-US" sz="1350" dirty="0"/>
-          </a:p>
-        </p:txBody>
-      </p:sp>
-      <p:sp>
-        <p:nvSpPr>
-          <p:cNvPr id="11" name="Shape 7"/>
-          <p:cNvSpPr/>
-          <p:nvPr/>
-        </p:nvSpPr>
-        <p:spPr>
-          <a:xfrm>
-            <a:off x="640080" y="5074920"/>
-            <a:ext cx="10911535" cy="1143000"/>
-          </a:xfrm>
-          <a:prstGeom prst="rect">
-            <a:avLst/>
-          </a:prstGeom>
-          <a:solidFill>
-            <a:srgbClr val="FFFFFF"/>
-          </a:solidFill>
-          <a:ln w="12700">
-            <a:solidFill>
-              <a:srgbClr val="E4E7F2"/>
-            </a:solidFill>
-            <a:prstDash val="solid"/>
-          </a:ln>
-        </p:spPr>
-      </p:sp>
-      <p:sp>
-        <p:nvSpPr>
-          <p:cNvPr id="12" name="Shape 8"/>
-          <p:cNvSpPr/>
-          <p:nvPr/>
-        </p:nvSpPr>
-        <p:spPr>
-          <a:xfrm>
-            <a:off x="640080" y="5074920"/>
-            <a:ext cx="91440" cy="1143000"/>
-          </a:xfrm>
-          <a:prstGeom prst="rect">
-            <a:avLst/>
-          </a:prstGeom>
-          <a:solidFill>
-            <a:srgbClr val="B1420A"/>
-          </a:solidFill>
-          <a:ln/>
-        </p:spPr>
-      </p:sp>
-      <p:sp>
-        <p:nvSpPr>
-          <p:cNvPr id="13" name="Text 9"/>
-          <p:cNvSpPr/>
-          <p:nvPr/>
-        </p:nvSpPr>
-        <p:spPr>
-          <a:xfrm>
-            <a:off x="914400" y="5184648"/>
-            <a:ext cx="1828800" cy="320040"/>
-          </a:xfrm>
-          <a:prstGeom prst="rect">
-            <a:avLst/>
-          </a:prstGeom>
-          <a:noFill/>
-          <a:ln/>
-        </p:spPr>
-        <p:txBody>
-          <a:bodyPr wrap="square" rtlCol="0" anchor="ctr"/>
-          <a:lstStyle/>
-          <a:p>
-            <a:pPr indent="0" marL="0">
-              <a:buNone/>
-            </a:pPr>
-            <a:r>
-              <a:rPr lang="en-US" sz="1400" b="1" dirty="0">
-                <a:solidFill>
-                  <a:srgbClr val="1E2235"/>
-                </a:solidFill>
-                <a:latin typeface="Microsoft JhengHei" pitchFamily="34" charset="0"/>
-                <a:ea typeface="Microsoft JhengHei" pitchFamily="34" charset="-122"/>
-                <a:cs typeface="Microsoft JhengHei" pitchFamily="34" charset="-120"/>
-              </a:rPr>
-              <a:t>產出驗收</a:t>
-            </a:r>
-            <a:endParaRPr lang="en-US" sz="1400" dirty="0"/>
-          </a:p>
-        </p:txBody>
-      </p:sp>
-      <p:pic>
-        <p:nvPicPr>
-          <p:cNvPr id="14" name="Image 2" descr="preencoded.png">    </p:cNvPr>
-          <p:cNvPicPr>
-            <a:picLocks noChangeAspect="1"/>
-          </p:cNvPicPr>
-          <p:nvPr/>
-        </p:nvPicPr>
-        <p:blipFill>
-          <a:blip r:embed="rId3"/>
-          <a:stretch>
-            <a:fillRect/>
-          </a:stretch>
-        </p:blipFill>
-        <p:spPr>
-          <a:xfrm>
-            <a:off x="2834640" y="5221224"/>
-            <a:ext cx="182880" cy="182880"/>
-          </a:xfrm>
-          <a:prstGeom prst="rect">
-            <a:avLst/>
-          </a:prstGeom>
-        </p:spPr>
-      </p:pic>
-      <p:sp>
-        <p:nvSpPr>
-          <p:cNvPr id="15" name="Text 10"/>
-          <p:cNvSpPr/>
-          <p:nvPr/>
-        </p:nvSpPr>
-        <p:spPr>
-          <a:xfrm>
-            <a:off x="3108960" y="5166360"/>
-            <a:ext cx="8168335" cy="310896"/>
-          </a:xfrm>
-          <a:prstGeom prst="rect">
-            <a:avLst/>
-          </a:prstGeom>
-          <a:noFill/>
-          <a:ln/>
-        </p:spPr>
-        <p:txBody>
-          <a:bodyPr wrap="square" rtlCol="0" anchor="ctr"/>
-          <a:lstStyle/>
-          <a:p>
-            <a:pPr indent="0" marL="0">
-              <a:buNone/>
-            </a:pPr>
-            <a:r>
-              <a:rPr lang="en-US" sz="1300" dirty="0">
-                <a:solidFill>
-                  <a:srgbClr val="1E2235"/>
-                </a:solidFill>
-                <a:latin typeface="Microsoft JhengHei" pitchFamily="34" charset="0"/>
-                <a:ea typeface="Microsoft JhengHei" pitchFamily="34" charset="-122"/>
-                <a:cs typeface="Microsoft JhengHei" pitchFamily="34" charset="-120"/>
-              </a:rPr>
-              <a:t>沒有上傳任何附件，Cowork 完全靠自己撈信箱與 OneDrive 取得素材</a:t>
-            </a:r>
-            <a:endParaRPr lang="en-US" sz="1300" dirty="0"/>
-          </a:p>
-        </p:txBody>
-      </p:sp>
-      <p:pic>
-        <p:nvPicPr>
-          <p:cNvPr id="16" name="Image 3" descr="preencoded.png">    </p:cNvPr>
-          <p:cNvPicPr>
-            <a:picLocks noChangeAspect="1"/>
-          </p:cNvPicPr>
-          <p:nvPr/>
-        </p:nvPicPr>
-        <p:blipFill>
-          <a:blip r:embed="rId4"/>
-          <a:stretch>
-            <a:fillRect/>
-          </a:stretch>
-        </p:blipFill>
-        <p:spPr>
-          <a:xfrm>
-            <a:off x="2834640" y="5559552"/>
-            <a:ext cx="182880" cy="182880"/>
-          </a:xfrm>
-          <a:prstGeom prst="rect">
-            <a:avLst/>
-          </a:prstGeom>
-        </p:spPr>
-      </p:pic>
-      <p:sp>
-        <p:nvSpPr>
-          <p:cNvPr id="17" name="Text 11"/>
-          <p:cNvSpPr/>
-          <p:nvPr/>
-        </p:nvSpPr>
-        <p:spPr>
-          <a:xfrm>
-            <a:off x="3108960" y="5504688"/>
-            <a:ext cx="8168335" cy="310896"/>
-          </a:xfrm>
-          <a:prstGeom prst="rect">
-            <a:avLst/>
-          </a:prstGeom>
-          <a:noFill/>
-          <a:ln/>
-        </p:spPr>
-        <p:txBody>
-          <a:bodyPr wrap="square" rtlCol="0" anchor="ctr"/>
-          <a:lstStyle/>
-          <a:p>
-            <a:pPr indent="0" marL="0">
-              <a:buNone/>
-            </a:pPr>
-            <a:r>
-              <a:rPr lang="en-US" sz="1300" dirty="0">
-                <a:solidFill>
-                  <a:srgbClr val="1E2235"/>
-                </a:solidFill>
-                <a:latin typeface="Microsoft JhengHei" pitchFamily="34" charset="0"/>
-                <a:ea typeface="Microsoft JhengHei" pitchFamily="34" charset="-122"/>
-                <a:cs typeface="Microsoft JhengHei" pitchFamily="34" charset="-120"/>
-              </a:rPr>
-              <a:t>鴻昇精密被判定符合條件 1 與條件 2，並列出所有佐證批號與各批不良率</a:t>
-            </a:r>
-            <a:endParaRPr lang="en-US" sz="1300" dirty="0"/>
-          </a:p>
-        </p:txBody>
-      </p:sp>
-      <p:pic>
-        <p:nvPicPr>
-          <p:cNvPr id="18" name="Image 4" descr="preencoded.png">    </p:cNvPr>
-          <p:cNvPicPr>
-            <a:picLocks noChangeAspect="1"/>
-          </p:cNvPicPr>
-          <p:nvPr/>
-        </p:nvPicPr>
-        <p:blipFill>
-          <a:blip r:embed="rId5"/>
-          <a:stretch>
-            <a:fillRect/>
-          </a:stretch>
-        </p:blipFill>
-        <p:spPr>
-          <a:xfrm>
-            <a:off x="2834640" y="5897880"/>
-            <a:ext cx="182880" cy="182880"/>
-          </a:xfrm>
-          <a:prstGeom prst="rect">
-            <a:avLst/>
-          </a:prstGeom>
-        </p:spPr>
-      </p:pic>
-      <p:sp>
-        <p:nvSpPr>
-          <p:cNvPr id="19" name="Text 12"/>
-          <p:cNvSpPr/>
-          <p:nvPr/>
-        </p:nvSpPr>
-        <p:spPr>
-          <a:xfrm>
-            <a:off x="3108960" y="5843016"/>
-            <a:ext cx="8168335" cy="310896"/>
-          </a:xfrm>
-          <a:prstGeom prst="rect">
-            <a:avLst/>
-          </a:prstGeom>
-          <a:noFill/>
-          <a:ln/>
-        </p:spPr>
-        <p:txBody>
-          <a:bodyPr wrap="square" rtlCol="0" anchor="ctr"/>
-          <a:lstStyle/>
-          <a:p>
-            <a:pPr indent="0" marL="0">
-              <a:buNone/>
-            </a:pPr>
-            <a:r>
-              <a:rPr lang="en-US" sz="1300" dirty="0">
-                <a:solidFill>
-                  <a:srgbClr val="1E2235"/>
-                </a:solidFill>
-                <a:latin typeface="Microsoft JhengHei" pitchFamily="34" charset="0"/>
-                <a:ea typeface="Microsoft JhengHei" pitchFamily="34" charset="-122"/>
-                <a:cs typeface="Microsoft JhengHei" pitchFamily="34" charset="-120"/>
-              </a:rPr>
-              <a:t>台鋼金屬被判定符合條件 3（涉及法規），無論不良率高低一律開立</a:t>
-            </a:r>
-            <a:endParaRPr lang="en-US" sz="1300" dirty="0"/>
-          </a:p>
-        </p:txBody>
-      </p:sp>
-      <p:sp>
-        <p:nvSpPr>
-          <p:cNvPr id="20" name="Text 13"/>
-          <p:cNvSpPr/>
-          <p:nvPr/>
-        </p:nvSpPr>
-        <p:spPr>
-          <a:xfrm>
-            <a:off x="640080" y="6473952"/>
-            <a:ext cx="5486400" cy="274320"/>
-          </a:xfrm>
-          <a:prstGeom prst="rect">
-            <a:avLst/>
-          </a:prstGeom>
-          <a:noFill/>
-          <a:ln/>
-        </p:spPr>
-        <p:txBody>
-          <a:bodyPr wrap="square" rtlCol="0" anchor="ctr"/>
-          <a:lstStyle/>
-          <a:p>
-            <a:pPr algn="l" indent="0" marL="0">
-              <a:buNone/>
-            </a:pPr>
-            <a:r>
-              <a:rPr lang="en-US" sz="900" dirty="0">
-                <a:solidFill>
-                  <a:srgbClr val="5B6079"/>
-                </a:solidFill>
-                <a:latin typeface="Microsoft JhengHei" pitchFamily="34" charset="0"/>
-                <a:ea typeface="Microsoft JhengHei" pitchFamily="34" charset="-122"/>
-                <a:cs typeface="Microsoft JhengHei" pitchFamily="34" charset="-120"/>
-              </a:rPr>
-              <a:t>Microsoft 365 Copilot Cowork</a:t>
-            </a:r>
-            <a:endParaRPr lang="en-US" sz="900" dirty="0"/>
-          </a:p>
-        </p:txBody>
-      </p:sp>
-      <p:sp>
-        <p:nvSpPr>
-          <p:cNvPr id="21" name="Text 14"/>
-          <p:cNvSpPr/>
-          <p:nvPr/>
-        </p:nvSpPr>
-        <p:spPr>
-          <a:xfrm>
-            <a:off x="11002975" y="6473952"/>
-            <a:ext cx="548640" cy="274320"/>
-          </a:xfrm>
-          <a:prstGeom prst="rect">
-            <a:avLst/>
-          </a:prstGeom>
-          <a:noFill/>
-          <a:ln/>
-        </p:spPr>
-        <p:txBody>
-          <a:bodyPr wrap="square" rtlCol="0" anchor="ctr"/>
-          <a:lstStyle/>
-          <a:p>
-            <a:pPr algn="r" indent="0" marL="0">
-              <a:buNone/>
-            </a:pPr>
-            <a:r>
-              <a:rPr lang="en-US" sz="900" dirty="0">
-                <a:solidFill>
-                  <a:srgbClr val="5B6079"/>
                 </a:solidFill>
                 <a:latin typeface="Microsoft JhengHei" pitchFamily="34" charset="0"/>
                 <a:ea typeface="Microsoft JhengHei" pitchFamily="34" charset="-122"/>
